--- a/docs/Medicus-presentasjon.pptx
+++ b/docs/Medicus-presentasjon.pptx
@@ -33,9 +33,15 @@
     <p:sldId id="281" r:id="rId27"/>
     <p:sldId id="282" r:id="rId28"/>
     <p:sldId id="283" r:id="rId29"/>
+    <p:sldId id="284" r:id="rId30"/>
+    <p:sldId id="285" r:id="rId31"/>
+    <p:sldId id="286" r:id="rId32"/>
+    <p:sldId id="287" r:id="rId33"/>
+    <p:sldId id="288" r:id="rId34"/>
+    <p:sldId id="289" r:id="rId35"/>
   </p:sldIdLst>
   <p:notesMasterIdLst>
-    <p:notesMasterId r:id="rId30"/>
+    <p:notesMasterId r:id="rId36"/>
   </p:notesMasterIdLst>
   <p:sldSz cx="12192000" cy="6858000"/>
   <p:notesSz cx="6858000" cy="12192000"/>
@@ -134,40 +140,40 @@
   <p:extLst>
     <p:ext uri="{521415D9-36F7-43E2-AB2F-B90AF26B5E84}">
       <p14:sectionLst xmlns:p14="http://schemas.microsoft.com/office/powerpoint/2010/main">
-        <p14:section name="Innledning" id="{4d1463b6-6921-0ab2-3826-c652943d48c4}">
+        <p14:section name="Innledning" id="{cc544c30-41a6-0199-eef6-a896d7196372}">
           <p14:sldIdLst>
             <p14:sldId id="256"/>
             <p14:sldId id="257"/>
           </p14:sldIdLst>
         </p14:section>
-        <p14:section name="Oppstart" id="{567bc71a-5fb8-3007-6ab3-dcba29a002e2}">
+        <p14:section name="Oppstart" id="{78302587-bdb0-fcf0-8da9-4d50ab784c6b}">
           <p14:sldIdLst>
             <p14:sldId id="258"/>
             <p14:sldId id="259"/>
             <p14:sldId id="260"/>
           </p14:sldIdLst>
         </p14:section>
-        <p14:section name="Innlogging" id="{b32caed6-afd1-e22a-d1cd-3abeebcb5b95}">
+        <p14:section name="Innlogging" id="{0c3a35ef-c3ca-2602-1019-608d482e0028}">
           <p14:sldIdLst>
             <p14:sldId id="261"/>
             <p14:sldId id="262"/>
             <p14:sldId id="263"/>
             <p14:sldId id="264"/>
             <p14:sldId id="265"/>
+            <p14:sldId id="266"/>
           </p14:sldIdLst>
         </p14:section>
-        <p14:section name="Skrivebordet" id="{77682c3a-6ade-9c2a-cd05-0d118ce80acc}">
+        <p14:section name="Skrivebordet" id="{f8faa296-d387-04b1-ff72-860ba17470e6}">
           <p14:sldIdLst>
-            <p14:sldId id="266"/>
             <p14:sldId id="267"/>
             <p14:sldId id="268"/>
             <p14:sldId id="269"/>
+            <p14:sldId id="270"/>
+            <p14:sldId id="271"/>
           </p14:sldIdLst>
         </p14:section>
-        <p14:section name="Applikasjoner" id="{90ae5f6e-159b-c065-dadd-f4f15333c8fd}">
+        <p14:section name="Applikasjoner" id="{a25cccd0-3792-0977-4fe4-cc734e9d8ee9}">
           <p14:sldIdLst>
-            <p14:sldId id="270"/>
-            <p14:sldId id="271"/>
             <p14:sldId id="272"/>
             <p14:sldId id="273"/>
             <p14:sldId id="274"/>
@@ -175,19 +181,29 @@
             <p14:sldId id="276"/>
             <p14:sldId id="277"/>
             <p14:sldId id="278"/>
+            <p14:sldId id="279"/>
+            <p14:sldId id="280"/>
+            <p14:sldId id="281"/>
           </p14:sldIdLst>
         </p14:section>
-        <p14:section name="Sikkerhet" id="{92f88316-ba14-687e-d410-8c3fb3576e9d}">
+        <p14:section name="Sikkerhet" id="{91a05da8-f915-7ec3-cb78-02be722053ba}">
           <p14:sldIdLst>
-            <p14:sldId id="279"/>
-            <p14:sldId id="280"/>
+            <p14:sldId id="282"/>
+            <p14:sldId id="283"/>
           </p14:sldIdLst>
         </p14:section>
-        <p14:section name="Avslutning" id="{0f0e417a-fb07-7849-54d5-035af134945f}">
+        <p14:section name="Avslutning" id="{5cd5001b-75b7-93da-ea5e-d051b39b7f12}">
           <p14:sldIdLst>
-            <p14:sldId id="281"/>
-            <p14:sldId id="282"/>
-            <p14:sldId id="283"/>
+            <p14:sldId id="284"/>
+            <p14:sldId id="285"/>
+          </p14:sldIdLst>
+        </p14:section>
+        <p14:section name="Pilot" id="{7e576bcf-0e00-1838-bd03-05c918706248}">
+          <p14:sldIdLst>
+            <p14:sldId id="286"/>
+            <p14:sldId id="287"/>
+            <p14:sldId id="288"/>
+            <p14:sldId id="289"/>
           </p14:sldIdLst>
         </p14:section>
       </p14:sectionLst>
@@ -594,7 +610,7 @@
           <a:p>
             <a:r>
               <a:rPr lang="en-US" dirty="0"/>
-              <a:t>Medicus er et Linux-basert operativsystem for norsk helsevesen. Alt i presentasjonen er skjermbilder fra systemet slik det kjører, med syntetiske testpasienter og simulerte helsepersonellkort.</a:t>
+              <a:t>Medicus er et Linux-basert operativsystem for norsk helsevesen. Alt i presentasjonen er skjermbilder fra systemet slik det kjører, med syntetiske testpasienter og simulerte helsepersonellkort. Systemet er på norsk, med engelsk som valg på innloggingsskjermen.</a:t>
             </a:r>
             <a:endParaRPr lang="en-US" dirty="0"/>
           </a:p>
@@ -2396,6 +2412,94 @@
 </p:notes>
 </file>
 
+<file path=ppt/notesSlides/notesSlide29.xml><?xml version="1.0" encoding="utf-8"?>
+<p:notes xmlns:a="http://schemas.openxmlformats.org/drawingml/2006/main" xmlns:r="http://schemas.openxmlformats.org/officeDocument/2006/relationships" xmlns:p="http://schemas.openxmlformats.org/presentationml/2006/main">
+  <p:cSld>
+    <p:spTree>
+      <p:nvGrpSpPr>
+        <p:cNvPr id="1" name=""/>
+        <p:cNvGrpSpPr/>
+        <p:nvPr/>
+      </p:nvGrpSpPr>
+      <p:grpSpPr>
+        <a:xfrm>
+          <a:off x="0" y="0"/>
+          <a:ext cx="0" cy="0"/>
+          <a:chOff x="0" y="0"/>
+          <a:chExt cx="0" cy="0"/>
+        </a:xfrm>
+      </p:grpSpPr>
+      <p:sp>
+        <p:nvSpPr>
+          <p:cNvPr id="2" name="Slide Image Placeholder 1"/>
+          <p:cNvSpPr>
+            <a:spLocks noGrp="1" noRot="1" noChangeAspect="1"/>
+          </p:cNvSpPr>
+          <p:nvPr>
+            <p:ph type="sldImg"/>
+          </p:nvPr>
+        </p:nvSpPr>
+        <p:spPr/>
+      </p:sp>
+      <p:sp>
+        <p:nvSpPr>
+          <p:cNvPr id="3" name="Notes Placeholder 2"/>
+          <p:cNvSpPr>
+            <a:spLocks noGrp="1"/>
+          </p:cNvSpPr>
+          <p:nvPr>
+            <p:ph type="body" idx="1"/>
+          </p:nvPr>
+        </p:nvSpPr>
+        <p:spPr/>
+        <p:txBody>
+          <a:bodyPr/>
+          <a:lstStyle/>
+          <a:p>
+            <a:r>
+              <a:rPr lang="en-US" dirty="0"/>
+              <a:t/>
+            </a:r>
+            <a:endParaRPr lang="en-US" dirty="0"/>
+          </a:p>
+        </p:txBody>
+      </p:sp>
+      <p:sp>
+        <p:nvSpPr>
+          <p:cNvPr id="4" name="Slide Number Placeholder 3"/>
+          <p:cNvSpPr>
+            <a:spLocks noGrp="1"/>
+          </p:cNvSpPr>
+          <p:nvPr>
+            <p:ph type="sldNum" sz="quarter" idx="10"/>
+          </p:nvPr>
+        </p:nvSpPr>
+        <p:spPr/>
+        <p:txBody>
+          <a:bodyPr/>
+          <a:lstStyle/>
+          <a:p>
+            <a:fld id="{F7021451-1387-4CA6-816F-3879F97B5CBC}" type="slidenum">
+              <a:rPr lang="en-US"/>
+              <a:t>29</a:t>
+            </a:fld>
+            <a:endParaRPr lang="en-US"/>
+          </a:p>
+        </p:txBody>
+      </p:sp>
+    </p:spTree>
+    <p:extLst>
+      <p:ext uri="{BB962C8B-B14F-4D97-AF65-F5344CB8AC3E}">
+        <p14:creationId xmlns:p14="http://schemas.microsoft.com/office/powerpoint/2010/main" val="1024086991"/>
+      </p:ext>
+    </p:extLst>
+  </p:cSld>
+  <p:clrMapOvr>
+    <a:masterClrMapping/>
+  </p:clrMapOvr>
+</p:notes>
+</file>
+
 <file path=ppt/notesSlides/notesSlide3.xml><?xml version="1.0" encoding="utf-8"?>
 <p:notes xmlns:a="http://schemas.openxmlformats.org/drawingml/2006/main" xmlns:r="http://schemas.openxmlformats.org/officeDocument/2006/relationships" xmlns:p="http://schemas.openxmlformats.org/presentationml/2006/main">
   <p:cSld>
@@ -2466,6 +2570,446 @@
             <a:fld id="{F7021451-1387-4CA6-816F-3879F97B5CBC}" type="slidenum">
               <a:rPr lang="en-US"/>
               <a:t>3</a:t>
+            </a:fld>
+            <a:endParaRPr lang="en-US"/>
+          </a:p>
+        </p:txBody>
+      </p:sp>
+    </p:spTree>
+    <p:extLst>
+      <p:ext uri="{BB962C8B-B14F-4D97-AF65-F5344CB8AC3E}">
+        <p14:creationId xmlns:p14="http://schemas.microsoft.com/office/powerpoint/2010/main" val="1024086991"/>
+      </p:ext>
+    </p:extLst>
+  </p:cSld>
+  <p:clrMapOvr>
+    <a:masterClrMapping/>
+  </p:clrMapOvr>
+</p:notes>
+</file>
+
+<file path=ppt/notesSlides/notesSlide30.xml><?xml version="1.0" encoding="utf-8"?>
+<p:notes xmlns:a="http://schemas.openxmlformats.org/drawingml/2006/main" xmlns:r="http://schemas.openxmlformats.org/officeDocument/2006/relationships" xmlns:p="http://schemas.openxmlformats.org/presentationml/2006/main">
+  <p:cSld>
+    <p:spTree>
+      <p:nvGrpSpPr>
+        <p:cNvPr id="1" name=""/>
+        <p:cNvGrpSpPr/>
+        <p:nvPr/>
+      </p:nvGrpSpPr>
+      <p:grpSpPr>
+        <a:xfrm>
+          <a:off x="0" y="0"/>
+          <a:ext cx="0" cy="0"/>
+          <a:chOff x="0" y="0"/>
+          <a:chExt cx="0" cy="0"/>
+        </a:xfrm>
+      </p:grpSpPr>
+      <p:sp>
+        <p:nvSpPr>
+          <p:cNvPr id="2" name="Slide Image Placeholder 1"/>
+          <p:cNvSpPr>
+            <a:spLocks noGrp="1" noRot="1" noChangeAspect="1"/>
+          </p:cNvSpPr>
+          <p:nvPr>
+            <p:ph type="sldImg"/>
+          </p:nvPr>
+        </p:nvSpPr>
+        <p:spPr/>
+      </p:sp>
+      <p:sp>
+        <p:nvSpPr>
+          <p:cNvPr id="3" name="Notes Placeholder 2"/>
+          <p:cNvSpPr>
+            <a:spLocks noGrp="1"/>
+          </p:cNvSpPr>
+          <p:nvPr>
+            <p:ph type="body" idx="1"/>
+          </p:nvPr>
+        </p:nvSpPr>
+        <p:spPr/>
+        <p:txBody>
+          <a:bodyPr/>
+          <a:lstStyle/>
+          <a:p>
+            <a:r>
+              <a:rPr lang="en-US" dirty="0"/>
+              <a:t/>
+            </a:r>
+            <a:endParaRPr lang="en-US" dirty="0"/>
+          </a:p>
+        </p:txBody>
+      </p:sp>
+      <p:sp>
+        <p:nvSpPr>
+          <p:cNvPr id="4" name="Slide Number Placeholder 3"/>
+          <p:cNvSpPr>
+            <a:spLocks noGrp="1"/>
+          </p:cNvSpPr>
+          <p:nvPr>
+            <p:ph type="sldNum" sz="quarter" idx="10"/>
+          </p:nvPr>
+        </p:nvSpPr>
+        <p:spPr/>
+        <p:txBody>
+          <a:bodyPr/>
+          <a:lstStyle/>
+          <a:p>
+            <a:fld id="{F7021451-1387-4CA6-816F-3879F97B5CBC}" type="slidenum">
+              <a:rPr lang="en-US"/>
+              <a:t>30</a:t>
+            </a:fld>
+            <a:endParaRPr lang="en-US"/>
+          </a:p>
+        </p:txBody>
+      </p:sp>
+    </p:spTree>
+    <p:extLst>
+      <p:ext uri="{BB962C8B-B14F-4D97-AF65-F5344CB8AC3E}">
+        <p14:creationId xmlns:p14="http://schemas.microsoft.com/office/powerpoint/2010/main" val="1024086991"/>
+      </p:ext>
+    </p:extLst>
+  </p:cSld>
+  <p:clrMapOvr>
+    <a:masterClrMapping/>
+  </p:clrMapOvr>
+</p:notes>
+</file>
+
+<file path=ppt/notesSlides/notesSlide31.xml><?xml version="1.0" encoding="utf-8"?>
+<p:notes xmlns:a="http://schemas.openxmlformats.org/drawingml/2006/main" xmlns:r="http://schemas.openxmlformats.org/officeDocument/2006/relationships" xmlns:p="http://schemas.openxmlformats.org/presentationml/2006/main">
+  <p:cSld>
+    <p:spTree>
+      <p:nvGrpSpPr>
+        <p:cNvPr id="1" name=""/>
+        <p:cNvGrpSpPr/>
+        <p:nvPr/>
+      </p:nvGrpSpPr>
+      <p:grpSpPr>
+        <a:xfrm>
+          <a:off x="0" y="0"/>
+          <a:ext cx="0" cy="0"/>
+          <a:chOff x="0" y="0"/>
+          <a:chExt cx="0" cy="0"/>
+        </a:xfrm>
+      </p:grpSpPr>
+      <p:sp>
+        <p:nvSpPr>
+          <p:cNvPr id="2" name="Slide Image Placeholder 1"/>
+          <p:cNvSpPr>
+            <a:spLocks noGrp="1" noRot="1" noChangeAspect="1"/>
+          </p:cNvSpPr>
+          <p:nvPr>
+            <p:ph type="sldImg"/>
+          </p:nvPr>
+        </p:nvSpPr>
+        <p:spPr/>
+      </p:sp>
+      <p:sp>
+        <p:nvSpPr>
+          <p:cNvPr id="3" name="Notes Placeholder 2"/>
+          <p:cNvSpPr>
+            <a:spLocks noGrp="1"/>
+          </p:cNvSpPr>
+          <p:nvPr>
+            <p:ph type="body" idx="1"/>
+          </p:nvPr>
+        </p:nvSpPr>
+        <p:spPr/>
+        <p:txBody>
+          <a:bodyPr/>
+          <a:lstStyle/>
+          <a:p>
+            <a:r>
+              <a:rPr lang="en-US" dirty="0"/>
+              <a:t/>
+            </a:r>
+            <a:endParaRPr lang="en-US" dirty="0"/>
+          </a:p>
+        </p:txBody>
+      </p:sp>
+      <p:sp>
+        <p:nvSpPr>
+          <p:cNvPr id="4" name="Slide Number Placeholder 3"/>
+          <p:cNvSpPr>
+            <a:spLocks noGrp="1"/>
+          </p:cNvSpPr>
+          <p:nvPr>
+            <p:ph type="sldNum" sz="quarter" idx="10"/>
+          </p:nvPr>
+        </p:nvSpPr>
+        <p:spPr/>
+        <p:txBody>
+          <a:bodyPr/>
+          <a:lstStyle/>
+          <a:p>
+            <a:fld id="{F7021451-1387-4CA6-816F-3879F97B5CBC}" type="slidenum">
+              <a:rPr lang="en-US"/>
+              <a:t>31</a:t>
+            </a:fld>
+            <a:endParaRPr lang="en-US"/>
+          </a:p>
+        </p:txBody>
+      </p:sp>
+    </p:spTree>
+    <p:extLst>
+      <p:ext uri="{BB962C8B-B14F-4D97-AF65-F5344CB8AC3E}">
+        <p14:creationId xmlns:p14="http://schemas.microsoft.com/office/powerpoint/2010/main" val="1024086991"/>
+      </p:ext>
+    </p:extLst>
+  </p:cSld>
+  <p:clrMapOvr>
+    <a:masterClrMapping/>
+  </p:clrMapOvr>
+</p:notes>
+</file>
+
+<file path=ppt/notesSlides/notesSlide32.xml><?xml version="1.0" encoding="utf-8"?>
+<p:notes xmlns:a="http://schemas.openxmlformats.org/drawingml/2006/main" xmlns:r="http://schemas.openxmlformats.org/officeDocument/2006/relationships" xmlns:p="http://schemas.openxmlformats.org/presentationml/2006/main">
+  <p:cSld>
+    <p:spTree>
+      <p:nvGrpSpPr>
+        <p:cNvPr id="1" name=""/>
+        <p:cNvGrpSpPr/>
+        <p:nvPr/>
+      </p:nvGrpSpPr>
+      <p:grpSpPr>
+        <a:xfrm>
+          <a:off x="0" y="0"/>
+          <a:ext cx="0" cy="0"/>
+          <a:chOff x="0" y="0"/>
+          <a:chExt cx="0" cy="0"/>
+        </a:xfrm>
+      </p:grpSpPr>
+      <p:sp>
+        <p:nvSpPr>
+          <p:cNvPr id="2" name="Slide Image Placeholder 1"/>
+          <p:cNvSpPr>
+            <a:spLocks noGrp="1" noRot="1" noChangeAspect="1"/>
+          </p:cNvSpPr>
+          <p:nvPr>
+            <p:ph type="sldImg"/>
+          </p:nvPr>
+        </p:nvSpPr>
+        <p:spPr/>
+      </p:sp>
+      <p:sp>
+        <p:nvSpPr>
+          <p:cNvPr id="3" name="Notes Placeholder 2"/>
+          <p:cNvSpPr>
+            <a:spLocks noGrp="1"/>
+          </p:cNvSpPr>
+          <p:nvPr>
+            <p:ph type="body" idx="1"/>
+          </p:nvPr>
+        </p:nvSpPr>
+        <p:spPr/>
+        <p:txBody>
+          <a:bodyPr/>
+          <a:lstStyle/>
+          <a:p>
+            <a:r>
+              <a:rPr lang="en-US" dirty="0"/>
+              <a:t>Demolenke: https://federation-only-emerald-planets.trycloudflare.com/demo – PIN 1234 for alle demokort.</a:t>
+            </a:r>
+            <a:endParaRPr lang="en-US" dirty="0"/>
+          </a:p>
+        </p:txBody>
+      </p:sp>
+      <p:sp>
+        <p:nvSpPr>
+          <p:cNvPr id="4" name="Slide Number Placeholder 3"/>
+          <p:cNvSpPr>
+            <a:spLocks noGrp="1"/>
+          </p:cNvSpPr>
+          <p:nvPr>
+            <p:ph type="sldNum" sz="quarter" idx="10"/>
+          </p:nvPr>
+        </p:nvSpPr>
+        <p:spPr/>
+        <p:txBody>
+          <a:bodyPr/>
+          <a:lstStyle/>
+          <a:p>
+            <a:fld id="{F7021451-1387-4CA6-816F-3879F97B5CBC}" type="slidenum">
+              <a:rPr lang="en-US"/>
+              <a:t>32</a:t>
+            </a:fld>
+            <a:endParaRPr lang="en-US"/>
+          </a:p>
+        </p:txBody>
+      </p:sp>
+    </p:spTree>
+    <p:extLst>
+      <p:ext uri="{BB962C8B-B14F-4D97-AF65-F5344CB8AC3E}">
+        <p14:creationId xmlns:p14="http://schemas.microsoft.com/office/powerpoint/2010/main" val="1024086991"/>
+      </p:ext>
+    </p:extLst>
+  </p:cSld>
+  <p:clrMapOvr>
+    <a:masterClrMapping/>
+  </p:clrMapOvr>
+</p:notes>
+</file>
+
+<file path=ppt/notesSlides/notesSlide33.xml><?xml version="1.0" encoding="utf-8"?>
+<p:notes xmlns:a="http://schemas.openxmlformats.org/drawingml/2006/main" xmlns:r="http://schemas.openxmlformats.org/officeDocument/2006/relationships" xmlns:p="http://schemas.openxmlformats.org/presentationml/2006/main">
+  <p:cSld>
+    <p:spTree>
+      <p:nvGrpSpPr>
+        <p:cNvPr id="1" name=""/>
+        <p:cNvGrpSpPr/>
+        <p:nvPr/>
+      </p:nvGrpSpPr>
+      <p:grpSpPr>
+        <a:xfrm>
+          <a:off x="0" y="0"/>
+          <a:ext cx="0" cy="0"/>
+          <a:chOff x="0" y="0"/>
+          <a:chExt cx="0" cy="0"/>
+        </a:xfrm>
+      </p:grpSpPr>
+      <p:sp>
+        <p:nvSpPr>
+          <p:cNvPr id="2" name="Slide Image Placeholder 1"/>
+          <p:cNvSpPr>
+            <a:spLocks noGrp="1" noRot="1" noChangeAspect="1"/>
+          </p:cNvSpPr>
+          <p:nvPr>
+            <p:ph type="sldImg"/>
+          </p:nvPr>
+        </p:nvSpPr>
+        <p:spPr/>
+      </p:sp>
+      <p:sp>
+        <p:nvSpPr>
+          <p:cNvPr id="3" name="Notes Placeholder 2"/>
+          <p:cNvSpPr>
+            <a:spLocks noGrp="1"/>
+          </p:cNvSpPr>
+          <p:nvPr>
+            <p:ph type="body" idx="1"/>
+          </p:nvPr>
+        </p:nvSpPr>
+        <p:spPr/>
+        <p:txBody>
+          <a:bodyPr/>
+          <a:lstStyle/>
+          <a:p>
+            <a:r>
+              <a:rPr lang="en-US" dirty="0"/>
+              <a:t/>
+            </a:r>
+            <a:endParaRPr lang="en-US" dirty="0"/>
+          </a:p>
+        </p:txBody>
+      </p:sp>
+      <p:sp>
+        <p:nvSpPr>
+          <p:cNvPr id="4" name="Slide Number Placeholder 3"/>
+          <p:cNvSpPr>
+            <a:spLocks noGrp="1"/>
+          </p:cNvSpPr>
+          <p:nvPr>
+            <p:ph type="sldNum" sz="quarter" idx="10"/>
+          </p:nvPr>
+        </p:nvSpPr>
+        <p:spPr/>
+        <p:txBody>
+          <a:bodyPr/>
+          <a:lstStyle/>
+          <a:p>
+            <a:fld id="{F7021451-1387-4CA6-816F-3879F97B5CBC}" type="slidenum">
+              <a:rPr lang="en-US"/>
+              <a:t>33</a:t>
+            </a:fld>
+            <a:endParaRPr lang="en-US"/>
+          </a:p>
+        </p:txBody>
+      </p:sp>
+    </p:spTree>
+    <p:extLst>
+      <p:ext uri="{BB962C8B-B14F-4D97-AF65-F5344CB8AC3E}">
+        <p14:creationId xmlns:p14="http://schemas.microsoft.com/office/powerpoint/2010/main" val="1024086991"/>
+      </p:ext>
+    </p:extLst>
+  </p:cSld>
+  <p:clrMapOvr>
+    <a:masterClrMapping/>
+  </p:clrMapOvr>
+</p:notes>
+</file>
+
+<file path=ppt/notesSlides/notesSlide34.xml><?xml version="1.0" encoding="utf-8"?>
+<p:notes xmlns:a="http://schemas.openxmlformats.org/drawingml/2006/main" xmlns:r="http://schemas.openxmlformats.org/officeDocument/2006/relationships" xmlns:p="http://schemas.openxmlformats.org/presentationml/2006/main">
+  <p:cSld>
+    <p:spTree>
+      <p:nvGrpSpPr>
+        <p:cNvPr id="1" name=""/>
+        <p:cNvGrpSpPr/>
+        <p:nvPr/>
+      </p:nvGrpSpPr>
+      <p:grpSpPr>
+        <a:xfrm>
+          <a:off x="0" y="0"/>
+          <a:ext cx="0" cy="0"/>
+          <a:chOff x="0" y="0"/>
+          <a:chExt cx="0" cy="0"/>
+        </a:xfrm>
+      </p:grpSpPr>
+      <p:sp>
+        <p:nvSpPr>
+          <p:cNvPr id="2" name="Slide Image Placeholder 1"/>
+          <p:cNvSpPr>
+            <a:spLocks noGrp="1" noRot="1" noChangeAspect="1"/>
+          </p:cNvSpPr>
+          <p:nvPr>
+            <p:ph type="sldImg"/>
+          </p:nvPr>
+        </p:nvSpPr>
+        <p:spPr/>
+      </p:sp>
+      <p:sp>
+        <p:nvSpPr>
+          <p:cNvPr id="3" name="Notes Placeholder 2"/>
+          <p:cNvSpPr>
+            <a:spLocks noGrp="1"/>
+          </p:cNvSpPr>
+          <p:nvPr>
+            <p:ph type="body" idx="1"/>
+          </p:nvPr>
+        </p:nvSpPr>
+        <p:spPr/>
+        <p:txBody>
+          <a:bodyPr/>
+          <a:lstStyle/>
+          <a:p>
+            <a:r>
+              <a:rPr lang="en-US" dirty="0"/>
+              <a:t/>
+            </a:r>
+            <a:endParaRPr lang="en-US" dirty="0"/>
+          </a:p>
+        </p:txBody>
+      </p:sp>
+      <p:sp>
+        <p:nvSpPr>
+          <p:cNvPr id="4" name="Slide Number Placeholder 3"/>
+          <p:cNvSpPr>
+            <a:spLocks noGrp="1"/>
+          </p:cNvSpPr>
+          <p:nvPr>
+            <p:ph type="sldNum" sz="quarter" idx="10"/>
+          </p:nvPr>
+        </p:nvSpPr>
+        <p:spPr/>
+        <p:txBody>
+          <a:bodyPr/>
+          <a:lstStyle/>
+          <a:p>
+            <a:fld id="{F7021451-1387-4CA6-816F-3879F97B5CBC}" type="slidenum">
+              <a:rPr lang="en-US"/>
+              <a:t>34</a:t>
             </a:fld>
             <a:endParaRPr lang="en-US"/>
           </a:p>
@@ -4157,7 +4701,7 @@
                   <a:schemeClr val="tx2"/>
                 </a:solidFill>
               </a:rPr>
-              <a:t>Nødtilgang</a:t>
+              <a:t>Arbeidsstedet følger PC-en</a:t>
             </a:r>
             <a:endParaRPr lang="en-US" sz="3200" dirty="0"/>
           </a:p>
@@ -4165,134 +4709,14 @@
       </p:sp>
       <p:sp>
         <p:nvSpPr>
-          <p:cNvPr id="3" name="Text 0"/>
+          <p:cNvPr id="3" name="Samme lege på Ullevål ramme"/>
           <p:cNvSpPr/>
-          <p:nvPr>
-            <p:ph idx="101" type="body" hasCustomPrompt="1"/>
-          </p:nvPr>
+          <p:nvPr/>
         </p:nvSpPr>
         <p:spPr>
           <a:xfrm>
             <a:off x="548640" y="1371600"/>
-            <a:ext cx="3657600" cy="4754880"/>
-          </a:xfrm>
-          <a:prstGeom prst="rect">
-            <a:avLst/>
-          </a:prstGeom>
-          <a:noFill/>
-          <a:ln/>
-        </p:spPr>
-        <p:txBody>
-          <a:bodyPr wrap="square" rtlCol="0" anchor="t"/>
-          <a:lstStyle/>
-          <a:p>
-            <a:pPr marL="342900" indent="-342900">
-              <a:spcAft>
-                <a:spcPts val="800"/>
-              </a:spcAft>
-              <a:buSzPct val="100000"/>
-              <a:buChar char="•"/>
-            </a:pPr>
-            <a:r>
-              <a:rPr lang="en-US" sz="1500" b="1" dirty="0">
-                <a:solidFill>
-                  <a:schemeClr val="tx1"/>
-                </a:solidFill>
-              </a:rPr>
-              <a:t>Kort + begrunnelse,</a:t>
-            </a:r>
-            <a:pPr indent="0" marL="0">
-              <a:spcAft>
-                <a:spcPts val="800"/>
-              </a:spcAft>
-              <a:buNone/>
-            </a:pPr>
-            <a:r>
-              <a:rPr lang="en-US" sz="1500" dirty="0">
-                <a:solidFill>
-                  <a:schemeClr val="tx1"/>
-                </a:solidFill>
-              </a:rPr>
-              <a:t> ingen PIN – for å spare tid.</a:t>
-            </a:r>
-            <a:endParaRPr lang="en-US" sz="1500" dirty="0"/>
-          </a:p>
-          <a:p>
-            <a:pPr marL="342900" indent="-342900">
-              <a:spcAft>
-                <a:spcPts val="800"/>
-              </a:spcAft>
-              <a:buSzPct val="100000"/>
-              <a:buChar char="•"/>
-            </a:pPr>
-            <a:r>
-              <a:rPr lang="en-US" sz="1500" b="1" dirty="0">
-                <a:solidFill>
-                  <a:schemeClr val="tx1"/>
-                </a:solidFill>
-              </a:rPr>
-              <a:t>Bare kritisk informasjon</a:t>
-            </a:r>
-            <a:pPr indent="0" marL="0">
-              <a:spcAft>
-                <a:spcPts val="800"/>
-              </a:spcAft>
-              <a:buNone/>
-            </a:pPr>
-            <a:r>
-              <a:rPr lang="en-US" sz="1500" dirty="0">
-                <a:solidFill>
-                  <a:schemeClr val="tx1"/>
-                </a:solidFill>
-              </a:rPr>
-              <a:t> i 30 minutter.</a:t>
-            </a:r>
-            <a:endParaRPr lang="en-US" sz="1500" dirty="0"/>
-          </a:p>
-          <a:p>
-            <a:pPr marL="342900" indent="-342900">
-              <a:spcAft>
-                <a:spcPts val="800"/>
-              </a:spcAft>
-              <a:buSzPct val="100000"/>
-              <a:buChar char="•"/>
-            </a:pPr>
-            <a:r>
-              <a:rPr lang="en-US" sz="1500" b="1" dirty="0">
-                <a:solidFill>
-                  <a:schemeClr val="tx1"/>
-                </a:solidFill>
-              </a:rPr>
-              <a:t>Logges med navn,</a:t>
-            </a:r>
-            <a:pPr indent="0" marL="0">
-              <a:spcAft>
-                <a:spcPts val="800"/>
-              </a:spcAft>
-              <a:buNone/>
-            </a:pPr>
-            <a:r>
-              <a:rPr lang="en-US" sz="1500" dirty="0">
-                <a:solidFill>
-                  <a:schemeClr val="tx1"/>
-                </a:solidFill>
-              </a:rPr>
-              <a:t> kontrolleres i etterkant, og pasienten varsles.</a:t>
-            </a:r>
-            <a:endParaRPr lang="en-US" sz="1500" dirty="0"/>
-          </a:p>
-        </p:txBody>
-      </p:sp>
-      <p:sp>
-        <p:nvSpPr>
-          <p:cNvPr id="4" name="Nødtilgang ramme"/>
-          <p:cNvSpPr/>
-          <p:nvPr/>
-        </p:nvSpPr>
-        <p:spPr>
-          <a:xfrm>
-            <a:off x="4526280" y="1371600"/>
-            <a:ext cx="7132320" cy="4457700"/>
+            <a:ext cx="5394960" cy="3203258"/>
           </a:xfrm>
           <a:prstGeom prst="rect">
             <a:avLst/>
@@ -4317,7 +4741,7 @@
       </p:sp>
       <p:pic>
         <p:nvPicPr>
-          <p:cNvPr id="5" name="Nødtilgang" descr="Nødtilgang">    </p:cNvPr>
+          <p:cNvPr id="4" name="Samme lege på Ullevål" descr="Samme lege på Ullevål">    </p:cNvPr>
           <p:cNvPicPr>
             <a:picLocks noChangeAspect="1"/>
           </p:cNvPicPr>
@@ -4331,14 +4755,178 @@
         </p:blipFill>
         <p:spPr>
           <a:xfrm>
-            <a:off x="4526280" y="1371600"/>
-            <a:ext cx="7132320" cy="4457700"/>
+            <a:off x="548640" y="1371600"/>
+            <a:ext cx="5394960" cy="3203258"/>
           </a:xfrm>
           <a:prstGeom prst="rect">
             <a:avLst/>
           </a:prstGeom>
         </p:spPr>
       </p:pic>
+      <p:sp>
+        <p:nvSpPr>
+          <p:cNvPr id="5" name="Samme lege på St. Olavs ramme"/>
+          <p:cNvSpPr/>
+          <p:nvPr/>
+        </p:nvSpPr>
+        <p:spPr>
+          <a:xfrm>
+            <a:off x="6245352" y="1371600"/>
+            <a:ext cx="5394960" cy="3203258"/>
+          </a:xfrm>
+          <a:prstGeom prst="rect">
+            <a:avLst/>
+          </a:prstGeom>
+          <a:solidFill>
+            <a:schemeClr val="bg1"/>
+          </a:solidFill>
+          <a:ln w="9525">
+            <a:solidFill>
+              <a:srgbClr val="D2DDD5"/>
+            </a:solidFill>
+            <a:prstDash val="solid"/>
+          </a:ln>
+          <a:effectLst>
+            <a:outerShdw sx="100000" sy="100000" kx="0" ky="0" algn="bl" rotWithShape="0" blurRad="101600" dist="38100" dir="5400000">
+              <a:srgbClr val="000000">
+                <a:alpha val="25000"/>
+              </a:srgbClr>
+            </a:outerShdw>
+          </a:effectLst>
+        </p:spPr>
+      </p:sp>
+      <p:pic>
+        <p:nvPicPr>
+          <p:cNvPr id="6" name="Samme lege på St. Olavs" descr="Samme lege på St. Olavs">    </p:cNvPr>
+          <p:cNvPicPr>
+            <a:picLocks noChangeAspect="1"/>
+          </p:cNvPicPr>
+          <p:nvPr/>
+        </p:nvPicPr>
+        <p:blipFill>
+          <a:blip r:embed="rId2"/>
+          <a:stretch>
+            <a:fillRect/>
+          </a:stretch>
+        </p:blipFill>
+        <p:spPr>
+          <a:xfrm>
+            <a:off x="6245352" y="1371600"/>
+            <a:ext cx="5394960" cy="3203258"/>
+          </a:xfrm>
+          <a:prstGeom prst="rect">
+            <a:avLst/>
+          </a:prstGeom>
+        </p:spPr>
+      </p:pic>
+      <p:sp>
+        <p:nvSpPr>
+          <p:cNvPr id="7" name="Text 3"/>
+          <p:cNvSpPr txBox="1"/>
+          <p:nvPr/>
+        </p:nvSpPr>
+        <p:spPr>
+          <a:xfrm>
+            <a:off x="548640" y="4892040"/>
+            <a:ext cx="5394960" cy="365760"/>
+          </a:xfrm>
+          <a:prstGeom prst="rect">
+            <a:avLst/>
+          </a:prstGeom>
+          <a:noFill/>
+          <a:ln/>
+        </p:spPr>
+        <p:txBody>
+          <a:bodyPr wrap="square" rtlCol="0" anchor="ctr"/>
+          <a:lstStyle/>
+          <a:p>
+            <a:pPr indent="0" marL="0">
+              <a:buNone/>
+            </a:pPr>
+            <a:r>
+              <a:rPr lang="en-US" sz="1500" b="1" dirty="0">
+                <a:solidFill>
+                  <a:schemeClr val="tx2"/>
+                </a:solidFill>
+              </a:rPr>
+              <a:t>Ullevål: Overlege, kardiologi</a:t>
+            </a:r>
+            <a:endParaRPr lang="en-US" sz="1500" dirty="0"/>
+          </a:p>
+        </p:txBody>
+      </p:sp>
+      <p:sp>
+        <p:nvSpPr>
+          <p:cNvPr id="8" name="Text 4"/>
+          <p:cNvSpPr txBox="1"/>
+          <p:nvPr/>
+        </p:nvSpPr>
+        <p:spPr>
+          <a:xfrm>
+            <a:off x="6245352" y="4892040"/>
+            <a:ext cx="5394960" cy="365760"/>
+          </a:xfrm>
+          <a:prstGeom prst="rect">
+            <a:avLst/>
+          </a:prstGeom>
+          <a:noFill/>
+          <a:ln/>
+        </p:spPr>
+        <p:txBody>
+          <a:bodyPr wrap="square" rtlCol="0" anchor="ctr"/>
+          <a:lstStyle/>
+          <a:p>
+            <a:pPr indent="0" marL="0">
+              <a:buNone/>
+            </a:pPr>
+            <a:r>
+              <a:rPr lang="en-US" sz="1500" b="1" dirty="0">
+                <a:solidFill>
+                  <a:schemeClr val="tx2"/>
+                </a:solidFill>
+              </a:rPr>
+              <a:t>St. Olavs: Gjesteoverlege, kardiologi</a:t>
+            </a:r>
+            <a:endParaRPr lang="en-US" sz="1500" dirty="0"/>
+          </a:p>
+        </p:txBody>
+      </p:sp>
+      <p:sp>
+        <p:nvSpPr>
+          <p:cNvPr id="9" name="Text 5"/>
+          <p:cNvSpPr txBox="1"/>
+          <p:nvPr/>
+        </p:nvSpPr>
+        <p:spPr>
+          <a:xfrm>
+            <a:off x="548640" y="5440680"/>
+            <a:ext cx="11064240" cy="457200"/>
+          </a:xfrm>
+          <a:prstGeom prst="rect">
+            <a:avLst/>
+          </a:prstGeom>
+          <a:noFill/>
+          <a:ln/>
+        </p:spPr>
+        <p:txBody>
+          <a:bodyPr wrap="square" rtlCol="0" anchor="ctr"/>
+          <a:lstStyle/>
+          <a:p>
+            <a:pPr indent="0" marL="0">
+              <a:buNone/>
+            </a:pPr>
+            <a:r>
+              <a:rPr lang="en-US" sz="1500" dirty="0">
+                <a:solidFill>
+                  <a:schemeClr val="tx1"/>
+                </a:solidFill>
+              </a:rPr>
+              <a:t>Kortet sier hvem du er. PC-en sier hvor du er. Stillingen hentes fra det arbeidsstedet.</a:t>
+            </a:r>
+            <a:endParaRPr lang="en-US" sz="1500" dirty="0"/>
+          </a:p>
+        </p:txBody>
+      </p:sp>
       <p:sp>
         <p:nvSpPr>
           <p:cNvPr id="25" name="Slide Number Placeholder 0"/>
@@ -4414,13 +5002,13 @@
           <p:cNvPr id="2" name="Text 0"/>
           <p:cNvSpPr/>
           <p:nvPr>
-            <p:ph idx="100" type="body" hasCustomPrompt="1"/>
-          </p:nvPr>
-        </p:nvSpPr>
-        <p:spPr>
-          <a:xfrm>
-            <a:off x="731520" y="2103120"/>
-            <a:ext cx="2743200" cy="1097280"/>
+            <p:ph idx="100" type="title" hasCustomPrompt="1"/>
+          </p:nvPr>
+        </p:nvSpPr>
+        <p:spPr>
+          <a:xfrm>
+            <a:off x="548640" y="365760"/>
+            <a:ext cx="11064240" cy="731520"/>
           </a:xfrm>
           <a:prstGeom prst="rect">
             <a:avLst/>
@@ -4432,18 +5020,18 @@
           <a:bodyPr wrap="square" rtlCol="0"/>
           <a:lstStyle/>
           <a:p>
-            <a:pPr indent="0" marL="0">
-              <a:buNone/>
-            </a:pPr>
-            <a:r>
-              <a:rPr lang="en-US" sz="6000" b="1" dirty="0">
-                <a:solidFill>
-                  <a:schemeClr val="accent2"/>
-                </a:solidFill>
-              </a:rPr>
-              <a:t>03</a:t>
-            </a:r>
-            <a:endParaRPr lang="en-US" sz="6000" dirty="0"/>
+            <a:pPr algn="l" indent="0" marL="0">
+              <a:buNone/>
+            </a:pPr>
+            <a:r>
+              <a:rPr lang="en-US" sz="3200" b="1" dirty="0">
+                <a:solidFill>
+                  <a:schemeClr val="tx2"/>
+                </a:solidFill>
+              </a:rPr>
+              <a:t>Nødtilgang</a:t>
+            </a:r>
+            <a:endParaRPr lang="en-US" sz="3200" dirty="0"/>
           </a:p>
         </p:txBody>
       </p:sp>
@@ -4452,13 +5040,13 @@
           <p:cNvPr id="3" name="Text 0"/>
           <p:cNvSpPr/>
           <p:nvPr>
-            <p:ph idx="101" type="title" hasCustomPrompt="1"/>
-          </p:nvPr>
-        </p:nvSpPr>
-        <p:spPr>
-          <a:xfrm>
-            <a:off x="731520" y="3108960"/>
-            <a:ext cx="10698480" cy="914400"/>
+            <p:ph idx="101" type="body" hasCustomPrompt="1"/>
+          </p:nvPr>
+        </p:nvSpPr>
+        <p:spPr>
+          <a:xfrm>
+            <a:off x="548640" y="1371600"/>
+            <a:ext cx="3657600" cy="4754880"/>
           </a:xfrm>
           <a:prstGeom prst="rect">
             <a:avLst/>
@@ -4467,59 +5055,204 @@
           <a:ln/>
         </p:spPr>
         <p:txBody>
-          <a:bodyPr wrap="square" rtlCol="0"/>
-          <a:lstStyle/>
-          <a:p>
-            <a:pPr algn="l" indent="0" marL="0">
-              <a:buNone/>
-            </a:pPr>
-            <a:r>
-              <a:rPr lang="en-US" sz="4000" b="1" dirty="0">
-                <a:solidFill>
-                  <a:schemeClr val="bg1"/>
-                </a:solidFill>
-              </a:rPr>
-              <a:t>Skrivebordet</a:t>
-            </a:r>
-            <a:endParaRPr lang="en-US" sz="4000" dirty="0"/>
-          </a:p>
-        </p:txBody>
-      </p:sp>
-      <p:sp>
-        <p:nvSpPr>
-          <p:cNvPr id="4" name="Text 0"/>
+          <a:bodyPr wrap="square" rtlCol="0" anchor="t"/>
+          <a:lstStyle/>
+          <a:p>
+            <a:pPr marL="342900" indent="-342900">
+              <a:spcAft>
+                <a:spcPts val="800"/>
+              </a:spcAft>
+              <a:buSzPct val="100000"/>
+              <a:buChar char="•"/>
+            </a:pPr>
+            <a:r>
+              <a:rPr lang="en-US" sz="1500" b="1" dirty="0">
+                <a:solidFill>
+                  <a:schemeClr val="tx1"/>
+                </a:solidFill>
+              </a:rPr>
+              <a:t>Kort + begrunnelse,</a:t>
+            </a:r>
+            <a:pPr indent="0" marL="0">
+              <a:spcAft>
+                <a:spcPts val="800"/>
+              </a:spcAft>
+              <a:buNone/>
+            </a:pPr>
+            <a:r>
+              <a:rPr lang="en-US" sz="1500" dirty="0">
+                <a:solidFill>
+                  <a:schemeClr val="tx1"/>
+                </a:solidFill>
+              </a:rPr>
+              <a:t> ingen PIN – for å spare tid.</a:t>
+            </a:r>
+            <a:endParaRPr lang="en-US" sz="1500" dirty="0"/>
+          </a:p>
+          <a:p>
+            <a:pPr marL="342900" indent="-342900">
+              <a:spcAft>
+                <a:spcPts val="800"/>
+              </a:spcAft>
+              <a:buSzPct val="100000"/>
+              <a:buChar char="•"/>
+            </a:pPr>
+            <a:r>
+              <a:rPr lang="en-US" sz="1500" b="1" dirty="0">
+                <a:solidFill>
+                  <a:schemeClr val="tx1"/>
+                </a:solidFill>
+              </a:rPr>
+              <a:t>Bare kritisk informasjon</a:t>
+            </a:r>
+            <a:pPr indent="0" marL="0">
+              <a:spcAft>
+                <a:spcPts val="800"/>
+              </a:spcAft>
+              <a:buNone/>
+            </a:pPr>
+            <a:r>
+              <a:rPr lang="en-US" sz="1500" dirty="0">
+                <a:solidFill>
+                  <a:schemeClr val="tx1"/>
+                </a:solidFill>
+              </a:rPr>
+              <a:t> i 30 minutter.</a:t>
+            </a:r>
+            <a:endParaRPr lang="en-US" sz="1500" dirty="0"/>
+          </a:p>
+          <a:p>
+            <a:pPr marL="342900" indent="-342900">
+              <a:spcAft>
+                <a:spcPts val="800"/>
+              </a:spcAft>
+              <a:buSzPct val="100000"/>
+              <a:buChar char="•"/>
+            </a:pPr>
+            <a:r>
+              <a:rPr lang="en-US" sz="1500" b="1" dirty="0">
+                <a:solidFill>
+                  <a:schemeClr val="tx1"/>
+                </a:solidFill>
+              </a:rPr>
+              <a:t>Logges med navn,</a:t>
+            </a:r>
+            <a:pPr indent="0" marL="0">
+              <a:spcAft>
+                <a:spcPts val="800"/>
+              </a:spcAft>
+              <a:buNone/>
+            </a:pPr>
+            <a:r>
+              <a:rPr lang="en-US" sz="1500" dirty="0">
+                <a:solidFill>
+                  <a:schemeClr val="tx1"/>
+                </a:solidFill>
+              </a:rPr>
+              <a:t> kontrolleres i etterkant, og pasienten varsles.</a:t>
+            </a:r>
+            <a:endParaRPr lang="en-US" sz="1500" dirty="0"/>
+          </a:p>
+        </p:txBody>
+      </p:sp>
+      <p:sp>
+        <p:nvSpPr>
+          <p:cNvPr id="4" name="Nødtilgang ramme"/>
           <p:cNvSpPr/>
-          <p:nvPr>
-            <p:ph idx="102" type="body" hasCustomPrompt="1"/>
-          </p:nvPr>
-        </p:nvSpPr>
-        <p:spPr>
-          <a:xfrm>
-            <a:off x="731520" y="4023360"/>
-            <a:ext cx="10698480" cy="822960"/>
-          </a:xfrm>
-          <a:prstGeom prst="rect">
-            <a:avLst/>
-          </a:prstGeom>
-          <a:noFill/>
-          <a:ln/>
-        </p:spPr>
-        <p:txBody>
-          <a:bodyPr wrap="square" rtlCol="0"/>
-          <a:lstStyle/>
-          <a:p>
-            <a:pPr indent="0" marL="0">
-              <a:buNone/>
-            </a:pPr>
-            <a:r>
-              <a:rPr lang="en-US" sz="1800" dirty="0">
-                <a:solidFill>
-                  <a:schemeClr val="accent2"/>
-                </a:solidFill>
-              </a:rPr>
-              <a:t>Startmeny, snarveier og standardprogrammer</a:t>
-            </a:r>
-            <a:endParaRPr lang="en-US" sz="1800" dirty="0"/>
+          <p:nvPr/>
+        </p:nvSpPr>
+        <p:spPr>
+          <a:xfrm>
+            <a:off x="4526280" y="1371600"/>
+            <a:ext cx="7132320" cy="4457700"/>
+          </a:xfrm>
+          <a:prstGeom prst="rect">
+            <a:avLst/>
+          </a:prstGeom>
+          <a:solidFill>
+            <a:schemeClr val="bg1"/>
+          </a:solidFill>
+          <a:ln w="9525">
+            <a:solidFill>
+              <a:srgbClr val="D2DDD5"/>
+            </a:solidFill>
+            <a:prstDash val="solid"/>
+          </a:ln>
+          <a:effectLst>
+            <a:outerShdw sx="100000" sy="100000" kx="0" ky="0" algn="bl" rotWithShape="0" blurRad="101600" dist="38100" dir="5400000">
+              <a:srgbClr val="000000">
+                <a:alpha val="25000"/>
+              </a:srgbClr>
+            </a:outerShdw>
+          </a:effectLst>
+        </p:spPr>
+      </p:sp>
+      <p:pic>
+        <p:nvPicPr>
+          <p:cNvPr id="5" name="Nødtilgang" descr="Nødtilgang">    </p:cNvPr>
+          <p:cNvPicPr>
+            <a:picLocks noChangeAspect="1"/>
+          </p:cNvPicPr>
+          <p:nvPr/>
+        </p:nvPicPr>
+        <p:blipFill>
+          <a:blip r:embed="rId1"/>
+          <a:stretch>
+            <a:fillRect/>
+          </a:stretch>
+        </p:blipFill>
+        <p:spPr>
+          <a:xfrm>
+            <a:off x="4526280" y="1371600"/>
+            <a:ext cx="7132320" cy="4457700"/>
+          </a:xfrm>
+          <a:prstGeom prst="rect">
+            <a:avLst/>
+          </a:prstGeom>
+        </p:spPr>
+      </p:pic>
+      <p:sp>
+        <p:nvSpPr>
+          <p:cNvPr id="25" name="Slide Number Placeholder 0"/>
+          <p:cNvSpPr>
+            <a:spLocks noGrp="1"/>
+          </p:cNvSpPr>
+          <p:nvPr>
+            <p:ph type="sldNum" sz="quarter" idx="4294967295"/>
+          </p:nvPr>
+        </p:nvSpPr>
+        <p:spPr>
+          <a:xfrm>
+            <a:off x="11247120" y="6400800"/>
+            <a:ext cx="457200" cy="274320"/>
+          </a:xfrm>
+          <a:prstGeom prst="rect">
+            <a:avLst/>
+          </a:prstGeom>
+          <a:extLst>
+            <a:ext uri="{C572A759-6A51-4108-AA02-DFA0A04FC94B}">
+              <ma14:wrappingTextBoxFlag xmlns:ma14="http://schemas.microsoft.com/office/mac/drawingml/2011/main" val="0"/>
+            </a:ext>
+          </a:extLst>
+        </p:spPr>
+        <p:txBody>
+          <a:bodyPr/>
+          <a:lstStyle>
+            <a:lvl1pPr>
+              <a:defRPr sz="1000">
+                <a:solidFill>
+                  <a:schemeClr val="accent6"/>
+                </a:solidFill>
+              </a:defRPr>
+            </a:lvl1pPr>
+          </a:lstStyle>
+          <a:p>
+            <a:pPr algn="r"/>
+            <a:fld id="{F7021451-1387-4CA6-816F-3879F97B5CBC}" type="slidenum">
+              <a:rPr b="0" lang="en-US"/>
+              <a:t>11</a:t>
+            </a:fld>
+            <a:endParaRPr lang="en-US"/>
           </a:p>
         </p:txBody>
       </p:sp>
@@ -4553,13 +5286,13 @@
           <p:cNvPr id="2" name="Text 0"/>
           <p:cNvSpPr/>
           <p:nvPr>
-            <p:ph idx="100" type="title" hasCustomPrompt="1"/>
-          </p:nvPr>
-        </p:nvSpPr>
-        <p:spPr>
-          <a:xfrm>
-            <a:off x="548640" y="365760"/>
-            <a:ext cx="11064240" cy="731520"/>
+            <p:ph idx="100" type="body" hasCustomPrompt="1"/>
+          </p:nvPr>
+        </p:nvSpPr>
+        <p:spPr>
+          <a:xfrm>
+            <a:off x="731520" y="2103120"/>
+            <a:ext cx="2743200" cy="1097280"/>
           </a:xfrm>
           <a:prstGeom prst="rect">
             <a:avLst/>
@@ -4571,18 +5304,18 @@
           <a:bodyPr wrap="square" rtlCol="0"/>
           <a:lstStyle/>
           <a:p>
-            <a:pPr algn="l" indent="0" marL="0">
-              <a:buNone/>
-            </a:pPr>
-            <a:r>
-              <a:rPr lang="en-US" sz="3200" b="1" dirty="0">
-                <a:solidFill>
-                  <a:schemeClr val="tx2"/>
-                </a:solidFill>
-              </a:rPr>
-              <a:t>Skrivebordet</a:t>
-            </a:r>
-            <a:endParaRPr lang="en-US" sz="3200" dirty="0"/>
+            <a:pPr indent="0" marL="0">
+              <a:buNone/>
+            </a:pPr>
+            <a:r>
+              <a:rPr lang="en-US" sz="6000" b="1" dirty="0">
+                <a:solidFill>
+                  <a:schemeClr val="accent2"/>
+                </a:solidFill>
+              </a:rPr>
+              <a:t>03</a:t>
+            </a:r>
+            <a:endParaRPr lang="en-US" sz="6000" dirty="0"/>
           </a:p>
         </p:txBody>
       </p:sp>
@@ -4591,13 +5324,13 @@
           <p:cNvPr id="3" name="Text 0"/>
           <p:cNvSpPr/>
           <p:nvPr>
-            <p:ph idx="101" type="body" hasCustomPrompt="1"/>
-          </p:nvPr>
-        </p:nvSpPr>
-        <p:spPr>
-          <a:xfrm>
-            <a:off x="548640" y="1371600"/>
-            <a:ext cx="3657600" cy="4754880"/>
+            <p:ph idx="101" type="title" hasCustomPrompt="1"/>
+          </p:nvPr>
+        </p:nvSpPr>
+        <p:spPr>
+          <a:xfrm>
+            <a:off x="731520" y="3108960"/>
+            <a:ext cx="10698480" cy="914400"/>
           </a:xfrm>
           <a:prstGeom prst="rect">
             <a:avLst/>
@@ -4606,204 +5339,59 @@
           <a:ln/>
         </p:spPr>
         <p:txBody>
-          <a:bodyPr wrap="square" rtlCol="0" anchor="t"/>
-          <a:lstStyle/>
-          <a:p>
-            <a:pPr marL="342900" indent="-342900">
-              <a:spcAft>
-                <a:spcPts val="800"/>
-              </a:spcAft>
-              <a:buSzPct val="100000"/>
-              <a:buChar char="•"/>
-            </a:pPr>
-            <a:r>
-              <a:rPr lang="en-US" sz="1500" b="1" dirty="0">
-                <a:solidFill>
-                  <a:schemeClr val="tx1"/>
-                </a:solidFill>
-              </a:rPr>
-              <a:t>Egne bakgrunnsbilder:</a:t>
-            </a:r>
+          <a:bodyPr wrap="square" rtlCol="0"/>
+          <a:lstStyle/>
+          <a:p>
+            <a:pPr algn="l" indent="0" marL="0">
+              <a:buNone/>
+            </a:pPr>
+            <a:r>
+              <a:rPr lang="en-US" sz="4000" b="1" dirty="0">
+                <a:solidFill>
+                  <a:schemeClr val="bg1"/>
+                </a:solidFill>
+              </a:rPr>
+              <a:t>Skrivebordet</a:t>
+            </a:r>
+            <a:endParaRPr lang="en-US" sz="4000" dirty="0"/>
+          </a:p>
+        </p:txBody>
+      </p:sp>
+      <p:sp>
+        <p:nvSpPr>
+          <p:cNvPr id="4" name="Text 0"/>
+          <p:cNvSpPr/>
+          <p:nvPr>
+            <p:ph idx="102" type="body" hasCustomPrompt="1"/>
+          </p:nvPr>
+        </p:nvSpPr>
+        <p:spPr>
+          <a:xfrm>
+            <a:off x="731520" y="4023360"/>
+            <a:ext cx="10698480" cy="822960"/>
+          </a:xfrm>
+          <a:prstGeom prst="rect">
+            <a:avLst/>
+          </a:prstGeom>
+          <a:noFill/>
+          <a:ln/>
+        </p:spPr>
+        <p:txBody>
+          <a:bodyPr wrap="square" rtlCol="0"/>
+          <a:lstStyle/>
+          <a:p>
             <a:pPr indent="0" marL="0">
-              <a:spcAft>
-                <a:spcPts val="800"/>
-              </a:spcAft>
-              <a:buNone/>
-            </a:pPr>
-            <a:r>
-              <a:rPr lang="en-US" sz="1500" dirty="0">
-                <a:solidFill>
-                  <a:schemeClr val="tx1"/>
-                </a:solidFill>
-              </a:rPr>
-              <a:t> Nordlys, Fjord, Skog og Fjell.</a:t>
-            </a:r>
-            <a:endParaRPr lang="en-US" sz="1500" dirty="0"/>
-          </a:p>
-          <a:p>
-            <a:pPr marL="342900" indent="-342900">
-              <a:spcAft>
-                <a:spcPts val="800"/>
-              </a:spcAft>
-              <a:buSzPct val="100000"/>
-              <a:buChar char="•"/>
-            </a:pPr>
-            <a:r>
-              <a:rPr lang="en-US" sz="1500" b="1" dirty="0">
-                <a:solidFill>
-                  <a:schemeClr val="tx1"/>
-                </a:solidFill>
-              </a:rPr>
-              <a:t>Snarveier</a:t>
-            </a:r>
-            <a:pPr indent="0" marL="0">
-              <a:spcAft>
-                <a:spcPts val="800"/>
-              </a:spcAft>
-              <a:buNone/>
-            </a:pPr>
-            <a:r>
-              <a:rPr lang="en-US" sz="1500" dirty="0">
-                <a:solidFill>
-                  <a:schemeClr val="tx1"/>
-                </a:solidFill>
-              </a:rPr>
-              <a:t> til Medicus-appene, Hjem og Papirkurv.</a:t>
-            </a:r>
-            <a:endParaRPr lang="en-US" sz="1500" dirty="0"/>
-          </a:p>
-          <a:p>
-            <a:pPr marL="342900" indent="-342900">
-              <a:spcAft>
-                <a:spcPts val="800"/>
-              </a:spcAft>
-              <a:buSzPct val="100000"/>
-              <a:buChar char="•"/>
-            </a:pPr>
-            <a:r>
-              <a:rPr lang="en-US" sz="1500" b="1" dirty="0">
-                <a:solidFill>
-                  <a:schemeClr val="tx1"/>
-                </a:solidFill>
-              </a:rPr>
-              <a:t>Oppgavelinjen:</a:t>
-            </a:r>
-            <a:pPr indent="0" marL="0">
-              <a:spcAft>
-                <a:spcPts val="800"/>
-              </a:spcAft>
-              <a:buNone/>
-            </a:pPr>
-            <a:r>
-              <a:rPr lang="en-US" sz="1500" dirty="0">
-                <a:solidFill>
-                  <a:schemeClr val="tx1"/>
-                </a:solidFill>
-              </a:rPr>
-              <a:t> Start-knapp, snarveier til Nettleser og Files, åpne vinduer, nett, lyd, klokke og navn.</a:t>
-            </a:r>
-            <a:endParaRPr lang="en-US" sz="1500" dirty="0"/>
-          </a:p>
-        </p:txBody>
-      </p:sp>
-      <p:sp>
-        <p:nvSpPr>
-          <p:cNvPr id="4" name="Skrivebordet ramme"/>
-          <p:cNvSpPr/>
-          <p:nvPr/>
-        </p:nvSpPr>
-        <p:spPr>
-          <a:xfrm>
-            <a:off x="4526280" y="1371600"/>
-            <a:ext cx="7132320" cy="4457700"/>
-          </a:xfrm>
-          <a:prstGeom prst="rect">
-            <a:avLst/>
-          </a:prstGeom>
-          <a:solidFill>
-            <a:schemeClr val="bg1"/>
-          </a:solidFill>
-          <a:ln w="9525">
-            <a:solidFill>
-              <a:srgbClr val="D2DDD5"/>
-            </a:solidFill>
-            <a:prstDash val="solid"/>
-          </a:ln>
-          <a:effectLst>
-            <a:outerShdw sx="100000" sy="100000" kx="0" ky="0" algn="bl" rotWithShape="0" blurRad="101600" dist="38100" dir="5400000">
-              <a:srgbClr val="000000">
-                <a:alpha val="25000"/>
-              </a:srgbClr>
-            </a:outerShdw>
-          </a:effectLst>
-        </p:spPr>
-      </p:sp>
-      <p:pic>
-        <p:nvPicPr>
-          <p:cNvPr id="5" name="Skrivebordet" descr="Skrivebordet">    </p:cNvPr>
-          <p:cNvPicPr>
-            <a:picLocks noChangeAspect="1"/>
-          </p:cNvPicPr>
-          <p:nvPr/>
-        </p:nvPicPr>
-        <p:blipFill>
-          <a:blip r:embed="rId1"/>
-          <a:stretch>
-            <a:fillRect/>
-          </a:stretch>
-        </p:blipFill>
-        <p:spPr>
-          <a:xfrm>
-            <a:off x="4526280" y="1371600"/>
-            <a:ext cx="7132320" cy="4457700"/>
-          </a:xfrm>
-          <a:prstGeom prst="rect">
-            <a:avLst/>
-          </a:prstGeom>
-        </p:spPr>
-      </p:pic>
-      <p:sp>
-        <p:nvSpPr>
-          <p:cNvPr id="25" name="Slide Number Placeholder 0"/>
-          <p:cNvSpPr>
-            <a:spLocks noGrp="1"/>
-          </p:cNvSpPr>
-          <p:nvPr>
-            <p:ph type="sldNum" sz="quarter" idx="4294967295"/>
-          </p:nvPr>
-        </p:nvSpPr>
-        <p:spPr>
-          <a:xfrm>
-            <a:off x="11247120" y="6400800"/>
-            <a:ext cx="457200" cy="274320"/>
-          </a:xfrm>
-          <a:prstGeom prst="rect">
-            <a:avLst/>
-          </a:prstGeom>
-          <a:extLst>
-            <a:ext uri="{C572A759-6A51-4108-AA02-DFA0A04FC94B}">
-              <ma14:wrappingTextBoxFlag xmlns:ma14="http://schemas.microsoft.com/office/mac/drawingml/2011/main" val="0"/>
-            </a:ext>
-          </a:extLst>
-        </p:spPr>
-        <p:txBody>
-          <a:bodyPr/>
-          <a:lstStyle>
-            <a:lvl1pPr>
-              <a:defRPr sz="1000">
-                <a:solidFill>
-                  <a:schemeClr val="accent6"/>
-                </a:solidFill>
-              </a:defRPr>
-            </a:lvl1pPr>
-          </a:lstStyle>
-          <a:p>
-            <a:pPr algn="r"/>
-            <a:fld id="{F7021451-1387-4CA6-816F-3879F97B5CBC}" type="slidenum">
-              <a:rPr b="0" lang="en-US"/>
-              <a:t>12</a:t>
-            </a:fld>
-            <a:endParaRPr lang="en-US"/>
+              <a:buNone/>
+            </a:pPr>
+            <a:r>
+              <a:rPr lang="en-US" sz="1800" dirty="0">
+                <a:solidFill>
+                  <a:schemeClr val="accent2"/>
+                </a:solidFill>
+              </a:rPr>
+              <a:t>Startmeny, snarveier og standardprogrammer</a:t>
+            </a:r>
+            <a:endParaRPr lang="en-US" sz="1800" dirty="0"/>
           </a:p>
         </p:txBody>
       </p:sp>
@@ -4864,7 +5452,7 @@
                   <a:schemeClr val="tx2"/>
                 </a:solidFill>
               </a:rPr>
-              <a:t>Startmenyen</a:t>
+              <a:t>Skrivebordet</a:t>
             </a:r>
             <a:endParaRPr lang="en-US" sz="3200" dirty="0"/>
           </a:p>
@@ -4906,7 +5494,7 @@
                   <a:schemeClr val="tx1"/>
                 </a:solidFill>
               </a:rPr>
-              <a:t>Favoritter:</a:t>
+              <a:t>Egne bakgrunnsbilder:</a:t>
             </a:r>
             <a:pPr indent="0" marL="0">
               <a:spcAft>
@@ -4920,7 +5508,7 @@
                   <a:schemeClr val="tx1"/>
                 </a:solidFill>
               </a:rPr>
-              <a:t> alle Medicus-appene først.</a:t>
+              <a:t> Nordlys, Fjord, Skog og Fjell.</a:t>
             </a:r>
             <a:endParaRPr lang="en-US" sz="1500" dirty="0"/>
           </a:p>
@@ -4938,7 +5526,7 @@
                   <a:schemeClr val="tx1"/>
                 </a:solidFill>
               </a:rPr>
-              <a:t>Profilbilde:</a:t>
+              <a:t>Snarveier</a:t>
             </a:r>
             <a:pPr indent="0" marL="0">
               <a:spcAft>
@@ -4952,7 +5540,7 @@
                   <a:schemeClr val="tx1"/>
                 </a:solidFill>
               </a:rPr>
-              <a:t> nøytral helsepersonell-figur.</a:t>
+              <a:t> til Medicus-appene, Hjem og Papirkurv.</a:t>
             </a:r>
             <a:endParaRPr lang="en-US" sz="1500" dirty="0"/>
           </a:p>
@@ -4970,7 +5558,7 @@
                   <a:schemeClr val="tx1"/>
                 </a:solidFill>
               </a:rPr>
-              <a:t>Ingen terminal</a:t>
+              <a:t>Oppgavelinjen:</a:t>
             </a:r>
             <a:pPr indent="0" marL="0">
               <a:spcAft>
@@ -4984,7 +5572,7 @@
                   <a:schemeClr val="tx1"/>
                 </a:solidFill>
               </a:rPr>
-              <a:t> og ingen «kjør kommando».</a:t>
+              <a:t> Start-knapp, snarveier til Nettleser og Files, åpne vinduer, nett, lyd, klokke og navn.</a:t>
             </a:r>
             <a:endParaRPr lang="en-US" sz="1500" dirty="0"/>
           </a:p>
@@ -4992,7 +5580,7 @@
       </p:sp>
       <p:sp>
         <p:nvSpPr>
-          <p:cNvPr id="4" name="Startmenyen ramme"/>
+          <p:cNvPr id="4" name="Skrivebordet ramme"/>
           <p:cNvSpPr/>
           <p:nvPr/>
         </p:nvSpPr>
@@ -5024,7 +5612,7 @@
       </p:sp>
       <p:pic>
         <p:nvPicPr>
-          <p:cNvPr id="5" name="Startmenyen" descr="Startmenyen">    </p:cNvPr>
+          <p:cNvPr id="5" name="Skrivebordet" descr="Skrivebordet">    </p:cNvPr>
           <p:cNvPicPr>
             <a:picLocks noChangeAspect="1"/>
           </p:cNvPicPr>
@@ -5148,7 +5736,7 @@
                   <a:schemeClr val="tx2"/>
                 </a:solidFill>
               </a:rPr>
-              <a:t>Files – filbehandleren</a:t>
+              <a:t>Startmenyen</a:t>
             </a:r>
             <a:endParaRPr lang="en-US" sz="3200" dirty="0"/>
           </a:p>
@@ -5190,7 +5778,7 @@
                   <a:schemeClr val="tx1"/>
                 </a:solidFill>
               </a:rPr>
-              <a:t>Ryddig sidepanel:</a:t>
+              <a:t>Favoritter:</a:t>
             </a:r>
             <a:pPr indent="0" marL="0">
               <a:spcAft>
@@ -5204,7 +5792,7 @@
                   <a:schemeClr val="tx1"/>
                 </a:solidFill>
               </a:rPr>
-              <a:t> Hjem, Skrivebord, Dokumenter, Bilder, Nedlastinger og Papirkurv.</a:t>
+              <a:t> alle Medicus-appene først.</a:t>
             </a:r>
             <a:endParaRPr lang="en-US" sz="1500" dirty="0"/>
           </a:p>
@@ -5222,7 +5810,7 @@
                   <a:schemeClr val="tx1"/>
                 </a:solidFill>
               </a:rPr>
-              <a:t>Store ikoner,</a:t>
+              <a:t>Profilbilde:</a:t>
             </a:r>
             <a:pPr indent="0" marL="0">
               <a:spcAft>
@@ -5236,7 +5824,7 @@
                   <a:schemeClr val="tx1"/>
                 </a:solidFill>
               </a:rPr>
-              <a:t> mapper først, ingen menylinje.</a:t>
+              <a:t> nøytral helsepersonell-figur.</a:t>
             </a:r>
             <a:endParaRPr lang="en-US" sz="1500" dirty="0"/>
           </a:p>
@@ -5254,7 +5842,7 @@
                   <a:schemeClr val="tx1"/>
                 </a:solidFill>
               </a:rPr>
-              <a:t>Ett klikk</a:t>
+              <a:t>Ingen terminal</a:t>
             </a:r>
             <a:pPr indent="0" marL="0">
               <a:spcAft>
@@ -5268,47 +5856,15 @@
                   <a:schemeClr val="tx1"/>
                 </a:solidFill>
               </a:rPr>
-              <a:t> fra snarveien på oppgavelinjen.</a:t>
+              <a:t> og ingen «kjør kommando».</a:t>
             </a:r>
             <a:endParaRPr lang="en-US" sz="1500" dirty="0"/>
           </a:p>
-          <a:p>
-            <a:pPr marL="342900" indent="-342900">
-              <a:spcAft>
-                <a:spcPts val="800"/>
-              </a:spcAft>
-              <a:buSzPct val="100000"/>
-              <a:buChar char="•"/>
-            </a:pPr>
-            <a:r>
-              <a:rPr lang="en-US" sz="1500" b="1" dirty="0">
-                <a:solidFill>
-                  <a:schemeClr val="tx1"/>
-                </a:solidFill>
-              </a:rPr>
-              <a:t>Enkle navn:</a:t>
-            </a:r>
-            <a:pPr indent="0" marL="0">
-              <a:spcAft>
-                <a:spcPts val="800"/>
-              </a:spcAft>
-              <a:buNone/>
-            </a:pPr>
-            <a:r>
-              <a:rPr lang="en-US" sz="1500" dirty="0">
-                <a:solidFill>
-                  <a:schemeClr val="tx1"/>
-                </a:solidFill>
-              </a:rPr>
-              <a:t> Files, Pictures, Text og Mouse. Text er Medicus' egen teksteditor.</a:t>
-            </a:r>
-            <a:endParaRPr lang="en-US" sz="1500" dirty="0"/>
-          </a:p>
-        </p:txBody>
-      </p:sp>
-      <p:sp>
-        <p:nvSpPr>
-          <p:cNvPr id="4" name="Files – filbehandleren ramme"/>
+        </p:txBody>
+      </p:sp>
+      <p:sp>
+        <p:nvSpPr>
+          <p:cNvPr id="4" name="Startmenyen ramme"/>
           <p:cNvSpPr/>
           <p:nvPr/>
         </p:nvSpPr>
@@ -5340,7 +5896,7 @@
       </p:sp>
       <p:pic>
         <p:nvPicPr>
-          <p:cNvPr id="5" name="Files – filbehandleren" descr="Files – filbehandleren">    </p:cNvPr>
+          <p:cNvPr id="5" name="Startmenyen" descr="Startmenyen">    </p:cNvPr>
           <p:cNvPicPr>
             <a:picLocks noChangeAspect="1"/>
           </p:cNvPicPr>
@@ -5437,13 +5993,13 @@
           <p:cNvPr id="2" name="Text 0"/>
           <p:cNvSpPr/>
           <p:nvPr>
-            <p:ph idx="100" type="body" hasCustomPrompt="1"/>
-          </p:nvPr>
-        </p:nvSpPr>
-        <p:spPr>
-          <a:xfrm>
-            <a:off x="731520" y="2103120"/>
-            <a:ext cx="2743200" cy="1097280"/>
+            <p:ph idx="100" type="title" hasCustomPrompt="1"/>
+          </p:nvPr>
+        </p:nvSpPr>
+        <p:spPr>
+          <a:xfrm>
+            <a:off x="548640" y="365760"/>
+            <a:ext cx="11064240" cy="731520"/>
           </a:xfrm>
           <a:prstGeom prst="rect">
             <a:avLst/>
@@ -5455,18 +6011,18 @@
           <a:bodyPr wrap="square" rtlCol="0"/>
           <a:lstStyle/>
           <a:p>
-            <a:pPr indent="0" marL="0">
-              <a:buNone/>
-            </a:pPr>
-            <a:r>
-              <a:rPr lang="en-US" sz="6000" b="1" dirty="0">
-                <a:solidFill>
-                  <a:schemeClr val="accent2"/>
-                </a:solidFill>
-              </a:rPr>
-              <a:t>04</a:t>
-            </a:r>
-            <a:endParaRPr lang="en-US" sz="6000" dirty="0"/>
+            <a:pPr algn="l" indent="0" marL="0">
+              <a:buNone/>
+            </a:pPr>
+            <a:r>
+              <a:rPr lang="en-US" sz="3200" b="1" dirty="0">
+                <a:solidFill>
+                  <a:schemeClr val="tx2"/>
+                </a:solidFill>
+              </a:rPr>
+              <a:t>Files – filbehandleren</a:t>
+            </a:r>
+            <a:endParaRPr lang="en-US" sz="3200" dirty="0"/>
           </a:p>
         </p:txBody>
       </p:sp>
@@ -5475,13 +6031,13 @@
           <p:cNvPr id="3" name="Text 0"/>
           <p:cNvSpPr/>
           <p:nvPr>
-            <p:ph idx="101" type="title" hasCustomPrompt="1"/>
-          </p:nvPr>
-        </p:nvSpPr>
-        <p:spPr>
-          <a:xfrm>
-            <a:off x="731520" y="3108960"/>
-            <a:ext cx="10698480" cy="914400"/>
+            <p:ph idx="101" type="body" hasCustomPrompt="1"/>
+          </p:nvPr>
+        </p:nvSpPr>
+        <p:spPr>
+          <a:xfrm>
+            <a:off x="548640" y="1371600"/>
+            <a:ext cx="3657600" cy="4754880"/>
           </a:xfrm>
           <a:prstGeom prst="rect">
             <a:avLst/>
@@ -5490,59 +6046,236 @@
           <a:ln/>
         </p:spPr>
         <p:txBody>
-          <a:bodyPr wrap="square" rtlCol="0"/>
-          <a:lstStyle/>
-          <a:p>
-            <a:pPr algn="l" indent="0" marL="0">
-              <a:buNone/>
-            </a:pPr>
-            <a:r>
-              <a:rPr lang="en-US" sz="4000" b="1" dirty="0">
-                <a:solidFill>
-                  <a:schemeClr val="bg1"/>
-                </a:solidFill>
-              </a:rPr>
-              <a:t>Applikasjoner og funksjoner</a:t>
-            </a:r>
-            <a:endParaRPr lang="en-US" sz="4000" dirty="0"/>
-          </a:p>
-        </p:txBody>
-      </p:sp>
-      <p:sp>
-        <p:nvSpPr>
-          <p:cNvPr id="4" name="Text 0"/>
+          <a:bodyPr wrap="square" rtlCol="0" anchor="t"/>
+          <a:lstStyle/>
+          <a:p>
+            <a:pPr marL="342900" indent="-342900">
+              <a:spcAft>
+                <a:spcPts val="800"/>
+              </a:spcAft>
+              <a:buSzPct val="100000"/>
+              <a:buChar char="•"/>
+            </a:pPr>
+            <a:r>
+              <a:rPr lang="en-US" sz="1500" b="1" dirty="0">
+                <a:solidFill>
+                  <a:schemeClr val="tx1"/>
+                </a:solidFill>
+              </a:rPr>
+              <a:t>Ryddig sidepanel:</a:t>
+            </a:r>
+            <a:pPr indent="0" marL="0">
+              <a:spcAft>
+                <a:spcPts val="800"/>
+              </a:spcAft>
+              <a:buNone/>
+            </a:pPr>
+            <a:r>
+              <a:rPr lang="en-US" sz="1500" dirty="0">
+                <a:solidFill>
+                  <a:schemeClr val="tx1"/>
+                </a:solidFill>
+              </a:rPr>
+              <a:t> Hjem, Skrivebord, Dokumenter, Bilder, Nedlastinger og Papirkurv.</a:t>
+            </a:r>
+            <a:endParaRPr lang="en-US" sz="1500" dirty="0"/>
+          </a:p>
+          <a:p>
+            <a:pPr marL="342900" indent="-342900">
+              <a:spcAft>
+                <a:spcPts val="800"/>
+              </a:spcAft>
+              <a:buSzPct val="100000"/>
+              <a:buChar char="•"/>
+            </a:pPr>
+            <a:r>
+              <a:rPr lang="en-US" sz="1500" b="1" dirty="0">
+                <a:solidFill>
+                  <a:schemeClr val="tx1"/>
+                </a:solidFill>
+              </a:rPr>
+              <a:t>Store ikoner,</a:t>
+            </a:r>
+            <a:pPr indent="0" marL="0">
+              <a:spcAft>
+                <a:spcPts val="800"/>
+              </a:spcAft>
+              <a:buNone/>
+            </a:pPr>
+            <a:r>
+              <a:rPr lang="en-US" sz="1500" dirty="0">
+                <a:solidFill>
+                  <a:schemeClr val="tx1"/>
+                </a:solidFill>
+              </a:rPr>
+              <a:t> mapper først, ingen menylinje.</a:t>
+            </a:r>
+            <a:endParaRPr lang="en-US" sz="1500" dirty="0"/>
+          </a:p>
+          <a:p>
+            <a:pPr marL="342900" indent="-342900">
+              <a:spcAft>
+                <a:spcPts val="800"/>
+              </a:spcAft>
+              <a:buSzPct val="100000"/>
+              <a:buChar char="•"/>
+            </a:pPr>
+            <a:r>
+              <a:rPr lang="en-US" sz="1500" b="1" dirty="0">
+                <a:solidFill>
+                  <a:schemeClr val="tx1"/>
+                </a:solidFill>
+              </a:rPr>
+              <a:t>Ett klikk</a:t>
+            </a:r>
+            <a:pPr indent="0" marL="0">
+              <a:spcAft>
+                <a:spcPts val="800"/>
+              </a:spcAft>
+              <a:buNone/>
+            </a:pPr>
+            <a:r>
+              <a:rPr lang="en-US" sz="1500" dirty="0">
+                <a:solidFill>
+                  <a:schemeClr val="tx1"/>
+                </a:solidFill>
+              </a:rPr>
+              <a:t> fra snarveien på oppgavelinjen.</a:t>
+            </a:r>
+            <a:endParaRPr lang="en-US" sz="1500" dirty="0"/>
+          </a:p>
+          <a:p>
+            <a:pPr marL="342900" indent="-342900">
+              <a:spcAft>
+                <a:spcPts val="800"/>
+              </a:spcAft>
+              <a:buSzPct val="100000"/>
+              <a:buChar char="•"/>
+            </a:pPr>
+            <a:r>
+              <a:rPr lang="en-US" sz="1500" b="1" dirty="0">
+                <a:solidFill>
+                  <a:schemeClr val="tx1"/>
+                </a:solidFill>
+              </a:rPr>
+              <a:t>Enkle navn:</a:t>
+            </a:r>
+            <a:pPr indent="0" marL="0">
+              <a:spcAft>
+                <a:spcPts val="800"/>
+              </a:spcAft>
+              <a:buNone/>
+            </a:pPr>
+            <a:r>
+              <a:rPr lang="en-US" sz="1500" dirty="0">
+                <a:solidFill>
+                  <a:schemeClr val="tx1"/>
+                </a:solidFill>
+              </a:rPr>
+              <a:t> Files, Pictures, Text og Mouse. Text er Medicus' egen teksteditor.</a:t>
+            </a:r>
+            <a:endParaRPr lang="en-US" sz="1500" dirty="0"/>
+          </a:p>
+        </p:txBody>
+      </p:sp>
+      <p:sp>
+        <p:nvSpPr>
+          <p:cNvPr id="4" name="Files – filbehandleren ramme"/>
           <p:cNvSpPr/>
-          <p:nvPr>
-            <p:ph idx="102" type="body" hasCustomPrompt="1"/>
-          </p:nvPr>
-        </p:nvSpPr>
-        <p:spPr>
-          <a:xfrm>
-            <a:off x="731520" y="4023360"/>
-            <a:ext cx="10698480" cy="822960"/>
-          </a:xfrm>
-          <a:prstGeom prst="rect">
-            <a:avLst/>
-          </a:prstGeom>
-          <a:noFill/>
-          <a:ln/>
-        </p:spPr>
-        <p:txBody>
-          <a:bodyPr wrap="square" rtlCol="0"/>
-          <a:lstStyle/>
-          <a:p>
-            <a:pPr indent="0" marL="0">
-              <a:buNone/>
-            </a:pPr>
-            <a:r>
-              <a:rPr lang="en-US" sz="1800" dirty="0">
-                <a:solidFill>
-                  <a:schemeClr val="accent2"/>
-                </a:solidFill>
-              </a:rPr>
-              <a:t>Pasientjournal, Post, nettleser, sikkerhet og verktøy</a:t>
-            </a:r>
-            <a:endParaRPr lang="en-US" sz="1800" dirty="0"/>
+          <p:nvPr/>
+        </p:nvSpPr>
+        <p:spPr>
+          <a:xfrm>
+            <a:off x="4526280" y="1371600"/>
+            <a:ext cx="7132320" cy="4457700"/>
+          </a:xfrm>
+          <a:prstGeom prst="rect">
+            <a:avLst/>
+          </a:prstGeom>
+          <a:solidFill>
+            <a:schemeClr val="bg1"/>
+          </a:solidFill>
+          <a:ln w="9525">
+            <a:solidFill>
+              <a:srgbClr val="D2DDD5"/>
+            </a:solidFill>
+            <a:prstDash val="solid"/>
+          </a:ln>
+          <a:effectLst>
+            <a:outerShdw sx="100000" sy="100000" kx="0" ky="0" algn="bl" rotWithShape="0" blurRad="101600" dist="38100" dir="5400000">
+              <a:srgbClr val="000000">
+                <a:alpha val="25000"/>
+              </a:srgbClr>
+            </a:outerShdw>
+          </a:effectLst>
+        </p:spPr>
+      </p:sp>
+      <p:pic>
+        <p:nvPicPr>
+          <p:cNvPr id="5" name="Files – filbehandleren" descr="Files – filbehandleren">    </p:cNvPr>
+          <p:cNvPicPr>
+            <a:picLocks noChangeAspect="1"/>
+          </p:cNvPicPr>
+          <p:nvPr/>
+        </p:nvPicPr>
+        <p:blipFill>
+          <a:blip r:embed="rId1"/>
+          <a:stretch>
+            <a:fillRect/>
+          </a:stretch>
+        </p:blipFill>
+        <p:spPr>
+          <a:xfrm>
+            <a:off x="4526280" y="1371600"/>
+            <a:ext cx="7132320" cy="4457700"/>
+          </a:xfrm>
+          <a:prstGeom prst="rect">
+            <a:avLst/>
+          </a:prstGeom>
+        </p:spPr>
+      </p:pic>
+      <p:sp>
+        <p:nvSpPr>
+          <p:cNvPr id="25" name="Slide Number Placeholder 0"/>
+          <p:cNvSpPr>
+            <a:spLocks noGrp="1"/>
+          </p:cNvSpPr>
+          <p:nvPr>
+            <p:ph type="sldNum" sz="quarter" idx="4294967295"/>
+          </p:nvPr>
+        </p:nvSpPr>
+        <p:spPr>
+          <a:xfrm>
+            <a:off x="11247120" y="6400800"/>
+            <a:ext cx="457200" cy="274320"/>
+          </a:xfrm>
+          <a:prstGeom prst="rect">
+            <a:avLst/>
+          </a:prstGeom>
+          <a:extLst>
+            <a:ext uri="{C572A759-6A51-4108-AA02-DFA0A04FC94B}">
+              <ma14:wrappingTextBoxFlag xmlns:ma14="http://schemas.microsoft.com/office/mac/drawingml/2011/main" val="0"/>
+            </a:ext>
+          </a:extLst>
+        </p:spPr>
+        <p:txBody>
+          <a:bodyPr/>
+          <a:lstStyle>
+            <a:lvl1pPr>
+              <a:defRPr sz="1000">
+                <a:solidFill>
+                  <a:schemeClr val="accent6"/>
+                </a:solidFill>
+              </a:defRPr>
+            </a:lvl1pPr>
+          </a:lstStyle>
+          <a:p>
+            <a:pPr algn="r"/>
+            <a:fld id="{F7021451-1387-4CA6-816F-3879F97B5CBC}" type="slidenum">
+              <a:rPr b="0" lang="en-US"/>
+              <a:t>15</a:t>
+            </a:fld>
+            <a:endParaRPr lang="en-US"/>
           </a:p>
         </p:txBody>
       </p:sp>
@@ -5603,7 +6336,7 @@
                   <a:schemeClr val="tx2"/>
                 </a:solidFill>
               </a:rPr>
-              <a:t>Pasientjournal</a:t>
+              <a:t>IT-skrivebordet</a:t>
             </a:r>
             <a:endParaRPr lang="en-US" sz="3200" dirty="0"/>
           </a:p>
@@ -5645,7 +6378,7 @@
                   <a:schemeClr val="tx1"/>
                 </a:solidFill>
               </a:rPr>
-              <a:t>Kritisk informasjon</a:t>
+              <a:t>IT-kort</a:t>
             </a:r>
             <a:pPr indent="0" marL="0">
               <a:spcAft>
@@ -5659,7 +6392,7 @@
                   <a:schemeClr val="tx1"/>
                 </a:solidFill>
               </a:rPr>
-              <a:t> øverst: allergier, tilstander, implantater.</a:t>
+              <a:t> får eget skrivebord med gul oppgavelinje, så ingen blander de to.</a:t>
             </a:r>
             <a:endParaRPr lang="en-US" sz="1500" dirty="0"/>
           </a:p>
@@ -5677,7 +6410,7 @@
                   <a:schemeClr val="tx1"/>
                 </a:solidFill>
               </a:rPr>
-              <a:t>Besøk og notater</a:t>
+              <a:t>IT-verktøy:</a:t>
             </a:r>
             <a:pPr indent="0" marL="0">
               <a:spcAft>
@@ -5691,7 +6424,7 @@
                   <a:schemeClr val="tx1"/>
                 </a:solidFill>
               </a:rPr>
-              <a:t> fra alle virksomheter samlet.</a:t>
+              <a:t> Sikkerhetssenter, terminal, nettverk, alle innstillinger, medisinsk USB-utstyr og IT-håndboken.</a:t>
             </a:r>
             <a:endParaRPr lang="en-US" sz="1500" dirty="0"/>
           </a:p>
@@ -5709,7 +6442,7 @@
                   <a:schemeClr val="tx1"/>
                 </a:solidFill>
               </a:rPr>
-              <a:t>E-resept</a:t>
+              <a:t>Ingen pasientdata</a:t>
             </a:r>
             <a:pPr indent="0" marL="0">
               <a:spcAft>
@@ -5723,47 +6456,15 @@
                   <a:schemeClr val="tx1"/>
                 </a:solidFill>
               </a:rPr>
-              <a:t> for leger.</a:t>
+              <a:t> i IT-modus, og administratorkommandoer bekreftes med PIN på IT-kortet.</a:t>
             </a:r>
             <a:endParaRPr lang="en-US" sz="1500" dirty="0"/>
           </a:p>
-          <a:p>
-            <a:pPr marL="342900" indent="-342900">
-              <a:spcAft>
-                <a:spcPts val="800"/>
-              </a:spcAft>
-              <a:buSzPct val="100000"/>
-              <a:buChar char="•"/>
-            </a:pPr>
-            <a:r>
-              <a:rPr lang="en-US" sz="1500" b="1" dirty="0">
-                <a:solidFill>
-                  <a:schemeClr val="tx1"/>
-                </a:solidFill>
-              </a:rPr>
-              <a:t>Hver åpning logges</a:t>
-            </a:r>
-            <a:pPr indent="0" marL="0">
-              <a:spcAft>
-                <a:spcPts val="800"/>
-              </a:spcAft>
-              <a:buNone/>
-            </a:pPr>
-            <a:r>
-              <a:rPr lang="en-US" sz="1500" dirty="0">
-                <a:solidFill>
-                  <a:schemeClr val="tx1"/>
-                </a:solidFill>
-              </a:rPr>
-              <a:t> og vises for pasienten.</a:t>
-            </a:r>
-            <a:endParaRPr lang="en-US" sz="1500" dirty="0"/>
-          </a:p>
-        </p:txBody>
-      </p:sp>
-      <p:sp>
-        <p:nvSpPr>
-          <p:cNvPr id="4" name="Pasientjournal ramme"/>
+        </p:txBody>
+      </p:sp>
+      <p:sp>
+        <p:nvSpPr>
+          <p:cNvPr id="4" name="IT-skrivebordet ramme"/>
           <p:cNvSpPr/>
           <p:nvPr/>
         </p:nvSpPr>
@@ -5795,7 +6496,7 @@
       </p:sp>
       <p:pic>
         <p:nvPicPr>
-          <p:cNvPr id="5" name="Pasientjournal" descr="Pasientjournal">    </p:cNvPr>
+          <p:cNvPr id="5" name="IT-skrivebordet" descr="IT-skrivebordet">    </p:cNvPr>
           <p:cNvPicPr>
             <a:picLocks noChangeAspect="1"/>
           </p:cNvPicPr>
@@ -5892,13 +6593,13 @@
           <p:cNvPr id="2" name="Text 0"/>
           <p:cNvSpPr/>
           <p:nvPr>
-            <p:ph idx="100" type="title" hasCustomPrompt="1"/>
-          </p:nvPr>
-        </p:nvSpPr>
-        <p:spPr>
-          <a:xfrm>
-            <a:off x="548640" y="365760"/>
-            <a:ext cx="11064240" cy="731520"/>
+            <p:ph idx="100" type="body" hasCustomPrompt="1"/>
+          </p:nvPr>
+        </p:nvSpPr>
+        <p:spPr>
+          <a:xfrm>
+            <a:off x="731520" y="2103120"/>
+            <a:ext cx="2743200" cy="1097280"/>
           </a:xfrm>
           <a:prstGeom prst="rect">
             <a:avLst/>
@@ -5910,18 +6611,18 @@
           <a:bodyPr wrap="square" rtlCol="0"/>
           <a:lstStyle/>
           <a:p>
-            <a:pPr algn="l" indent="0" marL="0">
-              <a:buNone/>
-            </a:pPr>
-            <a:r>
-              <a:rPr lang="en-US" sz="3200" b="1" dirty="0">
-                <a:solidFill>
-                  <a:schemeClr val="tx2"/>
-                </a:solidFill>
-              </a:rPr>
-              <a:t>Medicus Post – svindelvarsel</a:t>
-            </a:r>
-            <a:endParaRPr lang="en-US" sz="3200" dirty="0"/>
+            <a:pPr indent="0" marL="0">
+              <a:buNone/>
+            </a:pPr>
+            <a:r>
+              <a:rPr lang="en-US" sz="6000" b="1" dirty="0">
+                <a:solidFill>
+                  <a:schemeClr val="accent2"/>
+                </a:solidFill>
+              </a:rPr>
+              <a:t>04</a:t>
+            </a:r>
+            <a:endParaRPr lang="en-US" sz="6000" dirty="0"/>
           </a:p>
         </p:txBody>
       </p:sp>
@@ -5930,13 +6631,13 @@
           <p:cNvPr id="3" name="Text 0"/>
           <p:cNvSpPr/>
           <p:nvPr>
-            <p:ph idx="101" type="body" hasCustomPrompt="1"/>
-          </p:nvPr>
-        </p:nvSpPr>
-        <p:spPr>
-          <a:xfrm>
-            <a:off x="548640" y="1371600"/>
-            <a:ext cx="3657600" cy="4754880"/>
+            <p:ph idx="101" type="title" hasCustomPrompt="1"/>
+          </p:nvPr>
+        </p:nvSpPr>
+        <p:spPr>
+          <a:xfrm>
+            <a:off x="731520" y="3108960"/>
+            <a:ext cx="10698480" cy="914400"/>
           </a:xfrm>
           <a:prstGeom prst="rect">
             <a:avLst/>
@@ -5945,204 +6646,59 @@
           <a:ln/>
         </p:spPr>
         <p:txBody>
-          <a:bodyPr wrap="square" rtlCol="0" anchor="t"/>
-          <a:lstStyle/>
-          <a:p>
-            <a:pPr marL="342900" indent="-342900">
-              <a:spcAft>
-                <a:spcPts val="800"/>
-              </a:spcAft>
-              <a:buSzPct val="100000"/>
-              <a:buChar char="•"/>
-            </a:pPr>
-            <a:r>
-              <a:rPr lang="en-US" sz="1500" b="1" dirty="0">
-                <a:solidFill>
-                  <a:schemeClr val="tx1"/>
-                </a:solidFill>
-              </a:rPr>
-              <a:t>Grønn:</a:t>
-            </a:r>
+          <a:bodyPr wrap="square" rtlCol="0"/>
+          <a:lstStyle/>
+          <a:p>
+            <a:pPr algn="l" indent="0" marL="0">
+              <a:buNone/>
+            </a:pPr>
+            <a:r>
+              <a:rPr lang="en-US" sz="4000" b="1" dirty="0">
+                <a:solidFill>
+                  <a:schemeClr val="bg1"/>
+                </a:solidFill>
+              </a:rPr>
+              <a:t>Applikasjoner og funksjoner</a:t>
+            </a:r>
+            <a:endParaRPr lang="en-US" sz="4000" dirty="0"/>
+          </a:p>
+        </p:txBody>
+      </p:sp>
+      <p:sp>
+        <p:nvSpPr>
+          <p:cNvPr id="4" name="Text 0"/>
+          <p:cNvSpPr/>
+          <p:nvPr>
+            <p:ph idx="102" type="body" hasCustomPrompt="1"/>
+          </p:nvPr>
+        </p:nvSpPr>
+        <p:spPr>
+          <a:xfrm>
+            <a:off x="731520" y="4023360"/>
+            <a:ext cx="10698480" cy="822960"/>
+          </a:xfrm>
+          <a:prstGeom prst="rect">
+            <a:avLst/>
+          </a:prstGeom>
+          <a:noFill/>
+          <a:ln/>
+        </p:spPr>
+        <p:txBody>
+          <a:bodyPr wrap="square" rtlCol="0"/>
+          <a:lstStyle/>
+          <a:p>
             <a:pPr indent="0" marL="0">
-              <a:spcAft>
-                <a:spcPts val="800"/>
-              </a:spcAft>
-              <a:buNone/>
-            </a:pPr>
-            <a:r>
-              <a:rPr lang="en-US" sz="1500" dirty="0">
-                <a:solidFill>
-                  <a:schemeClr val="tx1"/>
-                </a:solidFill>
-              </a:rPr>
-              <a:t> verifisert helsepersonell i helsenettet.</a:t>
-            </a:r>
-            <a:endParaRPr lang="en-US" sz="1500" dirty="0"/>
-          </a:p>
-          <a:p>
-            <a:pPr marL="342900" indent="-342900">
-              <a:spcAft>
-                <a:spcPts val="800"/>
-              </a:spcAft>
-              <a:buSzPct val="100000"/>
-              <a:buChar char="•"/>
-            </a:pPr>
-            <a:r>
-              <a:rPr lang="en-US" sz="1500" b="1" dirty="0">
-                <a:solidFill>
-                  <a:schemeClr val="tx1"/>
-                </a:solidFill>
-              </a:rPr>
-              <a:t>Rød:</a:t>
-            </a:r>
-            <a:pPr indent="0" marL="0">
-              <a:spcAft>
-                <a:spcPts val="800"/>
-              </a:spcAft>
-              <a:buNone/>
-            </a:pPr>
-            <a:r>
-              <a:rPr lang="en-US" sz="1500" dirty="0">
-                <a:solidFill>
-                  <a:schemeClr val="tx1"/>
-                </a:solidFill>
-              </a:rPr>
-              <a:t> mistenkelig e-post med forklaring på vanlig norsk.</a:t>
-            </a:r>
-            <a:endParaRPr lang="en-US" sz="1500" dirty="0"/>
-          </a:p>
-          <a:p>
-            <a:pPr marL="342900" indent="-342900">
-              <a:spcAft>
-                <a:spcPts val="800"/>
-              </a:spcAft>
-              <a:buSzPct val="100000"/>
-              <a:buChar char="•"/>
-            </a:pPr>
-            <a:r>
-              <a:rPr lang="en-US" sz="1500" b="1" dirty="0">
-                <a:solidFill>
-                  <a:schemeClr val="tx1"/>
-                </a:solidFill>
-              </a:rPr>
-              <a:t>Lenker og vedlegg</a:t>
-            </a:r>
-            <a:pPr indent="0" marL="0">
-              <a:spcAft>
-                <a:spcPts val="800"/>
-              </a:spcAft>
-              <a:buNone/>
-            </a:pPr>
-            <a:r>
-              <a:rPr lang="en-US" sz="1500" dirty="0">
-                <a:solidFill>
-                  <a:schemeClr val="tx1"/>
-                </a:solidFill>
-              </a:rPr>
-              <a:t> fra utsiden er blokkert.</a:t>
-            </a:r>
-            <a:endParaRPr lang="en-US" sz="1500" dirty="0"/>
-          </a:p>
-        </p:txBody>
-      </p:sp>
-      <p:sp>
-        <p:nvSpPr>
-          <p:cNvPr id="4" name="Medicus Post – svindelvarsel ramme"/>
-          <p:cNvSpPr/>
-          <p:nvPr/>
-        </p:nvSpPr>
-        <p:spPr>
-          <a:xfrm>
-            <a:off x="4526280" y="1371600"/>
-            <a:ext cx="7132320" cy="4457700"/>
-          </a:xfrm>
-          <a:prstGeom prst="rect">
-            <a:avLst/>
-          </a:prstGeom>
-          <a:solidFill>
-            <a:schemeClr val="bg1"/>
-          </a:solidFill>
-          <a:ln w="9525">
-            <a:solidFill>
-              <a:srgbClr val="D2DDD5"/>
-            </a:solidFill>
-            <a:prstDash val="solid"/>
-          </a:ln>
-          <a:effectLst>
-            <a:outerShdw sx="100000" sy="100000" kx="0" ky="0" algn="bl" rotWithShape="0" blurRad="101600" dist="38100" dir="5400000">
-              <a:srgbClr val="000000">
-                <a:alpha val="25000"/>
-              </a:srgbClr>
-            </a:outerShdw>
-          </a:effectLst>
-        </p:spPr>
-      </p:sp>
-      <p:pic>
-        <p:nvPicPr>
-          <p:cNvPr id="5" name="Medicus Post – svindelvarsel" descr="Medicus Post – svindelvarsel">    </p:cNvPr>
-          <p:cNvPicPr>
-            <a:picLocks noChangeAspect="1"/>
-          </p:cNvPicPr>
-          <p:nvPr/>
-        </p:nvPicPr>
-        <p:blipFill>
-          <a:blip r:embed="rId1"/>
-          <a:stretch>
-            <a:fillRect/>
-          </a:stretch>
-        </p:blipFill>
-        <p:spPr>
-          <a:xfrm>
-            <a:off x="4526280" y="1371600"/>
-            <a:ext cx="7132320" cy="4457700"/>
-          </a:xfrm>
-          <a:prstGeom prst="rect">
-            <a:avLst/>
-          </a:prstGeom>
-        </p:spPr>
-      </p:pic>
-      <p:sp>
-        <p:nvSpPr>
-          <p:cNvPr id="25" name="Slide Number Placeholder 0"/>
-          <p:cNvSpPr>
-            <a:spLocks noGrp="1"/>
-          </p:cNvSpPr>
-          <p:nvPr>
-            <p:ph type="sldNum" sz="quarter" idx="4294967295"/>
-          </p:nvPr>
-        </p:nvSpPr>
-        <p:spPr>
-          <a:xfrm>
-            <a:off x="11247120" y="6400800"/>
-            <a:ext cx="457200" cy="274320"/>
-          </a:xfrm>
-          <a:prstGeom prst="rect">
-            <a:avLst/>
-          </a:prstGeom>
-          <a:extLst>
-            <a:ext uri="{C572A759-6A51-4108-AA02-DFA0A04FC94B}">
-              <ma14:wrappingTextBoxFlag xmlns:ma14="http://schemas.microsoft.com/office/mac/drawingml/2011/main" val="0"/>
-            </a:ext>
-          </a:extLst>
-        </p:spPr>
-        <p:txBody>
-          <a:bodyPr/>
-          <a:lstStyle>
-            <a:lvl1pPr>
-              <a:defRPr sz="1000">
-                <a:solidFill>
-                  <a:schemeClr val="accent6"/>
-                </a:solidFill>
-              </a:defRPr>
-            </a:lvl1pPr>
-          </a:lstStyle>
-          <a:p>
-            <a:pPr algn="r"/>
-            <a:fld id="{F7021451-1387-4CA6-816F-3879F97B5CBC}" type="slidenum">
-              <a:rPr b="0" lang="en-US"/>
-              <a:t>17</a:t>
-            </a:fld>
-            <a:endParaRPr lang="en-US"/>
+              <a:buNone/>
+            </a:pPr>
+            <a:r>
+              <a:rPr lang="en-US" sz="1800" dirty="0">
+                <a:solidFill>
+                  <a:schemeClr val="accent2"/>
+                </a:solidFill>
+              </a:rPr>
+              <a:t>Pasientjournal, Post, nettleser, sikkerhet og verktøy</a:t>
+            </a:r>
+            <a:endParaRPr lang="en-US" sz="1800" dirty="0"/>
           </a:p>
         </p:txBody>
       </p:sp>
@@ -6203,7 +6759,7 @@
                   <a:schemeClr val="tx2"/>
                 </a:solidFill>
               </a:rPr>
-              <a:t>Bildedeling: røntgen og MR</a:t>
+              <a:t>Journalassistenten</a:t>
             </a:r>
             <a:endParaRPr lang="en-US" sz="3200" dirty="0"/>
           </a:p>
@@ -6245,7 +6801,7 @@
                   <a:schemeClr val="tx1"/>
                 </a:solidFill>
               </a:rPr>
-              <a:t>DICOM-bilder</a:t>
+              <a:t>Fra samtale til notat:</a:t>
             </a:r>
             <a:pPr indent="0" marL="0">
               <a:spcAft>
@@ -6259,7 +6815,7 @@
                   <a:schemeClr val="tx1"/>
                 </a:solidFill>
               </a:rPr>
-              <a:t> vises rett i meldingen.</a:t>
+              <a:t> tas opp med pasientens samtykke, transkriberes og skrives på selve PC-en.</a:t>
             </a:r>
             <a:endParaRPr lang="en-US" sz="1500" dirty="0"/>
           </a:p>
@@ -6277,7 +6833,7 @@
                   <a:schemeClr val="tx1"/>
                 </a:solidFill>
               </a:rPr>
-              <a:t>Lysstyrke, kontrast</a:t>
+              <a:t>Kildesjekk:</a:t>
             </a:r>
             <a:pPr indent="0" marL="0">
               <a:spcAft>
@@ -6291,7 +6847,7 @@
                   <a:schemeClr val="tx1"/>
                 </a:solidFill>
               </a:rPr>
-              <a:t> og inverter.</a:t>
+              <a:t> hver setning merkes Sagt, Delvis eller Ikke funnet i samtalen.</a:t>
             </a:r>
             <a:endParaRPr lang="en-US" sz="1500" dirty="0"/>
           </a:p>
@@ -6309,7 +6865,7 @@
                   <a:schemeClr val="tx1"/>
                 </a:solidFill>
               </a:rPr>
-              <a:t>Virusskannet</a:t>
+              <a:t>Alltid et utkast:</a:t>
             </a:r>
             <a:pPr indent="0" marL="0">
               <a:spcAft>
@@ -6323,22 +6879,54 @@
                   <a:schemeClr val="tx1"/>
                 </a:solidFill>
               </a:rPr>
-              <a:t> før de slippes inn.</a:t>
+              <a:t> helsepersonellet kontrollerer og godkjenner før noe lagres.</a:t>
             </a:r>
             <a:endParaRPr lang="en-US" sz="1500" dirty="0"/>
           </a:p>
-        </p:txBody>
-      </p:sp>
-      <p:sp>
-        <p:nvSpPr>
-          <p:cNvPr id="4" name="Bildedeling: røntgen og MR ramme"/>
+          <a:p>
+            <a:pPr marL="342900" indent="-342900">
+              <a:spcAft>
+                <a:spcPts val="800"/>
+              </a:spcAft>
+              <a:buSzPct val="100000"/>
+              <a:buChar char="•"/>
+            </a:pPr>
+            <a:r>
+              <a:rPr lang="en-US" sz="1500" b="1" dirty="0">
+                <a:solidFill>
+                  <a:schemeClr val="tx1"/>
+                </a:solidFill>
+              </a:rPr>
+              <a:t>Ingenting forlater PC-en:</a:t>
+            </a:r>
+            <a:pPr indent="0" marL="0">
+              <a:spcAft>
+                <a:spcPts val="800"/>
+              </a:spcAft>
+              <a:buNone/>
+            </a:pPr>
+            <a:r>
+              <a:rPr lang="en-US" sz="1500" dirty="0">
+                <a:solidFill>
+                  <a:schemeClr val="tx1"/>
+                </a:solidFill>
+              </a:rPr>
+              <a:t> opptaket slettes så snart teksten er laget.</a:t>
+            </a:r>
+            <a:endParaRPr lang="en-US" sz="1500" dirty="0"/>
+          </a:p>
+        </p:txBody>
+      </p:sp>
+      <p:sp>
+        <p:nvSpPr>
+          <p:cNvPr id="4" name="Journalassistenten ramme"/>
           <p:cNvSpPr/>
           <p:nvPr/>
         </p:nvSpPr>
         <p:spPr>
           <a:xfrm>
             <a:off x="4526280" y="1371600"/>
-            <a:ext cx="7132320" cy="4457700"/>
+            <a:ext cx="7132320" cy="4532830"/>
           </a:xfrm>
           <a:prstGeom prst="rect">
             <a:avLst/>
@@ -6363,7 +6951,7 @@
       </p:sp>
       <p:pic>
         <p:nvPicPr>
-          <p:cNvPr id="5" name="Bildedeling: røntgen og MR" descr="Bildedeling: røntgen og MR">    </p:cNvPr>
+          <p:cNvPr id="5" name="Journalassistenten" descr="Journalassistenten">    </p:cNvPr>
           <p:cNvPicPr>
             <a:picLocks noChangeAspect="1"/>
           </p:cNvPicPr>
@@ -6378,7 +6966,7 @@
         <p:spPr>
           <a:xfrm>
             <a:off x="4526280" y="1371600"/>
-            <a:ext cx="7132320" cy="4457700"/>
+            <a:ext cx="7132320" cy="4532830"/>
           </a:xfrm>
           <a:prstGeom prst="rect">
             <a:avLst/>
@@ -6487,7 +7075,7 @@
                   <a:schemeClr val="tx2"/>
                 </a:solidFill>
               </a:rPr>
-              <a:t>Medicus Nettleser</a:t>
+              <a:t>Pasientjournal</a:t>
             </a:r>
             <a:endParaRPr lang="en-US" sz="3200" dirty="0"/>
           </a:p>
@@ -6529,7 +7117,7 @@
                   <a:schemeClr val="tx1"/>
                 </a:solidFill>
               </a:rPr>
-              <a:t>Egen nettleser</a:t>
+              <a:t>Kritisk informasjon</a:t>
             </a:r>
             <a:pPr indent="0" marL="0">
               <a:spcAft>
@@ -6543,7 +7131,7 @@
                   <a:schemeClr val="tx1"/>
                 </a:solidFill>
               </a:rPr>
-              <a:t> med eget ikon: en lyseblå jordklode med en rakett i bane.</a:t>
+              <a:t> øverst: allergier, tilstander, implantater.</a:t>
             </a:r>
             <a:endParaRPr lang="en-US" sz="1500" dirty="0"/>
           </a:p>
@@ -6561,7 +7149,7 @@
                   <a:schemeClr val="tx1"/>
                 </a:solidFill>
               </a:rPr>
-              <a:t>Bare godkjente nettsteder:</a:t>
+              <a:t>Besøk og notater</a:t>
             </a:r>
             <a:pPr indent="0" marL="0">
               <a:spcAft>
@@ -6575,7 +7163,7 @@
                   <a:schemeClr val="tx1"/>
                 </a:solidFill>
               </a:rPr>
-              <a:t> helse, offentlige tjenester og norske nyheter.</a:t>
+              <a:t> fra alle virksomheter samlet.</a:t>
             </a:r>
             <a:endParaRPr lang="en-US" sz="1500" dirty="0"/>
           </a:p>
@@ -6593,7 +7181,7 @@
                   <a:schemeClr val="tx1"/>
                 </a:solidFill>
               </a:rPr>
-              <a:t>Ingen reklame eller sporing,</a:t>
+              <a:t>E-resept</a:t>
             </a:r>
             <a:pPr indent="0" marL="0">
               <a:spcAft>
@@ -6607,15 +7195,47 @@
                   <a:schemeClr val="tx1"/>
                 </a:solidFill>
               </a:rPr>
-              <a:t> ingenting lagres, ingen andre merkevarer.</a:t>
+              <a:t> for leger.</a:t>
             </a:r>
             <a:endParaRPr lang="en-US" sz="1500" dirty="0"/>
           </a:p>
-        </p:txBody>
-      </p:sp>
-      <p:sp>
-        <p:nvSpPr>
-          <p:cNvPr id="4" name="Medicus Nettleser ramme"/>
+          <a:p>
+            <a:pPr marL="342900" indent="-342900">
+              <a:spcAft>
+                <a:spcPts val="800"/>
+              </a:spcAft>
+              <a:buSzPct val="100000"/>
+              <a:buChar char="•"/>
+            </a:pPr>
+            <a:r>
+              <a:rPr lang="en-US" sz="1500" b="1" dirty="0">
+                <a:solidFill>
+                  <a:schemeClr val="tx1"/>
+                </a:solidFill>
+              </a:rPr>
+              <a:t>Hver åpning logges</a:t>
+            </a:r>
+            <a:pPr indent="0" marL="0">
+              <a:spcAft>
+                <a:spcPts val="800"/>
+              </a:spcAft>
+              <a:buNone/>
+            </a:pPr>
+            <a:r>
+              <a:rPr lang="en-US" sz="1500" dirty="0">
+                <a:solidFill>
+                  <a:schemeClr val="tx1"/>
+                </a:solidFill>
+              </a:rPr>
+              <a:t> og vises for pasienten.</a:t>
+            </a:r>
+            <a:endParaRPr lang="en-US" sz="1500" dirty="0"/>
+          </a:p>
+        </p:txBody>
+      </p:sp>
+      <p:sp>
+        <p:nvSpPr>
+          <p:cNvPr id="4" name="Pasientjournal ramme"/>
           <p:cNvSpPr/>
           <p:nvPr/>
         </p:nvSpPr>
@@ -6647,7 +7267,7 @@
       </p:sp>
       <p:pic>
         <p:nvPicPr>
-          <p:cNvPr id="5" name="Medicus Nettleser" descr="Medicus Nettleser">    </p:cNvPr>
+          <p:cNvPr id="5" name="Pasientjournal" descr="Pasientjournal">    </p:cNvPr>
           <p:cNvPicPr>
             <a:picLocks noChangeAspect="1"/>
           </p:cNvPicPr>
@@ -7487,7 +8107,7 @@
                   <a:schemeClr val="tx2"/>
                 </a:solidFill>
               </a:rPr>
-              <a:t>Sikkerhetssenter</a:t>
+              <a:t>Medicus Post – svindelvarsel</a:t>
             </a:r>
             <a:endParaRPr lang="en-US" sz="3200" dirty="0"/>
           </a:p>
@@ -7529,7 +8149,7 @@
                   <a:schemeClr val="tx1"/>
                 </a:solidFill>
               </a:rPr>
-              <a:t>Sjekker live</a:t>
+              <a:t>Grønn:</a:t>
             </a:r>
             <a:pPr indent="0" marL="0">
               <a:spcAft>
@@ -7543,7 +8163,7 @@
                   <a:schemeClr val="tx1"/>
                 </a:solidFill>
               </a:rPr>
-              <a:t> at vernet virker.</a:t>
+              <a:t> verifisert helsepersonell i helsenettet.</a:t>
             </a:r>
             <a:endParaRPr lang="en-US" sz="1500" dirty="0"/>
           </a:p>
@@ -7561,7 +8181,7 @@
                   <a:schemeClr val="tx1"/>
                 </a:solidFill>
               </a:rPr>
-              <a:t>Grønt:</a:t>
+              <a:t>Rød:</a:t>
             </a:r>
             <a:pPr indent="0" marL="0">
               <a:spcAft>
@@ -7575,7 +8195,7 @@
                   <a:schemeClr val="tx1"/>
                 </a:solidFill>
               </a:rPr>
-              <a:t> i orden. Rødt: kontakt IT.</a:t>
+              <a:t> mistenkelig e-post med forklaring på vanlig norsk.</a:t>
             </a:r>
             <a:endParaRPr lang="en-US" sz="1500" dirty="0"/>
           </a:p>
@@ -7593,7 +8213,7 @@
                   <a:schemeClr val="tx1"/>
                 </a:solidFill>
               </a:rPr>
-              <a:t>Brannmur, USB, virus,</a:t>
+              <a:t>Lenker og vedlegg</a:t>
             </a:r>
             <a:pPr indent="0" marL="0">
               <a:spcAft>
@@ -7607,7 +8227,7 @@
                   <a:schemeClr val="tx1"/>
                 </a:solidFill>
               </a:rPr>
-              <a:t> logg, oppdateringer, VPN.</a:t>
+              <a:t> fra utsiden er blokkert.</a:t>
             </a:r>
             <a:endParaRPr lang="en-US" sz="1500" dirty="0"/>
           </a:p>
@@ -7615,7 +8235,7 @@
       </p:sp>
       <p:sp>
         <p:nvSpPr>
-          <p:cNvPr id="4" name="Sikkerhetssenter ramme"/>
+          <p:cNvPr id="4" name="Medicus Post – svindelvarsel ramme"/>
           <p:cNvSpPr/>
           <p:nvPr/>
         </p:nvSpPr>
@@ -7647,7 +8267,7 @@
       </p:sp>
       <p:pic>
         <p:nvPicPr>
-          <p:cNvPr id="5" name="Sikkerhetssenter" descr="Sikkerhetssenter">    </p:cNvPr>
+          <p:cNvPr id="5" name="Medicus Post – svindelvarsel" descr="Medicus Post – svindelvarsel">    </p:cNvPr>
           <p:cNvPicPr>
             <a:picLocks noChangeAspect="1"/>
           </p:cNvPicPr>
@@ -7771,7 +8391,7 @@
                   <a:schemeClr val="tx2"/>
                 </a:solidFill>
               </a:rPr>
-              <a:t>Pasienten ser hvem som har sett journalen</a:t>
+              <a:t>Bildedeling: røntgen og MR</a:t>
             </a:r>
             <a:endParaRPr lang="en-US" sz="3200" dirty="0"/>
           </a:p>
@@ -7813,7 +8433,7 @@
                   <a:schemeClr val="tx1"/>
                 </a:solidFill>
               </a:rPr>
-              <a:t>Innbyggerportalen</a:t>
+              <a:t>DICOM-bilder</a:t>
             </a:r>
             <a:pPr indent="0" marL="0">
               <a:spcAft>
@@ -7827,7 +8447,7 @@
                   <a:schemeClr val="tx1"/>
                 </a:solidFill>
               </a:rPr>
-              <a:t> (simulert Helsenorge).</a:t>
+              <a:t> vises rett i meldingen.</a:t>
             </a:r>
             <a:endParaRPr lang="en-US" sz="1500" dirty="0"/>
           </a:p>
@@ -7845,7 +8465,7 @@
                   <a:schemeClr val="tx1"/>
                 </a:solidFill>
               </a:rPr>
-              <a:t>Navn, rolle, sted og begrunnelse</a:t>
+              <a:t>Lysstyrke, kontrast</a:t>
             </a:r>
             <a:pPr indent="0" marL="0">
               <a:spcAft>
@@ -7859,7 +8479,7 @@
                   <a:schemeClr val="tx1"/>
                 </a:solidFill>
               </a:rPr>
-              <a:t> for hver åpning.</a:t>
+              <a:t> og inverter.</a:t>
             </a:r>
             <a:endParaRPr lang="en-US" sz="1500" dirty="0"/>
           </a:p>
@@ -7877,7 +8497,7 @@
                   <a:schemeClr val="tx1"/>
                 </a:solidFill>
               </a:rPr>
-              <a:t>Nødtilgang</a:t>
+              <a:t>Virusskannet</a:t>
             </a:r>
             <a:pPr indent="0" marL="0">
               <a:spcAft>
@@ -7891,7 +8511,7 @@
                   <a:schemeClr val="tx1"/>
                 </a:solidFill>
               </a:rPr>
-              <a:t> er tydelig merket.</a:t>
+              <a:t> før de slippes inn.</a:t>
             </a:r>
             <a:endParaRPr lang="en-US" sz="1500" dirty="0"/>
           </a:p>
@@ -7899,7 +8519,7 @@
       </p:sp>
       <p:sp>
         <p:nvSpPr>
-          <p:cNvPr id="4" name="Pasienten ser hvem som har sett journalen ramme"/>
+          <p:cNvPr id="4" name="Bildedeling: røntgen og MR ramme"/>
           <p:cNvSpPr/>
           <p:nvPr/>
         </p:nvSpPr>
@@ -7931,7 +8551,7 @@
       </p:sp>
       <p:pic>
         <p:nvPicPr>
-          <p:cNvPr id="5" name="Pasienten ser hvem som har sett journalen" descr="Pasienten ser hvem som har sett journalen">    </p:cNvPr>
+          <p:cNvPr id="5" name="Bildedeling: røntgen og MR" descr="Bildedeling: røntgen og MR">    </p:cNvPr>
           <p:cNvPicPr>
             <a:picLocks noChangeAspect="1"/>
           </p:cNvPicPr>
@@ -8055,7 +8675,7 @@
                   <a:schemeClr val="tx2"/>
                 </a:solidFill>
               </a:rPr>
-              <a:t>Forespørsler fra myndigheter</a:t>
+              <a:t>Medicus Nettleser</a:t>
             </a:r>
             <a:endParaRPr lang="en-US" sz="3200" dirty="0"/>
           </a:p>
@@ -8097,7 +8717,7 @@
                   <a:schemeClr val="tx1"/>
                 </a:solidFill>
               </a:rPr>
-              <a:t>Bare med lovhjemmel</a:t>
+              <a:t>Egen nettleser</a:t>
             </a:r>
             <a:pPr indent="0" marL="0">
               <a:spcAft>
@@ -8111,7 +8731,7 @@
                   <a:schemeClr val="tx1"/>
                 </a:solidFill>
               </a:rPr>
-              <a:t> som gjelder for akkurat den myndigheten.</a:t>
+              <a:t> med eget ikon: en lyseblå jordklode med en rakett i bane.</a:t>
             </a:r>
             <a:endParaRPr lang="en-US" sz="1500" dirty="0"/>
           </a:p>
@@ -8129,7 +8749,7 @@
                   <a:schemeClr val="tx1"/>
                 </a:solidFill>
               </a:rPr>
-              <a:t>Politi, barnevern, NAV, tilsyn:</a:t>
+              <a:t>Bare godkjente nettsteder:</a:t>
             </a:r>
             <a:pPr indent="0" marL="0">
               <a:spcAft>
@@ -8143,7 +8763,7 @@
                   <a:schemeClr val="tx1"/>
                 </a:solidFill>
               </a:rPr>
-              <a:t> hver sine hjemler. Andre trenger samtykke.</a:t>
+              <a:t> helse, offentlige tjenester og norske nyheter.</a:t>
             </a:r>
             <a:endParaRPr lang="en-US" sz="1500" dirty="0"/>
           </a:p>
@@ -8161,7 +8781,7 @@
                   <a:schemeClr val="tx1"/>
                 </a:solidFill>
               </a:rPr>
-              <a:t>Et menneske vurderer,</a:t>
+              <a:t>Ingen reklame eller sporing,</a:t>
             </a:r>
             <a:pPr indent="0" marL="0">
               <a:spcAft>
@@ -8175,7 +8795,7 @@
                   <a:schemeClr val="tx1"/>
                 </a:solidFill>
               </a:rPr>
-              <a:t> minst mulig utleveres, pasienten varsles.</a:t>
+              <a:t> ingenting lagres, ingen andre merkevarer.</a:t>
             </a:r>
             <a:endParaRPr lang="en-US" sz="1500" dirty="0"/>
           </a:p>
@@ -8183,7 +8803,7 @@
       </p:sp>
       <p:sp>
         <p:nvSpPr>
-          <p:cNvPr id="4" name="Forespørsler fra myndigheter ramme"/>
+          <p:cNvPr id="4" name="Medicus Nettleser ramme"/>
           <p:cNvSpPr/>
           <p:nvPr/>
         </p:nvSpPr>
@@ -8215,7 +8835,7 @@
       </p:sp>
       <p:pic>
         <p:nvPicPr>
-          <p:cNvPr id="5" name="Forespørsler fra myndigheter" descr="Forespørsler fra myndigheter">    </p:cNvPr>
+          <p:cNvPr id="5" name="Medicus Nettleser" descr="Medicus Nettleser">    </p:cNvPr>
           <p:cNvPicPr>
             <a:picLocks noChangeAspect="1"/>
           </p:cNvPicPr>
@@ -8339,7 +8959,7 @@
                   <a:schemeClr val="tx2"/>
                 </a:solidFill>
               </a:rPr>
-              <a:t>Medicus Kalkulator</a:t>
+              <a:t>Sikkerhetssenter</a:t>
             </a:r>
             <a:endParaRPr lang="en-US" sz="3200" dirty="0"/>
           </a:p>
@@ -8381,7 +9001,7 @@
                   <a:schemeClr val="tx1"/>
                 </a:solidFill>
               </a:rPr>
-              <a:t>Kalkulator</a:t>
+              <a:t>Sjekker live</a:t>
             </a:r>
             <a:pPr indent="0" marL="0">
               <a:spcAft>
@@ -8395,7 +9015,7 @@
                   <a:schemeClr val="tx1"/>
                 </a:solidFill>
               </a:rPr>
-              <a:t> med desimalkomma.</a:t>
+              <a:t> at vernet virker.</a:t>
             </a:r>
             <a:endParaRPr lang="en-US" sz="1500" dirty="0"/>
           </a:p>
@@ -8413,7 +9033,7 @@
                   <a:schemeClr val="tx1"/>
                 </a:solidFill>
               </a:rPr>
-              <a:t>Alle enheter:</a:t>
+              <a:t>Grønt:</a:t>
             </a:r>
             <a:pPr indent="0" marL="0">
               <a:spcAft>
@@ -8427,7 +9047,7 @@
                   <a:schemeClr val="tx1"/>
                 </a:solidFill>
               </a:rPr>
-              <a:t> µg–kg, µl–liter, teskje og spiseskje.</a:t>
+              <a:t> i orden. Rødt: kontakt IT.</a:t>
             </a:r>
             <a:endParaRPr lang="en-US" sz="1500" dirty="0"/>
           </a:p>
@@ -8445,7 +9065,7 @@
                   <a:schemeClr val="tx1"/>
                 </a:solidFill>
               </a:rPr>
-              <a:t>Vekt ↔ volum:</a:t>
+              <a:t>Brannmur, USB, virus,</a:t>
             </a:r>
             <a:pPr indent="0" marL="0">
               <a:spcAft>
@@ -8459,47 +9079,15 @@
                   <a:schemeClr val="tx1"/>
                 </a:solidFill>
               </a:rPr>
-              <a:t> f.eks. liter → kg, med tetthet for blod, saltvann m.m.</a:t>
+              <a:t> logg, oppdateringer, VPN.</a:t>
             </a:r>
             <a:endParaRPr lang="en-US" sz="1500" dirty="0"/>
           </a:p>
-          <a:p>
-            <a:pPr marL="342900" indent="-342900">
-              <a:spcAft>
-                <a:spcPts val="800"/>
-              </a:spcAft>
-              <a:buSzPct val="100000"/>
-              <a:buChar char="•"/>
-            </a:pPr>
-            <a:r>
-              <a:rPr lang="en-US" sz="1500" b="1" dirty="0">
-                <a:solidFill>
-                  <a:schemeClr val="tx1"/>
-                </a:solidFill>
-              </a:rPr>
-              <a:t>Advarsel:</a:t>
-            </a:r>
-            <a:pPr indent="0" marL="0">
-              <a:spcAft>
-                <a:spcPts val="800"/>
-              </a:spcAft>
-              <a:buNone/>
-            </a:pPr>
-            <a:r>
-              <a:rPr lang="en-US" sz="1500" dirty="0">
-                <a:solidFill>
-                  <a:schemeClr val="tx1"/>
-                </a:solidFill>
-              </a:rPr>
-              <a:t> ikke for legemiddeldosering.</a:t>
-            </a:r>
-            <a:endParaRPr lang="en-US" sz="1500" dirty="0"/>
-          </a:p>
-        </p:txBody>
-      </p:sp>
-      <p:sp>
-        <p:nvSpPr>
-          <p:cNvPr id="4" name="Medicus Kalkulator ramme"/>
+        </p:txBody>
+      </p:sp>
+      <p:sp>
+        <p:nvSpPr>
+          <p:cNvPr id="4" name="Sikkerhetssenter ramme"/>
           <p:cNvSpPr/>
           <p:nvPr/>
         </p:nvSpPr>
@@ -8531,7 +9119,7 @@
       </p:sp>
       <p:pic>
         <p:nvPicPr>
-          <p:cNvPr id="5" name="Medicus Kalkulator" descr="Medicus Kalkulator">    </p:cNvPr>
+          <p:cNvPr id="5" name="Sikkerhetssenter" descr="Sikkerhetssenter">    </p:cNvPr>
           <p:cNvPicPr>
             <a:picLocks noChangeAspect="1"/>
           </p:cNvPicPr>
@@ -8628,13 +9216,13 @@
           <p:cNvPr id="2" name="Text 0"/>
           <p:cNvSpPr/>
           <p:nvPr>
-            <p:ph idx="100" type="body" hasCustomPrompt="1"/>
-          </p:nvPr>
-        </p:nvSpPr>
-        <p:spPr>
-          <a:xfrm>
-            <a:off x="731520" y="2103120"/>
-            <a:ext cx="2743200" cy="1097280"/>
+            <p:ph idx="100" type="title" hasCustomPrompt="1"/>
+          </p:nvPr>
+        </p:nvSpPr>
+        <p:spPr>
+          <a:xfrm>
+            <a:off x="548640" y="365760"/>
+            <a:ext cx="11064240" cy="731520"/>
           </a:xfrm>
           <a:prstGeom prst="rect">
             <a:avLst/>
@@ -8646,18 +9234,18 @@
           <a:bodyPr wrap="square" rtlCol="0"/>
           <a:lstStyle/>
           <a:p>
-            <a:pPr indent="0" marL="0">
-              <a:buNone/>
-            </a:pPr>
-            <a:r>
-              <a:rPr lang="en-US" sz="6000" b="1" dirty="0">
-                <a:solidFill>
-                  <a:schemeClr val="accent2"/>
-                </a:solidFill>
-              </a:rPr>
-              <a:t>05</a:t>
-            </a:r>
-            <a:endParaRPr lang="en-US" sz="6000" dirty="0"/>
+            <a:pPr algn="l" indent="0" marL="0">
+              <a:buNone/>
+            </a:pPr>
+            <a:r>
+              <a:rPr lang="en-US" sz="3200" b="1" dirty="0">
+                <a:solidFill>
+                  <a:schemeClr val="tx2"/>
+                </a:solidFill>
+              </a:rPr>
+              <a:t>Pasienten ser hvem som har sett journalen</a:t>
+            </a:r>
+            <a:endParaRPr lang="en-US" sz="3200" dirty="0"/>
           </a:p>
         </p:txBody>
       </p:sp>
@@ -8666,13 +9254,13 @@
           <p:cNvPr id="3" name="Text 0"/>
           <p:cNvSpPr/>
           <p:nvPr>
-            <p:ph idx="101" type="title" hasCustomPrompt="1"/>
-          </p:nvPr>
-        </p:nvSpPr>
-        <p:spPr>
-          <a:xfrm>
-            <a:off x="731520" y="3108960"/>
-            <a:ext cx="10698480" cy="914400"/>
+            <p:ph idx="101" type="body" hasCustomPrompt="1"/>
+          </p:nvPr>
+        </p:nvSpPr>
+        <p:spPr>
+          <a:xfrm>
+            <a:off x="548640" y="1371600"/>
+            <a:ext cx="3657600" cy="4754880"/>
           </a:xfrm>
           <a:prstGeom prst="rect">
             <a:avLst/>
@@ -8681,59 +9269,204 @@
           <a:ln/>
         </p:spPr>
         <p:txBody>
-          <a:bodyPr wrap="square" rtlCol="0"/>
-          <a:lstStyle/>
-          <a:p>
-            <a:pPr algn="l" indent="0" marL="0">
-              <a:buNone/>
-            </a:pPr>
-            <a:r>
-              <a:rPr lang="en-US" sz="4000" b="1" dirty="0">
-                <a:solidFill>
-                  <a:schemeClr val="bg1"/>
-                </a:solidFill>
-              </a:rPr>
-              <a:t>Sikkerhet</a:t>
-            </a:r>
-            <a:endParaRPr lang="en-US" sz="4000" dirty="0"/>
-          </a:p>
-        </p:txBody>
-      </p:sp>
-      <p:sp>
-        <p:nvSpPr>
-          <p:cNvPr id="4" name="Text 0"/>
+          <a:bodyPr wrap="square" rtlCol="0" anchor="t"/>
+          <a:lstStyle/>
+          <a:p>
+            <a:pPr marL="342900" indent="-342900">
+              <a:spcAft>
+                <a:spcPts val="800"/>
+              </a:spcAft>
+              <a:buSzPct val="100000"/>
+              <a:buChar char="•"/>
+            </a:pPr>
+            <a:r>
+              <a:rPr lang="en-US" sz="1500" b="1" dirty="0">
+                <a:solidFill>
+                  <a:schemeClr val="tx1"/>
+                </a:solidFill>
+              </a:rPr>
+              <a:t>Innbyggerportalen</a:t>
+            </a:r>
+            <a:pPr indent="0" marL="0">
+              <a:spcAft>
+                <a:spcPts val="800"/>
+              </a:spcAft>
+              <a:buNone/>
+            </a:pPr>
+            <a:r>
+              <a:rPr lang="en-US" sz="1500" dirty="0">
+                <a:solidFill>
+                  <a:schemeClr val="tx1"/>
+                </a:solidFill>
+              </a:rPr>
+              <a:t> (simulert Helsenorge).</a:t>
+            </a:r>
+            <a:endParaRPr lang="en-US" sz="1500" dirty="0"/>
+          </a:p>
+          <a:p>
+            <a:pPr marL="342900" indent="-342900">
+              <a:spcAft>
+                <a:spcPts val="800"/>
+              </a:spcAft>
+              <a:buSzPct val="100000"/>
+              <a:buChar char="•"/>
+            </a:pPr>
+            <a:r>
+              <a:rPr lang="en-US" sz="1500" b="1" dirty="0">
+                <a:solidFill>
+                  <a:schemeClr val="tx1"/>
+                </a:solidFill>
+              </a:rPr>
+              <a:t>Navn, rolle, sted og begrunnelse</a:t>
+            </a:r>
+            <a:pPr indent="0" marL="0">
+              <a:spcAft>
+                <a:spcPts val="800"/>
+              </a:spcAft>
+              <a:buNone/>
+            </a:pPr>
+            <a:r>
+              <a:rPr lang="en-US" sz="1500" dirty="0">
+                <a:solidFill>
+                  <a:schemeClr val="tx1"/>
+                </a:solidFill>
+              </a:rPr>
+              <a:t> for hver åpning.</a:t>
+            </a:r>
+            <a:endParaRPr lang="en-US" sz="1500" dirty="0"/>
+          </a:p>
+          <a:p>
+            <a:pPr marL="342900" indent="-342900">
+              <a:spcAft>
+                <a:spcPts val="800"/>
+              </a:spcAft>
+              <a:buSzPct val="100000"/>
+              <a:buChar char="•"/>
+            </a:pPr>
+            <a:r>
+              <a:rPr lang="en-US" sz="1500" b="1" dirty="0">
+                <a:solidFill>
+                  <a:schemeClr val="tx1"/>
+                </a:solidFill>
+              </a:rPr>
+              <a:t>Nødtilgang</a:t>
+            </a:r>
+            <a:pPr indent="0" marL="0">
+              <a:spcAft>
+                <a:spcPts val="800"/>
+              </a:spcAft>
+              <a:buNone/>
+            </a:pPr>
+            <a:r>
+              <a:rPr lang="en-US" sz="1500" dirty="0">
+                <a:solidFill>
+                  <a:schemeClr val="tx1"/>
+                </a:solidFill>
+              </a:rPr>
+              <a:t> er tydelig merket.</a:t>
+            </a:r>
+            <a:endParaRPr lang="en-US" sz="1500" dirty="0"/>
+          </a:p>
+        </p:txBody>
+      </p:sp>
+      <p:sp>
+        <p:nvSpPr>
+          <p:cNvPr id="4" name="Pasienten ser hvem som har sett journalen ramme"/>
           <p:cNvSpPr/>
-          <p:nvPr>
-            <p:ph idx="102" type="body" hasCustomPrompt="1"/>
-          </p:nvPr>
-        </p:nvSpPr>
-        <p:spPr>
-          <a:xfrm>
-            <a:off x="731520" y="4023360"/>
-            <a:ext cx="10698480" cy="822960"/>
-          </a:xfrm>
-          <a:prstGeom prst="rect">
-            <a:avLst/>
-          </a:prstGeom>
-          <a:noFill/>
-          <a:ln/>
-        </p:spPr>
-        <p:txBody>
-          <a:bodyPr wrap="square" rtlCol="0"/>
-          <a:lstStyle/>
-          <a:p>
-            <a:pPr indent="0" marL="0">
-              <a:buNone/>
-            </a:pPr>
-            <a:r>
-              <a:rPr lang="en-US" sz="1800" dirty="0">
-                <a:solidFill>
-                  <a:schemeClr val="accent2"/>
-                </a:solidFill>
-              </a:rPr>
-              <a:t>Lag på lag – ingen enkeltfeil åpner alt</a:t>
-            </a:r>
-            <a:endParaRPr lang="en-US" sz="1800" dirty="0"/>
+          <p:nvPr/>
+        </p:nvSpPr>
+        <p:spPr>
+          <a:xfrm>
+            <a:off x="4526280" y="1371600"/>
+            <a:ext cx="7132320" cy="4457700"/>
+          </a:xfrm>
+          <a:prstGeom prst="rect">
+            <a:avLst/>
+          </a:prstGeom>
+          <a:solidFill>
+            <a:schemeClr val="bg1"/>
+          </a:solidFill>
+          <a:ln w="9525">
+            <a:solidFill>
+              <a:srgbClr val="D2DDD5"/>
+            </a:solidFill>
+            <a:prstDash val="solid"/>
+          </a:ln>
+          <a:effectLst>
+            <a:outerShdw sx="100000" sy="100000" kx="0" ky="0" algn="bl" rotWithShape="0" blurRad="101600" dist="38100" dir="5400000">
+              <a:srgbClr val="000000">
+                <a:alpha val="25000"/>
+              </a:srgbClr>
+            </a:outerShdw>
+          </a:effectLst>
+        </p:spPr>
+      </p:sp>
+      <p:pic>
+        <p:nvPicPr>
+          <p:cNvPr id="5" name="Pasienten ser hvem som har sett journalen" descr="Pasienten ser hvem som har sett journalen">    </p:cNvPr>
+          <p:cNvPicPr>
+            <a:picLocks noChangeAspect="1"/>
+          </p:cNvPicPr>
+          <p:nvPr/>
+        </p:nvPicPr>
+        <p:blipFill>
+          <a:blip r:embed="rId1"/>
+          <a:stretch>
+            <a:fillRect/>
+          </a:stretch>
+        </p:blipFill>
+        <p:spPr>
+          <a:xfrm>
+            <a:off x="4526280" y="1371600"/>
+            <a:ext cx="7132320" cy="4457700"/>
+          </a:xfrm>
+          <a:prstGeom prst="rect">
+            <a:avLst/>
+          </a:prstGeom>
+        </p:spPr>
+      </p:pic>
+      <p:sp>
+        <p:nvSpPr>
+          <p:cNvPr id="25" name="Slide Number Placeholder 0"/>
+          <p:cNvSpPr>
+            <a:spLocks noGrp="1"/>
+          </p:cNvSpPr>
+          <p:nvPr>
+            <p:ph type="sldNum" sz="quarter" idx="4294967295"/>
+          </p:nvPr>
+        </p:nvSpPr>
+        <p:spPr>
+          <a:xfrm>
+            <a:off x="11247120" y="6400800"/>
+            <a:ext cx="457200" cy="274320"/>
+          </a:xfrm>
+          <a:prstGeom prst="rect">
+            <a:avLst/>
+          </a:prstGeom>
+          <a:extLst>
+            <a:ext uri="{C572A759-6A51-4108-AA02-DFA0A04FC94B}">
+              <ma14:wrappingTextBoxFlag xmlns:ma14="http://schemas.microsoft.com/office/mac/drawingml/2011/main" val="0"/>
+            </a:ext>
+          </a:extLst>
+        </p:spPr>
+        <p:txBody>
+          <a:bodyPr/>
+          <a:lstStyle>
+            <a:lvl1pPr>
+              <a:defRPr sz="1000">
+                <a:solidFill>
+                  <a:schemeClr val="accent6"/>
+                </a:solidFill>
+              </a:defRPr>
+            </a:lvl1pPr>
+          </a:lstStyle>
+          <a:p>
+            <a:pPr algn="r"/>
+            <a:fld id="{F7021451-1387-4CA6-816F-3879F97B5CBC}" type="slidenum">
+              <a:rPr b="0" lang="en-US"/>
+              <a:t>24</a:t>
+            </a:fld>
+            <a:endParaRPr lang="en-US"/>
           </a:p>
         </p:txBody>
       </p:sp>
@@ -8794,7 +9527,7 @@
                   <a:schemeClr val="tx2"/>
                 </a:solidFill>
               </a:rPr>
-              <a:t>Vernet i lag</a:t>
+              <a:t>Forespørsler fra myndigheter</a:t>
             </a:r>
             <a:endParaRPr lang="en-US" sz="3200" dirty="0"/>
           </a:p>
@@ -8802,19 +9535,137 @@
       </p:sp>
       <p:sp>
         <p:nvSpPr>
-          <p:cNvPr id="3" name="Brannmur kort"/>
+          <p:cNvPr id="3" name="Text 0"/>
           <p:cNvSpPr/>
-          <p:nvPr/>
-        </p:nvSpPr>
-        <p:spPr>
-          <a:xfrm>
-            <a:off x="548640" y="1234440"/>
-            <a:ext cx="2567178" cy="2377440"/>
-          </a:xfrm>
-          <a:prstGeom prst="roundRect">
-            <a:avLst>
-              <a:gd name="adj" fmla="val 4615"/>
-            </a:avLst>
+          <p:nvPr>
+            <p:ph idx="101" type="body" hasCustomPrompt="1"/>
+          </p:nvPr>
+        </p:nvSpPr>
+        <p:spPr>
+          <a:xfrm>
+            <a:off x="548640" y="1371600"/>
+            <a:ext cx="3657600" cy="4754880"/>
+          </a:xfrm>
+          <a:prstGeom prst="rect">
+            <a:avLst/>
+          </a:prstGeom>
+          <a:noFill/>
+          <a:ln/>
+        </p:spPr>
+        <p:txBody>
+          <a:bodyPr wrap="square" rtlCol="0" anchor="t"/>
+          <a:lstStyle/>
+          <a:p>
+            <a:pPr marL="342900" indent="-342900">
+              <a:spcAft>
+                <a:spcPts val="800"/>
+              </a:spcAft>
+              <a:buSzPct val="100000"/>
+              <a:buChar char="•"/>
+            </a:pPr>
+            <a:r>
+              <a:rPr lang="en-US" sz="1500" b="1" dirty="0">
+                <a:solidFill>
+                  <a:schemeClr val="tx1"/>
+                </a:solidFill>
+              </a:rPr>
+              <a:t>Bare med lovhjemmel</a:t>
+            </a:r>
+            <a:pPr indent="0" marL="0">
+              <a:spcAft>
+                <a:spcPts val="800"/>
+              </a:spcAft>
+              <a:buNone/>
+            </a:pPr>
+            <a:r>
+              <a:rPr lang="en-US" sz="1500" dirty="0">
+                <a:solidFill>
+                  <a:schemeClr val="tx1"/>
+                </a:solidFill>
+              </a:rPr>
+              <a:t> som gjelder for akkurat den myndigheten.</a:t>
+            </a:r>
+            <a:endParaRPr lang="en-US" sz="1500" dirty="0"/>
+          </a:p>
+          <a:p>
+            <a:pPr marL="342900" indent="-342900">
+              <a:spcAft>
+                <a:spcPts val="800"/>
+              </a:spcAft>
+              <a:buSzPct val="100000"/>
+              <a:buChar char="•"/>
+            </a:pPr>
+            <a:r>
+              <a:rPr lang="en-US" sz="1500" b="1" dirty="0">
+                <a:solidFill>
+                  <a:schemeClr val="tx1"/>
+                </a:solidFill>
+              </a:rPr>
+              <a:t>Politi, barnevern, NAV, tilsyn:</a:t>
+            </a:r>
+            <a:pPr indent="0" marL="0">
+              <a:spcAft>
+                <a:spcPts val="800"/>
+              </a:spcAft>
+              <a:buNone/>
+            </a:pPr>
+            <a:r>
+              <a:rPr lang="en-US" sz="1500" dirty="0">
+                <a:solidFill>
+                  <a:schemeClr val="tx1"/>
+                </a:solidFill>
+              </a:rPr>
+              <a:t> hver sine hjemler. Andre trenger samtykke.</a:t>
+            </a:r>
+            <a:endParaRPr lang="en-US" sz="1500" dirty="0"/>
+          </a:p>
+          <a:p>
+            <a:pPr marL="342900" indent="-342900">
+              <a:spcAft>
+                <a:spcPts val="800"/>
+              </a:spcAft>
+              <a:buSzPct val="100000"/>
+              <a:buChar char="•"/>
+            </a:pPr>
+            <a:r>
+              <a:rPr lang="en-US" sz="1500" b="1" dirty="0">
+                <a:solidFill>
+                  <a:schemeClr val="tx1"/>
+                </a:solidFill>
+              </a:rPr>
+              <a:t>Et menneske vurderer,</a:t>
+            </a:r>
+            <a:pPr indent="0" marL="0">
+              <a:spcAft>
+                <a:spcPts val="800"/>
+              </a:spcAft>
+              <a:buNone/>
+            </a:pPr>
+            <a:r>
+              <a:rPr lang="en-US" sz="1500" dirty="0">
+                <a:solidFill>
+                  <a:schemeClr val="tx1"/>
+                </a:solidFill>
+              </a:rPr>
+              <a:t> minst mulig utleveres, pasienten varsles.</a:t>
+            </a:r>
+            <a:endParaRPr lang="en-US" sz="1500" dirty="0"/>
+          </a:p>
+        </p:txBody>
+      </p:sp>
+      <p:sp>
+        <p:nvSpPr>
+          <p:cNvPr id="4" name="Forespørsler fra myndigheter ramme"/>
+          <p:cNvSpPr/>
+          <p:nvPr/>
+        </p:nvSpPr>
+        <p:spPr>
+          <a:xfrm>
+            <a:off x="4526280" y="1371600"/>
+            <a:ext cx="7132320" cy="4457700"/>
+          </a:xfrm>
+          <a:prstGeom prst="rect">
+            <a:avLst/>
           </a:prstGeom>
           <a:solidFill>
             <a:schemeClr val="bg1"/>
@@ -8825,31 +9676,18 @@
             </a:solidFill>
             <a:prstDash val="solid"/>
           </a:ln>
-        </p:spPr>
-      </p:sp>
-      <p:sp>
-        <p:nvSpPr>
-          <p:cNvPr id="4" name="Brannmur ikonring"/>
-          <p:cNvSpPr/>
-          <p:nvPr/>
-        </p:nvSpPr>
-        <p:spPr>
-          <a:xfrm>
-            <a:off x="822960" y="1508760"/>
-            <a:ext cx="640080" cy="640080"/>
-          </a:xfrm>
-          <a:prstGeom prst="ellipse">
-            <a:avLst/>
-          </a:prstGeom>
-          <a:solidFill>
-            <a:schemeClr val="accent1"/>
-          </a:solidFill>
-          <a:ln/>
+          <a:effectLst>
+            <a:outerShdw sx="100000" sy="100000" kx="0" ky="0" algn="bl" rotWithShape="0" blurRad="101600" dist="38100" dir="5400000">
+              <a:srgbClr val="000000">
+                <a:alpha val="25000"/>
+              </a:srgbClr>
+            </a:outerShdw>
+          </a:effectLst>
         </p:spPr>
       </p:sp>
       <p:pic>
         <p:nvPicPr>
-          <p:cNvPr id="5" name="Brannmur ikon" descr="Brannmur">    </p:cNvPr>
+          <p:cNvPr id="5" name="Forespørsler fra myndigheter" descr="Forespørsler fra myndigheter">    </p:cNvPr>
           <p:cNvPicPr>
             <a:picLocks noChangeAspect="1"/>
           </p:cNvPicPr>
@@ -8863,1087 +9701,14 @@
         </p:blipFill>
         <p:spPr>
           <a:xfrm>
-            <a:off x="960120" y="1645920"/>
-            <a:ext cx="365760" cy="365760"/>
+            <a:off x="4526280" y="1371600"/>
+            <a:ext cx="7132320" cy="4457700"/>
           </a:xfrm>
           <a:prstGeom prst="rect">
             <a:avLst/>
           </a:prstGeom>
         </p:spPr>
       </p:pic>
-      <p:sp>
-        <p:nvSpPr>
-          <p:cNvPr id="6" name="Text 3"/>
-          <p:cNvSpPr txBox="1"/>
-          <p:nvPr/>
-        </p:nvSpPr>
-        <p:spPr>
-          <a:xfrm>
-            <a:off x="822960" y="2286000"/>
-            <a:ext cx="2018538" cy="594360"/>
-          </a:xfrm>
-          <a:prstGeom prst="rect">
-            <a:avLst/>
-          </a:prstGeom>
-          <a:noFill/>
-          <a:ln/>
-        </p:spPr>
-        <p:txBody>
-          <a:bodyPr wrap="square" lIns="0" tIns="0" rIns="0" bIns="0" rtlCol="0" anchor="t"/>
-          <a:lstStyle/>
-          <a:p>
-            <a:pPr indent="0" marL="0">
-              <a:buNone/>
-            </a:pPr>
-            <a:r>
-              <a:rPr lang="en-US" sz="1700" b="1" dirty="0">
-                <a:solidFill>
-                  <a:schemeClr val="tx2"/>
-                </a:solidFill>
-              </a:rPr>
-              <a:t>Brannmur</a:t>
-            </a:r>
-            <a:endParaRPr lang="en-US" sz="1700" dirty="0"/>
-          </a:p>
-        </p:txBody>
-      </p:sp>
-      <p:sp>
-        <p:nvSpPr>
-          <p:cNvPr id="7" name="Text 4"/>
-          <p:cNvSpPr txBox="1"/>
-          <p:nvPr/>
-        </p:nvSpPr>
-        <p:spPr>
-          <a:xfrm>
-            <a:off x="822960" y="2926080"/>
-            <a:ext cx="2018538" cy="548640"/>
-          </a:xfrm>
-          <a:prstGeom prst="rect">
-            <a:avLst/>
-          </a:prstGeom>
-          <a:noFill/>
-          <a:ln/>
-        </p:spPr>
-        <p:txBody>
-          <a:bodyPr wrap="square" lIns="0" tIns="0" rIns="0" bIns="0" rtlCol="0" anchor="t"/>
-          <a:lstStyle/>
-          <a:p>
-            <a:pPr indent="0" marL="0">
-              <a:buNone/>
-            </a:pPr>
-            <a:r>
-              <a:rPr lang="en-US" sz="1400" dirty="0">
-                <a:solidFill>
-                  <a:schemeClr val="tx1"/>
-                </a:solidFill>
-              </a:rPr>
-              <a:t>Ingen kan koble seg til utenfra. Apper når bare helsenettet.</a:t>
-            </a:r>
-            <a:endParaRPr lang="en-US" sz="1400" dirty="0"/>
-          </a:p>
-        </p:txBody>
-      </p:sp>
-      <p:sp>
-        <p:nvSpPr>
-          <p:cNvPr id="8" name="USB-lås kort"/>
-          <p:cNvSpPr/>
-          <p:nvPr/>
-        </p:nvSpPr>
-        <p:spPr>
-          <a:xfrm>
-            <a:off x="3390138" y="1234440"/>
-            <a:ext cx="2567178" cy="2377440"/>
-          </a:xfrm>
-          <a:prstGeom prst="roundRect">
-            <a:avLst>
-              <a:gd name="adj" fmla="val 4615"/>
-            </a:avLst>
-          </a:prstGeom>
-          <a:solidFill>
-            <a:schemeClr val="bg1"/>
-          </a:solidFill>
-          <a:ln w="9525">
-            <a:solidFill>
-              <a:srgbClr val="D2DDD5"/>
-            </a:solidFill>
-            <a:prstDash val="solid"/>
-          </a:ln>
-        </p:spPr>
-      </p:sp>
-      <p:sp>
-        <p:nvSpPr>
-          <p:cNvPr id="9" name="USB-lås ikonring"/>
-          <p:cNvSpPr/>
-          <p:nvPr/>
-        </p:nvSpPr>
-        <p:spPr>
-          <a:xfrm>
-            <a:off x="3664458" y="1508760"/>
-            <a:ext cx="640080" cy="640080"/>
-          </a:xfrm>
-          <a:prstGeom prst="ellipse">
-            <a:avLst/>
-          </a:prstGeom>
-          <a:solidFill>
-            <a:schemeClr val="accent1"/>
-          </a:solidFill>
-          <a:ln/>
-        </p:spPr>
-      </p:sp>
-      <p:pic>
-        <p:nvPicPr>
-          <p:cNvPr id="10" name="USB-lås ikon" descr="USB-lås">    </p:cNvPr>
-          <p:cNvPicPr>
-            <a:picLocks noChangeAspect="1"/>
-          </p:cNvPicPr>
-          <p:nvPr/>
-        </p:nvPicPr>
-        <p:blipFill>
-          <a:blip r:embed="rId2"/>
-          <a:stretch>
-            <a:fillRect/>
-          </a:stretch>
-        </p:blipFill>
-        <p:spPr>
-          <a:xfrm>
-            <a:off x="3801618" y="1645920"/>
-            <a:ext cx="365760" cy="365760"/>
-          </a:xfrm>
-          <a:prstGeom prst="rect">
-            <a:avLst/>
-          </a:prstGeom>
-        </p:spPr>
-      </p:pic>
-      <p:sp>
-        <p:nvSpPr>
-          <p:cNvPr id="11" name="Text 7"/>
-          <p:cNvSpPr txBox="1"/>
-          <p:nvPr/>
-        </p:nvSpPr>
-        <p:spPr>
-          <a:xfrm>
-            <a:off x="3664458" y="2286000"/>
-            <a:ext cx="2018538" cy="594360"/>
-          </a:xfrm>
-          <a:prstGeom prst="rect">
-            <a:avLst/>
-          </a:prstGeom>
-          <a:noFill/>
-          <a:ln/>
-        </p:spPr>
-        <p:txBody>
-          <a:bodyPr wrap="square" lIns="0" tIns="0" rIns="0" bIns="0" rtlCol="0" anchor="t"/>
-          <a:lstStyle/>
-          <a:p>
-            <a:pPr indent="0" marL="0">
-              <a:buNone/>
-            </a:pPr>
-            <a:r>
-              <a:rPr lang="en-US" sz="1700" b="1" dirty="0">
-                <a:solidFill>
-                  <a:schemeClr val="tx2"/>
-                </a:solidFill>
-              </a:rPr>
-              <a:t>USB-lås</a:t>
-            </a:r>
-            <a:endParaRPr lang="en-US" sz="1700" dirty="0"/>
-          </a:p>
-        </p:txBody>
-      </p:sp>
-      <p:sp>
-        <p:nvSpPr>
-          <p:cNvPr id="12" name="Text 8"/>
-          <p:cNvSpPr txBox="1"/>
-          <p:nvPr/>
-        </p:nvSpPr>
-        <p:spPr>
-          <a:xfrm>
-            <a:off x="3664458" y="2926080"/>
-            <a:ext cx="2018538" cy="548640"/>
-          </a:xfrm>
-          <a:prstGeom prst="rect">
-            <a:avLst/>
-          </a:prstGeom>
-          <a:noFill/>
-          <a:ln/>
-        </p:spPr>
-        <p:txBody>
-          <a:bodyPr wrap="square" lIns="0" tIns="0" rIns="0" bIns="0" rtlCol="0" anchor="t"/>
-          <a:lstStyle/>
-          <a:p>
-            <a:pPr indent="0" marL="0">
-              <a:buNone/>
-            </a:pPr>
-            <a:r>
-              <a:rPr lang="en-US" sz="1400" dirty="0">
-                <a:solidFill>
-                  <a:schemeClr val="tx1"/>
-                </a:solidFill>
-              </a:rPr>
-              <a:t>Minnepinner blokkert. Bare tastatur, mus, hodesett og kortleser.</a:t>
-            </a:r>
-            <a:endParaRPr lang="en-US" sz="1400" dirty="0"/>
-          </a:p>
-        </p:txBody>
-      </p:sp>
-      <p:sp>
-        <p:nvSpPr>
-          <p:cNvPr id="13" name="Virusskanning kort"/>
-          <p:cNvSpPr/>
-          <p:nvPr/>
-        </p:nvSpPr>
-        <p:spPr>
-          <a:xfrm>
-            <a:off x="6231636" y="1234440"/>
-            <a:ext cx="2567178" cy="2377440"/>
-          </a:xfrm>
-          <a:prstGeom prst="roundRect">
-            <a:avLst>
-              <a:gd name="adj" fmla="val 4615"/>
-            </a:avLst>
-          </a:prstGeom>
-          <a:solidFill>
-            <a:schemeClr val="bg1"/>
-          </a:solidFill>
-          <a:ln w="9525">
-            <a:solidFill>
-              <a:srgbClr val="D2DDD5"/>
-            </a:solidFill>
-            <a:prstDash val="solid"/>
-          </a:ln>
-        </p:spPr>
-      </p:sp>
-      <p:sp>
-        <p:nvSpPr>
-          <p:cNvPr id="14" name="Virusskanning ikonring"/>
-          <p:cNvSpPr/>
-          <p:nvPr/>
-        </p:nvSpPr>
-        <p:spPr>
-          <a:xfrm>
-            <a:off x="6505956" y="1508760"/>
-            <a:ext cx="640080" cy="640080"/>
-          </a:xfrm>
-          <a:prstGeom prst="ellipse">
-            <a:avLst/>
-          </a:prstGeom>
-          <a:solidFill>
-            <a:schemeClr val="accent1"/>
-          </a:solidFill>
-          <a:ln/>
-        </p:spPr>
-      </p:sp>
-      <p:pic>
-        <p:nvPicPr>
-          <p:cNvPr id="15" name="Virusskanning ikon" descr="Virusskanning">    </p:cNvPr>
-          <p:cNvPicPr>
-            <a:picLocks noChangeAspect="1"/>
-          </p:cNvPicPr>
-          <p:nvPr/>
-        </p:nvPicPr>
-        <p:blipFill>
-          <a:blip r:embed="rId3"/>
-          <a:stretch>
-            <a:fillRect/>
-          </a:stretch>
-        </p:blipFill>
-        <p:spPr>
-          <a:xfrm>
-            <a:off x="6643116" y="1645920"/>
-            <a:ext cx="365760" cy="365760"/>
-          </a:xfrm>
-          <a:prstGeom prst="rect">
-            <a:avLst/>
-          </a:prstGeom>
-        </p:spPr>
-      </p:pic>
-      <p:sp>
-        <p:nvSpPr>
-          <p:cNvPr id="16" name="Text 11"/>
-          <p:cNvSpPr txBox="1"/>
-          <p:nvPr/>
-        </p:nvSpPr>
-        <p:spPr>
-          <a:xfrm>
-            <a:off x="6505956" y="2286000"/>
-            <a:ext cx="2018538" cy="594360"/>
-          </a:xfrm>
-          <a:prstGeom prst="rect">
-            <a:avLst/>
-          </a:prstGeom>
-          <a:noFill/>
-          <a:ln/>
-        </p:spPr>
-        <p:txBody>
-          <a:bodyPr wrap="square" lIns="0" tIns="0" rIns="0" bIns="0" rtlCol="0" anchor="t"/>
-          <a:lstStyle/>
-          <a:p>
-            <a:pPr indent="0" marL="0">
-              <a:buNone/>
-            </a:pPr>
-            <a:r>
-              <a:rPr lang="en-US" sz="1700" b="1" dirty="0">
-                <a:solidFill>
-                  <a:schemeClr val="tx2"/>
-                </a:solidFill>
-              </a:rPr>
-              <a:t>Virusskanning</a:t>
-            </a:r>
-            <a:endParaRPr lang="en-US" sz="1700" dirty="0"/>
-          </a:p>
-        </p:txBody>
-      </p:sp>
-      <p:sp>
-        <p:nvSpPr>
-          <p:cNvPr id="17" name="Text 12"/>
-          <p:cNvSpPr txBox="1"/>
-          <p:nvPr/>
-        </p:nvSpPr>
-        <p:spPr>
-          <a:xfrm>
-            <a:off x="6505956" y="2926080"/>
-            <a:ext cx="2018538" cy="548640"/>
-          </a:xfrm>
-          <a:prstGeom prst="rect">
-            <a:avLst/>
-          </a:prstGeom>
-          <a:noFill/>
-          <a:ln/>
-        </p:spPr>
-        <p:txBody>
-          <a:bodyPr wrap="square" lIns="0" tIns="0" rIns="0" bIns="0" rtlCol="0" anchor="t"/>
-          <a:lstStyle/>
-          <a:p>
-            <a:pPr indent="0" marL="0">
-              <a:buNone/>
-            </a:pPr>
-            <a:r>
-              <a:rPr lang="en-US" sz="1400" dirty="0">
-                <a:solidFill>
-                  <a:schemeClr val="tx1"/>
-                </a:solidFill>
-              </a:rPr>
-              <a:t>Alle vedlegg skannes før de slippes inn.</a:t>
-            </a:r>
-            <a:endParaRPr lang="en-US" sz="1400" dirty="0"/>
-          </a:p>
-        </p:txBody>
-      </p:sp>
-      <p:sp>
-        <p:nvSpPr>
-          <p:cNvPr id="18" name="VPN med kill switch kort"/>
-          <p:cNvSpPr/>
-          <p:nvPr/>
-        </p:nvSpPr>
-        <p:spPr>
-          <a:xfrm>
-            <a:off x="9073134" y="1234440"/>
-            <a:ext cx="2567178" cy="2377440"/>
-          </a:xfrm>
-          <a:prstGeom prst="roundRect">
-            <a:avLst>
-              <a:gd name="adj" fmla="val 4615"/>
-            </a:avLst>
-          </a:prstGeom>
-          <a:solidFill>
-            <a:schemeClr val="bg1"/>
-          </a:solidFill>
-          <a:ln w="9525">
-            <a:solidFill>
-              <a:srgbClr val="D2DDD5"/>
-            </a:solidFill>
-            <a:prstDash val="solid"/>
-          </a:ln>
-        </p:spPr>
-      </p:sp>
-      <p:sp>
-        <p:nvSpPr>
-          <p:cNvPr id="19" name="VPN med kill switch ikonring"/>
-          <p:cNvSpPr/>
-          <p:nvPr/>
-        </p:nvSpPr>
-        <p:spPr>
-          <a:xfrm>
-            <a:off x="9347454" y="1508760"/>
-            <a:ext cx="640080" cy="640080"/>
-          </a:xfrm>
-          <a:prstGeom prst="ellipse">
-            <a:avLst/>
-          </a:prstGeom>
-          <a:solidFill>
-            <a:schemeClr val="accent1"/>
-          </a:solidFill>
-          <a:ln/>
-        </p:spPr>
-      </p:sp>
-      <p:pic>
-        <p:nvPicPr>
-          <p:cNvPr id="20" name="VPN med kill switch ikon" descr="VPN med kill switch">    </p:cNvPr>
-          <p:cNvPicPr>
-            <a:picLocks noChangeAspect="1"/>
-          </p:cNvPicPr>
-          <p:nvPr/>
-        </p:nvPicPr>
-        <p:blipFill>
-          <a:blip r:embed="rId4"/>
-          <a:stretch>
-            <a:fillRect/>
-          </a:stretch>
-        </p:blipFill>
-        <p:spPr>
-          <a:xfrm>
-            <a:off x="9484614" y="1645920"/>
-            <a:ext cx="365760" cy="365760"/>
-          </a:xfrm>
-          <a:prstGeom prst="rect">
-            <a:avLst/>
-          </a:prstGeom>
-        </p:spPr>
-      </p:pic>
-      <p:sp>
-        <p:nvSpPr>
-          <p:cNvPr id="21" name="Text 15"/>
-          <p:cNvSpPr txBox="1"/>
-          <p:nvPr/>
-        </p:nvSpPr>
-        <p:spPr>
-          <a:xfrm>
-            <a:off x="9347454" y="2286000"/>
-            <a:ext cx="2018538" cy="594360"/>
-          </a:xfrm>
-          <a:prstGeom prst="rect">
-            <a:avLst/>
-          </a:prstGeom>
-          <a:noFill/>
-          <a:ln/>
-        </p:spPr>
-        <p:txBody>
-          <a:bodyPr wrap="square" lIns="0" tIns="0" rIns="0" bIns="0" rtlCol="0" anchor="t"/>
-          <a:lstStyle/>
-          <a:p>
-            <a:pPr indent="0" marL="0">
-              <a:buNone/>
-            </a:pPr>
-            <a:r>
-              <a:rPr lang="en-US" sz="1700" b="1" dirty="0">
-                <a:solidFill>
-                  <a:schemeClr val="tx2"/>
-                </a:solidFill>
-              </a:rPr>
-              <a:t>VPN med kill switch</a:t>
-            </a:r>
-            <a:endParaRPr lang="en-US" sz="1700" dirty="0"/>
-          </a:p>
-        </p:txBody>
-      </p:sp>
-      <p:sp>
-        <p:nvSpPr>
-          <p:cNvPr id="22" name="Text 16"/>
-          <p:cNvSpPr txBox="1"/>
-          <p:nvPr/>
-        </p:nvSpPr>
-        <p:spPr>
-          <a:xfrm>
-            <a:off x="9347454" y="2926080"/>
-            <a:ext cx="2018538" cy="548640"/>
-          </a:xfrm>
-          <a:prstGeom prst="rect">
-            <a:avLst/>
-          </a:prstGeom>
-          <a:noFill/>
-          <a:ln/>
-        </p:spPr>
-        <p:txBody>
-          <a:bodyPr wrap="square" lIns="0" tIns="0" rIns="0" bIns="0" rtlCol="0" anchor="t"/>
-          <a:lstStyle/>
-          <a:p>
-            <a:pPr indent="0" marL="0">
-              <a:buNone/>
-            </a:pPr>
-            <a:r>
-              <a:rPr lang="en-US" sz="1400" dirty="0">
-                <a:solidFill>
-                  <a:schemeClr val="tx1"/>
-                </a:solidFill>
-              </a:rPr>
-              <a:t>All trafikk kryptert til helsenettet, ingen annen vei ut.</a:t>
-            </a:r>
-            <a:endParaRPr lang="en-US" sz="1400" dirty="0"/>
-          </a:p>
-        </p:txBody>
-      </p:sp>
-      <p:sp>
-        <p:nvSpPr>
-          <p:cNvPr id="23" name="Ingen programkjøring kort"/>
-          <p:cNvSpPr/>
-          <p:nvPr/>
-        </p:nvSpPr>
-        <p:spPr>
-          <a:xfrm>
-            <a:off x="548640" y="3886200"/>
-            <a:ext cx="2567178" cy="2377440"/>
-          </a:xfrm>
-          <a:prstGeom prst="roundRect">
-            <a:avLst>
-              <a:gd name="adj" fmla="val 4615"/>
-            </a:avLst>
-          </a:prstGeom>
-          <a:solidFill>
-            <a:schemeClr val="bg1"/>
-          </a:solidFill>
-          <a:ln w="9525">
-            <a:solidFill>
-              <a:srgbClr val="D2DDD5"/>
-            </a:solidFill>
-            <a:prstDash val="solid"/>
-          </a:ln>
-        </p:spPr>
-      </p:sp>
-      <p:sp>
-        <p:nvSpPr>
-          <p:cNvPr id="24" name="Ingen programkjøring ikonring"/>
-          <p:cNvSpPr/>
-          <p:nvPr/>
-        </p:nvSpPr>
-        <p:spPr>
-          <a:xfrm>
-            <a:off x="822960" y="4160520"/>
-            <a:ext cx="640080" cy="640080"/>
-          </a:xfrm>
-          <a:prstGeom prst="ellipse">
-            <a:avLst/>
-          </a:prstGeom>
-          <a:solidFill>
-            <a:schemeClr val="accent1"/>
-          </a:solidFill>
-          <a:ln/>
-        </p:spPr>
-      </p:sp>
-      <p:pic>
-        <p:nvPicPr>
-          <p:cNvPr id="25" name="Ingen programkjøring ikon" descr="Ingen programkjøring">    </p:cNvPr>
-          <p:cNvPicPr>
-            <a:picLocks noChangeAspect="1"/>
-          </p:cNvPicPr>
-          <p:nvPr/>
-        </p:nvPicPr>
-        <p:blipFill>
-          <a:blip r:embed="rId5"/>
-          <a:stretch>
-            <a:fillRect/>
-          </a:stretch>
-        </p:blipFill>
-        <p:spPr>
-          <a:xfrm>
-            <a:off x="960120" y="4297680"/>
-            <a:ext cx="365760" cy="365760"/>
-          </a:xfrm>
-          <a:prstGeom prst="rect">
-            <a:avLst/>
-          </a:prstGeom>
-        </p:spPr>
-      </p:pic>
-      <p:sp>
-        <p:nvSpPr>
-          <p:cNvPr id="26" name="Text 19"/>
-          <p:cNvSpPr txBox="1"/>
-          <p:nvPr/>
-        </p:nvSpPr>
-        <p:spPr>
-          <a:xfrm>
-            <a:off x="822960" y="4937760"/>
-            <a:ext cx="2018538" cy="594360"/>
-          </a:xfrm>
-          <a:prstGeom prst="rect">
-            <a:avLst/>
-          </a:prstGeom>
-          <a:noFill/>
-          <a:ln/>
-        </p:spPr>
-        <p:txBody>
-          <a:bodyPr wrap="square" lIns="0" tIns="0" rIns="0" bIns="0" rtlCol="0" anchor="t"/>
-          <a:lstStyle/>
-          <a:p>
-            <a:pPr indent="0" marL="0">
-              <a:buNone/>
-            </a:pPr>
-            <a:r>
-              <a:rPr lang="en-US" sz="1700" b="1" dirty="0">
-                <a:solidFill>
-                  <a:schemeClr val="tx2"/>
-                </a:solidFill>
-              </a:rPr>
-              <a:t>Ingen programkjøring</a:t>
-            </a:r>
-            <a:endParaRPr lang="en-US" sz="1700" dirty="0"/>
-          </a:p>
-        </p:txBody>
-      </p:sp>
-      <p:sp>
-        <p:nvSpPr>
-          <p:cNvPr id="27" name="Text 20"/>
-          <p:cNvSpPr txBox="1"/>
-          <p:nvPr/>
-        </p:nvSpPr>
-        <p:spPr>
-          <a:xfrm>
-            <a:off x="822960" y="5577840"/>
-            <a:ext cx="2018538" cy="548640"/>
-          </a:xfrm>
-          <a:prstGeom prst="rect">
-            <a:avLst/>
-          </a:prstGeom>
-          <a:noFill/>
-          <a:ln/>
-        </p:spPr>
-        <p:txBody>
-          <a:bodyPr wrap="square" lIns="0" tIns="0" rIns="0" bIns="0" rtlCol="0" anchor="t"/>
-          <a:lstStyle/>
-          <a:p>
-            <a:pPr indent="0" marL="0">
-              <a:buNone/>
-            </a:pPr>
-            <a:r>
-              <a:rPr lang="en-US" sz="1400" dirty="0">
-                <a:solidFill>
-                  <a:schemeClr val="tx1"/>
-                </a:solidFill>
-              </a:rPr>
-              <a:t>Ikke fra hjemmemappe, nedlastinger eller temp-mapper.</a:t>
-            </a:r>
-            <a:endParaRPr lang="en-US" sz="1400" dirty="0"/>
-          </a:p>
-        </p:txBody>
-      </p:sp>
-      <p:sp>
-        <p:nvSpPr>
-          <p:cNvPr id="28" name="Øktvakt kort"/>
-          <p:cNvSpPr/>
-          <p:nvPr/>
-        </p:nvSpPr>
-        <p:spPr>
-          <a:xfrm>
-            <a:off x="3390138" y="3886200"/>
-            <a:ext cx="2567178" cy="2377440"/>
-          </a:xfrm>
-          <a:prstGeom prst="roundRect">
-            <a:avLst>
-              <a:gd name="adj" fmla="val 4615"/>
-            </a:avLst>
-          </a:prstGeom>
-          <a:solidFill>
-            <a:schemeClr val="bg1"/>
-          </a:solidFill>
-          <a:ln w="9525">
-            <a:solidFill>
-              <a:srgbClr val="D2DDD5"/>
-            </a:solidFill>
-            <a:prstDash val="solid"/>
-          </a:ln>
-        </p:spPr>
-      </p:sp>
-      <p:sp>
-        <p:nvSpPr>
-          <p:cNvPr id="29" name="Øktvakt ikonring"/>
-          <p:cNvSpPr/>
-          <p:nvPr/>
-        </p:nvSpPr>
-        <p:spPr>
-          <a:xfrm>
-            <a:off x="3664458" y="4160520"/>
-            <a:ext cx="640080" cy="640080"/>
-          </a:xfrm>
-          <a:prstGeom prst="ellipse">
-            <a:avLst/>
-          </a:prstGeom>
-          <a:solidFill>
-            <a:schemeClr val="accent1"/>
-          </a:solidFill>
-          <a:ln/>
-        </p:spPr>
-      </p:sp>
-      <p:pic>
-        <p:nvPicPr>
-          <p:cNvPr id="30" name="Øktvakt ikon" descr="Øktvakt">    </p:cNvPr>
-          <p:cNvPicPr>
-            <a:picLocks noChangeAspect="1"/>
-          </p:cNvPicPr>
-          <p:nvPr/>
-        </p:nvPicPr>
-        <p:blipFill>
-          <a:blip r:embed="rId6"/>
-          <a:stretch>
-            <a:fillRect/>
-          </a:stretch>
-        </p:blipFill>
-        <p:spPr>
-          <a:xfrm>
-            <a:off x="3801618" y="4297680"/>
-            <a:ext cx="365760" cy="365760"/>
-          </a:xfrm>
-          <a:prstGeom prst="rect">
-            <a:avLst/>
-          </a:prstGeom>
-        </p:spPr>
-      </p:pic>
-      <p:sp>
-        <p:nvSpPr>
-          <p:cNvPr id="31" name="Text 23"/>
-          <p:cNvSpPr txBox="1"/>
-          <p:nvPr/>
-        </p:nvSpPr>
-        <p:spPr>
-          <a:xfrm>
-            <a:off x="3664458" y="4937760"/>
-            <a:ext cx="2018538" cy="594360"/>
-          </a:xfrm>
-          <a:prstGeom prst="rect">
-            <a:avLst/>
-          </a:prstGeom>
-          <a:noFill/>
-          <a:ln/>
-        </p:spPr>
-        <p:txBody>
-          <a:bodyPr wrap="square" lIns="0" tIns="0" rIns="0" bIns="0" rtlCol="0" anchor="t"/>
-          <a:lstStyle/>
-          <a:p>
-            <a:pPr indent="0" marL="0">
-              <a:buNone/>
-            </a:pPr>
-            <a:r>
-              <a:rPr lang="en-US" sz="1700" b="1" dirty="0">
-                <a:solidFill>
-                  <a:schemeClr val="tx2"/>
-                </a:solidFill>
-              </a:rPr>
-              <a:t>Øktvakt</a:t>
-            </a:r>
-            <a:endParaRPr lang="en-US" sz="1700" dirty="0"/>
-          </a:p>
-        </p:txBody>
-      </p:sp>
-      <p:sp>
-        <p:nvSpPr>
-          <p:cNvPr id="32" name="Text 24"/>
-          <p:cNvSpPr txBox="1"/>
-          <p:nvPr/>
-        </p:nvSpPr>
-        <p:spPr>
-          <a:xfrm>
-            <a:off x="3664458" y="5577840"/>
-            <a:ext cx="2018538" cy="548640"/>
-          </a:xfrm>
-          <a:prstGeom prst="rect">
-            <a:avLst/>
-          </a:prstGeom>
-          <a:noFill/>
-          <a:ln/>
-        </p:spPr>
-        <p:txBody>
-          <a:bodyPr wrap="square" lIns="0" tIns="0" rIns="0" bIns="0" rtlCol="0" anchor="t"/>
-          <a:lstStyle/>
-          <a:p>
-            <a:pPr indent="0" marL="0">
-              <a:buNone/>
-            </a:pPr>
-            <a:r>
-              <a:rPr lang="en-US" sz="1400" dirty="0">
-                <a:solidFill>
-                  <a:schemeClr val="tx1"/>
-                </a:solidFill>
-              </a:rPr>
-              <a:t>Kortet ut – økten avsluttes umiddelbart.</a:t>
-            </a:r>
-            <a:endParaRPr lang="en-US" sz="1400" dirty="0"/>
-          </a:p>
-        </p:txBody>
-      </p:sp>
-      <p:sp>
-        <p:nvSpPr>
-          <p:cNvPr id="33" name="Sikkerhetslogg kort"/>
-          <p:cNvSpPr/>
-          <p:nvPr/>
-        </p:nvSpPr>
-        <p:spPr>
-          <a:xfrm>
-            <a:off x="6231636" y="3886200"/>
-            <a:ext cx="2567178" cy="2377440"/>
-          </a:xfrm>
-          <a:prstGeom prst="roundRect">
-            <a:avLst>
-              <a:gd name="adj" fmla="val 4615"/>
-            </a:avLst>
-          </a:prstGeom>
-          <a:solidFill>
-            <a:schemeClr val="bg1"/>
-          </a:solidFill>
-          <a:ln w="9525">
-            <a:solidFill>
-              <a:srgbClr val="D2DDD5"/>
-            </a:solidFill>
-            <a:prstDash val="solid"/>
-          </a:ln>
-        </p:spPr>
-      </p:sp>
-      <p:sp>
-        <p:nvSpPr>
-          <p:cNvPr id="34" name="Sikkerhetslogg ikonring"/>
-          <p:cNvSpPr/>
-          <p:nvPr/>
-        </p:nvSpPr>
-        <p:spPr>
-          <a:xfrm>
-            <a:off x="6505956" y="4160520"/>
-            <a:ext cx="640080" cy="640080"/>
-          </a:xfrm>
-          <a:prstGeom prst="ellipse">
-            <a:avLst/>
-          </a:prstGeom>
-          <a:solidFill>
-            <a:schemeClr val="accent1"/>
-          </a:solidFill>
-          <a:ln/>
-        </p:spPr>
-      </p:sp>
-      <p:pic>
-        <p:nvPicPr>
-          <p:cNvPr id="35" name="Sikkerhetslogg ikon" descr="Sikkerhetslogg">    </p:cNvPr>
-          <p:cNvPicPr>
-            <a:picLocks noChangeAspect="1"/>
-          </p:cNvPicPr>
-          <p:nvPr/>
-        </p:nvPicPr>
-        <p:blipFill>
-          <a:blip r:embed="rId7"/>
-          <a:stretch>
-            <a:fillRect/>
-          </a:stretch>
-        </p:blipFill>
-        <p:spPr>
-          <a:xfrm>
-            <a:off x="6643116" y="4297680"/>
-            <a:ext cx="365760" cy="365760"/>
-          </a:xfrm>
-          <a:prstGeom prst="rect">
-            <a:avLst/>
-          </a:prstGeom>
-        </p:spPr>
-      </p:pic>
-      <p:sp>
-        <p:nvSpPr>
-          <p:cNvPr id="36" name="Text 27"/>
-          <p:cNvSpPr txBox="1"/>
-          <p:nvPr/>
-        </p:nvSpPr>
-        <p:spPr>
-          <a:xfrm>
-            <a:off x="6505956" y="4937760"/>
-            <a:ext cx="2018538" cy="594360"/>
-          </a:xfrm>
-          <a:prstGeom prst="rect">
-            <a:avLst/>
-          </a:prstGeom>
-          <a:noFill/>
-          <a:ln/>
-        </p:spPr>
-        <p:txBody>
-          <a:bodyPr wrap="square" lIns="0" tIns="0" rIns="0" bIns="0" rtlCol="0" anchor="t"/>
-          <a:lstStyle/>
-          <a:p>
-            <a:pPr indent="0" marL="0">
-              <a:buNone/>
-            </a:pPr>
-            <a:r>
-              <a:rPr lang="en-US" sz="1700" b="1" dirty="0">
-                <a:solidFill>
-                  <a:schemeClr val="tx2"/>
-                </a:solidFill>
-              </a:rPr>
-              <a:t>Sikkerhetslogg</a:t>
-            </a:r>
-            <a:endParaRPr lang="en-US" sz="1700" dirty="0"/>
-          </a:p>
-        </p:txBody>
-      </p:sp>
-      <p:sp>
-        <p:nvSpPr>
-          <p:cNvPr id="37" name="Text 28"/>
-          <p:cNvSpPr txBox="1"/>
-          <p:nvPr/>
-        </p:nvSpPr>
-        <p:spPr>
-          <a:xfrm>
-            <a:off x="6505956" y="5577840"/>
-            <a:ext cx="2018538" cy="548640"/>
-          </a:xfrm>
-          <a:prstGeom prst="rect">
-            <a:avLst/>
-          </a:prstGeom>
-          <a:noFill/>
-          <a:ln/>
-        </p:spPr>
-        <p:txBody>
-          <a:bodyPr wrap="square" lIns="0" tIns="0" rIns="0" bIns="0" rtlCol="0" anchor="t"/>
-          <a:lstStyle/>
-          <a:p>
-            <a:pPr indent="0" marL="0">
-              <a:buNone/>
-            </a:pPr>
-            <a:r>
-              <a:rPr lang="en-US" sz="1400" dirty="0">
-                <a:solidFill>
-                  <a:schemeClr val="tx1"/>
-                </a:solidFill>
-              </a:rPr>
-              <a:t>Endringer i innlogging, brannmur og oppsett logges.</a:t>
-            </a:r>
-            <a:endParaRPr lang="en-US" sz="1400" dirty="0"/>
-          </a:p>
-        </p:txBody>
-      </p:sp>
-      <p:sp>
-        <p:nvSpPr>
-          <p:cNvPr id="38" name="Oppdateringer kort"/>
-          <p:cNvSpPr/>
-          <p:nvPr/>
-        </p:nvSpPr>
-        <p:spPr>
-          <a:xfrm>
-            <a:off x="9073134" y="3886200"/>
-            <a:ext cx="2567178" cy="2377440"/>
-          </a:xfrm>
-          <a:prstGeom prst="roundRect">
-            <a:avLst>
-              <a:gd name="adj" fmla="val 4615"/>
-            </a:avLst>
-          </a:prstGeom>
-          <a:solidFill>
-            <a:schemeClr val="bg1"/>
-          </a:solidFill>
-          <a:ln w="9525">
-            <a:solidFill>
-              <a:srgbClr val="D2DDD5"/>
-            </a:solidFill>
-            <a:prstDash val="solid"/>
-          </a:ln>
-        </p:spPr>
-      </p:sp>
-      <p:sp>
-        <p:nvSpPr>
-          <p:cNvPr id="39" name="Oppdateringer ikonring"/>
-          <p:cNvSpPr/>
-          <p:nvPr/>
-        </p:nvSpPr>
-        <p:spPr>
-          <a:xfrm>
-            <a:off x="9347454" y="4160520"/>
-            <a:ext cx="640080" cy="640080"/>
-          </a:xfrm>
-          <a:prstGeom prst="ellipse">
-            <a:avLst/>
-          </a:prstGeom>
-          <a:solidFill>
-            <a:schemeClr val="accent1"/>
-          </a:solidFill>
-          <a:ln/>
-        </p:spPr>
-      </p:sp>
-      <p:pic>
-        <p:nvPicPr>
-          <p:cNvPr id="40" name="Oppdateringer ikon" descr="Oppdateringer">    </p:cNvPr>
-          <p:cNvPicPr>
-            <a:picLocks noChangeAspect="1"/>
-          </p:cNvPicPr>
-          <p:nvPr/>
-        </p:nvPicPr>
-        <p:blipFill>
-          <a:blip r:embed="rId8"/>
-          <a:stretch>
-            <a:fillRect/>
-          </a:stretch>
-        </p:blipFill>
-        <p:spPr>
-          <a:xfrm>
-            <a:off x="9484614" y="4297680"/>
-            <a:ext cx="365760" cy="365760"/>
-          </a:xfrm>
-          <a:prstGeom prst="rect">
-            <a:avLst/>
-          </a:prstGeom>
-        </p:spPr>
-      </p:pic>
-      <p:sp>
-        <p:nvSpPr>
-          <p:cNvPr id="41" name="Text 31"/>
-          <p:cNvSpPr txBox="1"/>
-          <p:nvPr/>
-        </p:nvSpPr>
-        <p:spPr>
-          <a:xfrm>
-            <a:off x="9347454" y="4937760"/>
-            <a:ext cx="2018538" cy="594360"/>
-          </a:xfrm>
-          <a:prstGeom prst="rect">
-            <a:avLst/>
-          </a:prstGeom>
-          <a:noFill/>
-          <a:ln/>
-        </p:spPr>
-        <p:txBody>
-          <a:bodyPr wrap="square" lIns="0" tIns="0" rIns="0" bIns="0" rtlCol="0" anchor="t"/>
-          <a:lstStyle/>
-          <a:p>
-            <a:pPr indent="0" marL="0">
-              <a:buNone/>
-            </a:pPr>
-            <a:r>
-              <a:rPr lang="en-US" sz="1700" b="1" dirty="0">
-                <a:solidFill>
-                  <a:schemeClr val="tx2"/>
-                </a:solidFill>
-              </a:rPr>
-              <a:t>Oppdateringer</a:t>
-            </a:r>
-            <a:endParaRPr lang="en-US" sz="1700" dirty="0"/>
-          </a:p>
-        </p:txBody>
-      </p:sp>
-      <p:sp>
-        <p:nvSpPr>
-          <p:cNvPr id="42" name="Text 32"/>
-          <p:cNvSpPr txBox="1"/>
-          <p:nvPr/>
-        </p:nvSpPr>
-        <p:spPr>
-          <a:xfrm>
-            <a:off x="9347454" y="5577840"/>
-            <a:ext cx="2018538" cy="548640"/>
-          </a:xfrm>
-          <a:prstGeom prst="rect">
-            <a:avLst/>
-          </a:prstGeom>
-          <a:noFill/>
-          <a:ln/>
-        </p:spPr>
-        <p:txBody>
-          <a:bodyPr wrap="square" lIns="0" tIns="0" rIns="0" bIns="0" rtlCol="0" anchor="t"/>
-          <a:lstStyle/>
-          <a:p>
-            <a:pPr indent="0" marL="0">
-              <a:buNone/>
-            </a:pPr>
-            <a:r>
-              <a:rPr lang="en-US" sz="1400" dirty="0">
-                <a:solidFill>
-                  <a:schemeClr val="tx1"/>
-                </a:solidFill>
-              </a:rPr>
-              <a:t>Sikkerhetsoppdateringer installeres automatisk.</a:t>
-            </a:r>
-            <a:endParaRPr lang="en-US" sz="1400" dirty="0"/>
-          </a:p>
-        </p:txBody>
-      </p:sp>
       <p:sp>
         <p:nvSpPr>
           <p:cNvPr id="25" name="Slide Number Placeholder 0"/>
@@ -10019,13 +9784,13 @@
           <p:cNvPr id="2" name="Text 0"/>
           <p:cNvSpPr/>
           <p:nvPr>
-            <p:ph idx="100" type="body" hasCustomPrompt="1"/>
-          </p:nvPr>
-        </p:nvSpPr>
-        <p:spPr>
-          <a:xfrm>
-            <a:off x="731520" y="2103120"/>
-            <a:ext cx="2743200" cy="1097280"/>
+            <p:ph idx="100" type="title" hasCustomPrompt="1"/>
+          </p:nvPr>
+        </p:nvSpPr>
+        <p:spPr>
+          <a:xfrm>
+            <a:off x="548640" y="365760"/>
+            <a:ext cx="11064240" cy="731520"/>
           </a:xfrm>
           <a:prstGeom prst="rect">
             <a:avLst/>
@@ -10037,18 +9802,18 @@
           <a:bodyPr wrap="square" rtlCol="0"/>
           <a:lstStyle/>
           <a:p>
-            <a:pPr indent="0" marL="0">
-              <a:buNone/>
-            </a:pPr>
-            <a:r>
-              <a:rPr lang="en-US" sz="6000" b="1" dirty="0">
-                <a:solidFill>
-                  <a:schemeClr val="accent2"/>
-                </a:solidFill>
-              </a:rPr>
-              <a:t>06</a:t>
-            </a:r>
-            <a:endParaRPr lang="en-US" sz="6000" dirty="0"/>
+            <a:pPr algn="l" indent="0" marL="0">
+              <a:buNone/>
+            </a:pPr>
+            <a:r>
+              <a:rPr lang="en-US" sz="3200" b="1" dirty="0">
+                <a:solidFill>
+                  <a:schemeClr val="tx2"/>
+                </a:solidFill>
+              </a:rPr>
+              <a:t>Medicus Kalkulator</a:t>
+            </a:r>
+            <a:endParaRPr lang="en-US" sz="3200" dirty="0"/>
           </a:p>
         </p:txBody>
       </p:sp>
@@ -10057,13 +9822,13 @@
           <p:cNvPr id="3" name="Text 0"/>
           <p:cNvSpPr/>
           <p:nvPr>
-            <p:ph idx="101" type="title" hasCustomPrompt="1"/>
-          </p:nvPr>
-        </p:nvSpPr>
-        <p:spPr>
-          <a:xfrm>
-            <a:off x="731520" y="3108960"/>
-            <a:ext cx="10698480" cy="914400"/>
+            <p:ph idx="101" type="body" hasCustomPrompt="1"/>
+          </p:nvPr>
+        </p:nvSpPr>
+        <p:spPr>
+          <a:xfrm>
+            <a:off x="548640" y="1371600"/>
+            <a:ext cx="3657600" cy="4754880"/>
           </a:xfrm>
           <a:prstGeom prst="rect">
             <a:avLst/>
@@ -10072,59 +9837,268 @@
           <a:ln/>
         </p:spPr>
         <p:txBody>
-          <a:bodyPr wrap="square" rtlCol="0"/>
-          <a:lstStyle/>
-          <a:p>
-            <a:pPr algn="l" indent="0" marL="0">
-              <a:buNone/>
-            </a:pPr>
-            <a:r>
-              <a:rPr lang="en-US" sz="4000" b="1" dirty="0">
-                <a:solidFill>
-                  <a:schemeClr val="bg1"/>
-                </a:solidFill>
-              </a:rPr>
-              <a:t>Avslutning</a:t>
-            </a:r>
-            <a:endParaRPr lang="en-US" sz="4000" dirty="0"/>
-          </a:p>
-        </p:txBody>
-      </p:sp>
-      <p:sp>
-        <p:nvSpPr>
-          <p:cNvPr id="4" name="Text 0"/>
+          <a:bodyPr wrap="square" rtlCol="0" anchor="t"/>
+          <a:lstStyle/>
+          <a:p>
+            <a:pPr marL="342900" indent="-342900">
+              <a:spcAft>
+                <a:spcPts val="800"/>
+              </a:spcAft>
+              <a:buSzPct val="100000"/>
+              <a:buChar char="•"/>
+            </a:pPr>
+            <a:r>
+              <a:rPr lang="en-US" sz="1500" b="1" dirty="0">
+                <a:solidFill>
+                  <a:schemeClr val="tx1"/>
+                </a:solidFill>
+              </a:rPr>
+              <a:t>Kalkulator</a:t>
+            </a:r>
+            <a:pPr indent="0" marL="0">
+              <a:spcAft>
+                <a:spcPts val="800"/>
+              </a:spcAft>
+              <a:buNone/>
+            </a:pPr>
+            <a:r>
+              <a:rPr lang="en-US" sz="1500" dirty="0">
+                <a:solidFill>
+                  <a:schemeClr val="tx1"/>
+                </a:solidFill>
+              </a:rPr>
+              <a:t> med desimalkomma.</a:t>
+            </a:r>
+            <a:endParaRPr lang="en-US" sz="1500" dirty="0"/>
+          </a:p>
+          <a:p>
+            <a:pPr marL="342900" indent="-342900">
+              <a:spcAft>
+                <a:spcPts val="800"/>
+              </a:spcAft>
+              <a:buSzPct val="100000"/>
+              <a:buChar char="•"/>
+            </a:pPr>
+            <a:r>
+              <a:rPr lang="en-US" sz="1500" b="1" dirty="0">
+                <a:solidFill>
+                  <a:schemeClr val="tx1"/>
+                </a:solidFill>
+              </a:rPr>
+              <a:t>Alle enheter:</a:t>
+            </a:r>
+            <a:pPr indent="0" marL="0">
+              <a:spcAft>
+                <a:spcPts val="800"/>
+              </a:spcAft>
+              <a:buNone/>
+            </a:pPr>
+            <a:r>
+              <a:rPr lang="en-US" sz="1500" dirty="0">
+                <a:solidFill>
+                  <a:schemeClr val="tx1"/>
+                </a:solidFill>
+              </a:rPr>
+              <a:t> µg–kg, µl–liter, teskje og spiseskje.</a:t>
+            </a:r>
+            <a:endParaRPr lang="en-US" sz="1500" dirty="0"/>
+          </a:p>
+          <a:p>
+            <a:pPr marL="342900" indent="-342900">
+              <a:spcAft>
+                <a:spcPts val="800"/>
+              </a:spcAft>
+              <a:buSzPct val="100000"/>
+              <a:buChar char="•"/>
+            </a:pPr>
+            <a:r>
+              <a:rPr lang="en-US" sz="1500" b="1" dirty="0">
+                <a:solidFill>
+                  <a:schemeClr val="tx1"/>
+                </a:solidFill>
+              </a:rPr>
+              <a:t>Vekt ↔ volum:</a:t>
+            </a:r>
+            <a:pPr indent="0" marL="0">
+              <a:spcAft>
+                <a:spcPts val="800"/>
+              </a:spcAft>
+              <a:buNone/>
+            </a:pPr>
+            <a:r>
+              <a:rPr lang="en-US" sz="1500" dirty="0">
+                <a:solidFill>
+                  <a:schemeClr val="tx1"/>
+                </a:solidFill>
+              </a:rPr>
+              <a:t> f.eks. liter → kg, med tetthet for blod, saltvann m.m.</a:t>
+            </a:r>
+            <a:endParaRPr lang="en-US" sz="1500" dirty="0"/>
+          </a:p>
+          <a:p>
+            <a:pPr marL="342900" indent="-342900">
+              <a:spcAft>
+                <a:spcPts val="800"/>
+              </a:spcAft>
+              <a:buSzPct val="100000"/>
+              <a:buChar char="•"/>
+            </a:pPr>
+            <a:r>
+              <a:rPr lang="en-US" sz="1500" b="1" dirty="0">
+                <a:solidFill>
+                  <a:schemeClr val="tx1"/>
+                </a:solidFill>
+              </a:rPr>
+              <a:t>Kliniske skårer:</a:t>
+            </a:r>
+            <a:pPr indent="0" marL="0">
+              <a:spcAft>
+                <a:spcPts val="800"/>
+              </a:spcAft>
+              <a:buNone/>
+            </a:pPr>
+            <a:r>
+              <a:rPr lang="en-US" sz="1500" dirty="0">
+                <a:solidFill>
+                  <a:schemeClr val="tx1"/>
+                </a:solidFill>
+              </a:rPr>
+              <a:t> BMI, eGFR (CKD-EPI 2021), CHA₂DS₂-VASc, NEWS2, GCS, CURB-65, QTc med flere.</a:t>
+            </a:r>
+            <a:endParaRPr lang="en-US" sz="1500" dirty="0"/>
+          </a:p>
+          <a:p>
+            <a:pPr marL="342900" indent="-342900">
+              <a:spcAft>
+                <a:spcPts val="800"/>
+              </a:spcAft>
+              <a:buSzPct val="100000"/>
+              <a:buChar char="•"/>
+            </a:pPr>
+            <a:r>
+              <a:rPr lang="en-US" sz="1500" b="1" dirty="0">
+                <a:solidFill>
+                  <a:schemeClr val="tx1"/>
+                </a:solidFill>
+              </a:rPr>
+              <a:t>Advarsel:</a:t>
+            </a:r>
+            <a:pPr indent="0" marL="0">
+              <a:spcAft>
+                <a:spcPts val="800"/>
+              </a:spcAft>
+              <a:buNone/>
+            </a:pPr>
+            <a:r>
+              <a:rPr lang="en-US" sz="1500" dirty="0">
+                <a:solidFill>
+                  <a:schemeClr val="tx1"/>
+                </a:solidFill>
+              </a:rPr>
+              <a:t> beslutningsstøtte, ikke en beslutning – og ikke for legemiddeldosering.</a:t>
+            </a:r>
+            <a:endParaRPr lang="en-US" sz="1500" dirty="0"/>
+          </a:p>
+        </p:txBody>
+      </p:sp>
+      <p:sp>
+        <p:nvSpPr>
+          <p:cNvPr id="4" name="Medicus Kalkulator ramme"/>
           <p:cNvSpPr/>
-          <p:nvPr>
-            <p:ph idx="102" type="body" hasCustomPrompt="1"/>
-          </p:nvPr>
-        </p:nvSpPr>
-        <p:spPr>
-          <a:xfrm>
-            <a:off x="731520" y="4023360"/>
-            <a:ext cx="10698480" cy="822960"/>
-          </a:xfrm>
-          <a:prstGeom prst="rect">
-            <a:avLst/>
-          </a:prstGeom>
-          <a:noFill/>
-          <a:ln/>
-        </p:spPr>
-        <p:txBody>
-          <a:bodyPr wrap="square" rtlCol="0"/>
-          <a:lstStyle/>
-          <a:p>
-            <a:pPr indent="0" marL="0">
-              <a:buNone/>
-            </a:pPr>
-            <a:r>
-              <a:rPr lang="en-US" sz="1800" dirty="0">
-                <a:solidFill>
-                  <a:schemeClr val="accent2"/>
-                </a:solidFill>
-              </a:rPr>
-              <a:t>Logg ut, lås eller slå av</a:t>
-            </a:r>
-            <a:endParaRPr lang="en-US" sz="1800" dirty="0"/>
+          <p:nvPr/>
+        </p:nvSpPr>
+        <p:spPr>
+          <a:xfrm>
+            <a:off x="4526280" y="1371600"/>
+            <a:ext cx="7132320" cy="4457700"/>
+          </a:xfrm>
+          <a:prstGeom prst="rect">
+            <a:avLst/>
+          </a:prstGeom>
+          <a:solidFill>
+            <a:schemeClr val="bg1"/>
+          </a:solidFill>
+          <a:ln w="9525">
+            <a:solidFill>
+              <a:srgbClr val="D2DDD5"/>
+            </a:solidFill>
+            <a:prstDash val="solid"/>
+          </a:ln>
+          <a:effectLst>
+            <a:outerShdw sx="100000" sy="100000" kx="0" ky="0" algn="bl" rotWithShape="0" blurRad="101600" dist="38100" dir="5400000">
+              <a:srgbClr val="000000">
+                <a:alpha val="25000"/>
+              </a:srgbClr>
+            </a:outerShdw>
+          </a:effectLst>
+        </p:spPr>
+      </p:sp>
+      <p:pic>
+        <p:nvPicPr>
+          <p:cNvPr id="5" name="Medicus Kalkulator" descr="Medicus Kalkulator">    </p:cNvPr>
+          <p:cNvPicPr>
+            <a:picLocks noChangeAspect="1"/>
+          </p:cNvPicPr>
+          <p:nvPr/>
+        </p:nvPicPr>
+        <p:blipFill>
+          <a:blip r:embed="rId1"/>
+          <a:stretch>
+            <a:fillRect/>
+          </a:stretch>
+        </p:blipFill>
+        <p:spPr>
+          <a:xfrm>
+            <a:off x="4526280" y="1371600"/>
+            <a:ext cx="7132320" cy="4457700"/>
+          </a:xfrm>
+          <a:prstGeom prst="rect">
+            <a:avLst/>
+          </a:prstGeom>
+        </p:spPr>
+      </p:pic>
+      <p:sp>
+        <p:nvSpPr>
+          <p:cNvPr id="25" name="Slide Number Placeholder 0"/>
+          <p:cNvSpPr>
+            <a:spLocks noGrp="1"/>
+          </p:cNvSpPr>
+          <p:nvPr>
+            <p:ph type="sldNum" sz="quarter" idx="4294967295"/>
+          </p:nvPr>
+        </p:nvSpPr>
+        <p:spPr>
+          <a:xfrm>
+            <a:off x="11247120" y="6400800"/>
+            <a:ext cx="457200" cy="274320"/>
+          </a:xfrm>
+          <a:prstGeom prst="rect">
+            <a:avLst/>
+          </a:prstGeom>
+          <a:extLst>
+            <a:ext uri="{C572A759-6A51-4108-AA02-DFA0A04FC94B}">
+              <ma14:wrappingTextBoxFlag xmlns:ma14="http://schemas.microsoft.com/office/mac/drawingml/2011/main" val="0"/>
+            </a:ext>
+          </a:extLst>
+        </p:spPr>
+        <p:txBody>
+          <a:bodyPr/>
+          <a:lstStyle>
+            <a:lvl1pPr>
+              <a:defRPr sz="1000">
+                <a:solidFill>
+                  <a:schemeClr val="accent6"/>
+                </a:solidFill>
+              </a:defRPr>
+            </a:lvl1pPr>
+          </a:lstStyle>
+          <a:p>
+            <a:pPr algn="r"/>
+            <a:fld id="{F7021451-1387-4CA6-816F-3879F97B5CBC}" type="slidenum">
+              <a:rPr b="0" lang="en-US"/>
+              <a:t>26</a:t>
+            </a:fld>
+            <a:endParaRPr lang="en-US"/>
           </a:p>
         </p:txBody>
       </p:sp>
@@ -10158,13 +10132,13 @@
           <p:cNvPr id="2" name="Text 0"/>
           <p:cNvSpPr/>
           <p:nvPr>
-            <p:ph idx="100" type="title" hasCustomPrompt="1"/>
-          </p:nvPr>
-        </p:nvSpPr>
-        <p:spPr>
-          <a:xfrm>
-            <a:off x="548640" y="365760"/>
-            <a:ext cx="11064240" cy="731520"/>
+            <p:ph idx="100" type="body" hasCustomPrompt="1"/>
+          </p:nvPr>
+        </p:nvSpPr>
+        <p:spPr>
+          <a:xfrm>
+            <a:off x="731520" y="2103120"/>
+            <a:ext cx="2743200" cy="1097280"/>
           </a:xfrm>
           <a:prstGeom prst="rect">
             <a:avLst/>
@@ -10176,18 +10150,18 @@
           <a:bodyPr wrap="square" rtlCol="0"/>
           <a:lstStyle/>
           <a:p>
-            <a:pPr algn="l" indent="0" marL="0">
-              <a:buNone/>
-            </a:pPr>
-            <a:r>
-              <a:rPr lang="en-US" sz="3200" b="1" dirty="0">
-                <a:solidFill>
-                  <a:schemeClr val="tx2"/>
-                </a:solidFill>
-              </a:rPr>
-              <a:t>Av/på-menyen</a:t>
-            </a:r>
-            <a:endParaRPr lang="en-US" sz="3200" dirty="0"/>
+            <a:pPr indent="0" marL="0">
+              <a:buNone/>
+            </a:pPr>
+            <a:r>
+              <a:rPr lang="en-US" sz="6000" b="1" dirty="0">
+                <a:solidFill>
+                  <a:schemeClr val="accent2"/>
+                </a:solidFill>
+              </a:rPr>
+              <a:t>05</a:t>
+            </a:r>
+            <a:endParaRPr lang="en-US" sz="6000" dirty="0"/>
           </a:p>
         </p:txBody>
       </p:sp>
@@ -10196,13 +10170,13 @@
           <p:cNvPr id="3" name="Text 0"/>
           <p:cNvSpPr/>
           <p:nvPr>
-            <p:ph idx="101" type="body" hasCustomPrompt="1"/>
-          </p:nvPr>
-        </p:nvSpPr>
-        <p:spPr>
-          <a:xfrm>
-            <a:off x="548640" y="1371600"/>
-            <a:ext cx="3657600" cy="4754880"/>
+            <p:ph idx="101" type="title" hasCustomPrompt="1"/>
+          </p:nvPr>
+        </p:nvSpPr>
+        <p:spPr>
+          <a:xfrm>
+            <a:off x="731520" y="3108960"/>
+            <a:ext cx="10698480" cy="914400"/>
           </a:xfrm>
           <a:prstGeom prst="rect">
             <a:avLst/>
@@ -10211,204 +10185,59 @@
           <a:ln/>
         </p:spPr>
         <p:txBody>
-          <a:bodyPr wrap="square" rtlCol="0" anchor="t"/>
-          <a:lstStyle/>
-          <a:p>
-            <a:pPr marL="342900" indent="-342900">
-              <a:spcAft>
-                <a:spcPts val="800"/>
-              </a:spcAft>
-              <a:buSzPct val="100000"/>
-              <a:buChar char="•"/>
-            </a:pPr>
-            <a:r>
-              <a:rPr lang="en-US" sz="1500" b="1" dirty="0">
-                <a:solidFill>
-                  <a:schemeClr val="tx1"/>
-                </a:solidFill>
-              </a:rPr>
-              <a:t>Lås skjerm,</a:t>
-            </a:r>
+          <a:bodyPr wrap="square" rtlCol="0"/>
+          <a:lstStyle/>
+          <a:p>
+            <a:pPr algn="l" indent="0" marL="0">
+              <a:buNone/>
+            </a:pPr>
+            <a:r>
+              <a:rPr lang="en-US" sz="4000" b="1" dirty="0">
+                <a:solidFill>
+                  <a:schemeClr val="bg1"/>
+                </a:solidFill>
+              </a:rPr>
+              <a:t>Sikkerhet</a:t>
+            </a:r>
+            <a:endParaRPr lang="en-US" sz="4000" dirty="0"/>
+          </a:p>
+        </p:txBody>
+      </p:sp>
+      <p:sp>
+        <p:nvSpPr>
+          <p:cNvPr id="4" name="Text 0"/>
+          <p:cNvSpPr/>
+          <p:nvPr>
+            <p:ph idx="102" type="body" hasCustomPrompt="1"/>
+          </p:nvPr>
+        </p:nvSpPr>
+        <p:spPr>
+          <a:xfrm>
+            <a:off x="731520" y="4023360"/>
+            <a:ext cx="10698480" cy="822960"/>
+          </a:xfrm>
+          <a:prstGeom prst="rect">
+            <a:avLst/>
+          </a:prstGeom>
+          <a:noFill/>
+          <a:ln/>
+        </p:spPr>
+        <p:txBody>
+          <a:bodyPr wrap="square" rtlCol="0"/>
+          <a:lstStyle/>
+          <a:p>
             <a:pPr indent="0" marL="0">
-              <a:spcAft>
-                <a:spcPts val="800"/>
-              </a:spcAft>
-              <a:buNone/>
-            </a:pPr>
-            <a:r>
-              <a:rPr lang="en-US" sz="1500" dirty="0">
-                <a:solidFill>
-                  <a:schemeClr val="tx1"/>
-                </a:solidFill>
-              </a:rPr>
-              <a:t> hvilemodus, start på nytt, slå av, logg ut.</a:t>
-            </a:r>
-            <a:endParaRPr lang="en-US" sz="1500" dirty="0"/>
-          </a:p>
-          <a:p>
-            <a:pPr marL="342900" indent="-342900">
-              <a:spcAft>
-                <a:spcPts val="800"/>
-              </a:spcAft>
-              <a:buSzPct val="100000"/>
-              <a:buChar char="•"/>
-            </a:pPr>
-            <a:r>
-              <a:rPr lang="en-US" sz="1500" b="1" dirty="0">
-                <a:solidFill>
-                  <a:schemeClr val="tx1"/>
-                </a:solidFill>
-              </a:rPr>
-              <a:t>Ingen dvale:</a:t>
-            </a:r>
-            <a:pPr indent="0" marL="0">
-              <a:spcAft>
-                <a:spcPts val="800"/>
-              </a:spcAft>
-              <a:buNone/>
-            </a:pPr>
-            <a:r>
-              <a:rPr lang="en-US" sz="1500" dirty="0">
-                <a:solidFill>
-                  <a:schemeClr val="tx1"/>
-                </a:solidFill>
-              </a:rPr>
-              <a:t> den ville skrevet pasientdata til disk.</a:t>
-            </a:r>
-            <a:endParaRPr lang="en-US" sz="1500" dirty="0"/>
-          </a:p>
-          <a:p>
-            <a:pPr marL="342900" indent="-342900">
-              <a:spcAft>
-                <a:spcPts val="800"/>
-              </a:spcAft>
-              <a:buSzPct val="100000"/>
-              <a:buChar char="•"/>
-            </a:pPr>
-            <a:r>
-              <a:rPr lang="en-US" sz="1500" b="1" dirty="0">
-                <a:solidFill>
-                  <a:schemeClr val="tx1"/>
-                </a:solidFill>
-              </a:rPr>
-              <a:t>Ingen «bytt bruker»:</a:t>
-            </a:r>
-            <a:pPr indent="0" marL="0">
-              <a:spcAft>
-                <a:spcPts val="800"/>
-              </a:spcAft>
-              <a:buNone/>
-            </a:pPr>
-            <a:r>
-              <a:rPr lang="en-US" sz="1500" dirty="0">
-                <a:solidFill>
-                  <a:schemeClr val="tx1"/>
-                </a:solidFill>
-              </a:rPr>
-              <a:t> det er kortet som bestemmer.</a:t>
-            </a:r>
-            <a:endParaRPr lang="en-US" sz="1500" dirty="0"/>
-          </a:p>
-        </p:txBody>
-      </p:sp>
-      <p:sp>
-        <p:nvSpPr>
-          <p:cNvPr id="4" name="Av/på-menyen ramme"/>
-          <p:cNvSpPr/>
-          <p:nvPr/>
-        </p:nvSpPr>
-        <p:spPr>
-          <a:xfrm>
-            <a:off x="4526280" y="1371600"/>
-            <a:ext cx="7132320" cy="4457700"/>
-          </a:xfrm>
-          <a:prstGeom prst="rect">
-            <a:avLst/>
-          </a:prstGeom>
-          <a:solidFill>
-            <a:schemeClr val="bg1"/>
-          </a:solidFill>
-          <a:ln w="9525">
-            <a:solidFill>
-              <a:srgbClr val="D2DDD5"/>
-            </a:solidFill>
-            <a:prstDash val="solid"/>
-          </a:ln>
-          <a:effectLst>
-            <a:outerShdw sx="100000" sy="100000" kx="0" ky="0" algn="bl" rotWithShape="0" blurRad="101600" dist="38100" dir="5400000">
-              <a:srgbClr val="000000">
-                <a:alpha val="25000"/>
-              </a:srgbClr>
-            </a:outerShdw>
-          </a:effectLst>
-        </p:spPr>
-      </p:sp>
-      <p:pic>
-        <p:nvPicPr>
-          <p:cNvPr id="5" name="Av/på-menyen" descr="Av/på-menyen">    </p:cNvPr>
-          <p:cNvPicPr>
-            <a:picLocks noChangeAspect="1"/>
-          </p:cNvPicPr>
-          <p:nvPr/>
-        </p:nvPicPr>
-        <p:blipFill>
-          <a:blip r:embed="rId1"/>
-          <a:stretch>
-            <a:fillRect/>
-          </a:stretch>
-        </p:blipFill>
-        <p:spPr>
-          <a:xfrm>
-            <a:off x="4526280" y="1371600"/>
-            <a:ext cx="7132320" cy="4457700"/>
-          </a:xfrm>
-          <a:prstGeom prst="rect">
-            <a:avLst/>
-          </a:prstGeom>
-        </p:spPr>
-      </p:pic>
-      <p:sp>
-        <p:nvSpPr>
-          <p:cNvPr id="25" name="Slide Number Placeholder 0"/>
-          <p:cNvSpPr>
-            <a:spLocks noGrp="1"/>
-          </p:cNvSpPr>
-          <p:nvPr>
-            <p:ph type="sldNum" sz="quarter" idx="4294967295"/>
-          </p:nvPr>
-        </p:nvSpPr>
-        <p:spPr>
-          <a:xfrm>
-            <a:off x="11247120" y="6400800"/>
-            <a:ext cx="457200" cy="274320"/>
-          </a:xfrm>
-          <a:prstGeom prst="rect">
-            <a:avLst/>
-          </a:prstGeom>
-          <a:extLst>
-            <a:ext uri="{C572A759-6A51-4108-AA02-DFA0A04FC94B}">
-              <ma14:wrappingTextBoxFlag xmlns:ma14="http://schemas.microsoft.com/office/mac/drawingml/2011/main" val="0"/>
-            </a:ext>
-          </a:extLst>
-        </p:spPr>
-        <p:txBody>
-          <a:bodyPr/>
-          <a:lstStyle>
-            <a:lvl1pPr>
-              <a:defRPr sz="1000">
-                <a:solidFill>
-                  <a:schemeClr val="accent6"/>
-                </a:solidFill>
-              </a:defRPr>
-            </a:lvl1pPr>
-          </a:lstStyle>
-          <a:p>
-            <a:pPr algn="r"/>
-            <a:fld id="{F7021451-1387-4CA6-816F-3879F97B5CBC}" type="slidenum">
-              <a:rPr b="0" lang="en-US"/>
-              <a:t>27</a:t>
-            </a:fld>
-            <a:endParaRPr lang="en-US"/>
+              <a:buNone/>
+            </a:pPr>
+            <a:r>
+              <a:rPr lang="en-US" sz="1800" dirty="0">
+                <a:solidFill>
+                  <a:schemeClr val="accent2"/>
+                </a:solidFill>
+              </a:rPr>
+              <a:t>Lag på lag – ingen enkeltfeil åpner alt</a:t>
+            </a:r>
+            <a:endParaRPr lang="en-US" sz="1800" dirty="0"/>
           </a:p>
         </p:txBody>
       </p:sp>
@@ -10469,7 +10298,7 @@
                   <a:schemeClr val="tx2"/>
                 </a:solidFill>
               </a:rPr>
-              <a:t>Veien videre</a:t>
+              <a:t>Vernet i lag</a:t>
             </a:r>
             <a:endParaRPr lang="en-US" sz="3200" dirty="0"/>
           </a:p>
@@ -10477,18 +10306,18 @@
       </p:sp>
       <p:sp>
         <p:nvSpPr>
-          <p:cNvPr id="3" name="Avtale med Norsk helsenett kort"/>
+          <p:cNvPr id="3" name="Brannmur kort"/>
           <p:cNvSpPr/>
           <p:nvPr/>
         </p:nvSpPr>
         <p:spPr>
           <a:xfrm>
-            <a:off x="548640" y="1463040"/>
-            <a:ext cx="2567178" cy="2926080"/>
+            <a:off x="548640" y="1234440"/>
+            <a:ext cx="2567178" cy="2377440"/>
           </a:xfrm>
           <a:prstGeom prst="roundRect">
             <a:avLst>
-              <a:gd name="adj" fmla="val 4274"/>
+              <a:gd name="adj" fmla="val 4615"/>
             </a:avLst>
           </a:prstGeom>
           <a:solidFill>
@@ -10504,13 +10333,13 @@
       </p:sp>
       <p:sp>
         <p:nvSpPr>
-          <p:cNvPr id="4" name="Avtale med Norsk helsenett ikonring"/>
+          <p:cNvPr id="4" name="Brannmur ikonring"/>
           <p:cNvSpPr/>
           <p:nvPr/>
         </p:nvSpPr>
         <p:spPr>
           <a:xfrm>
-            <a:off x="822960" y="1737360"/>
+            <a:off x="822960" y="1508760"/>
             <a:ext cx="640080" cy="640080"/>
           </a:xfrm>
           <a:prstGeom prst="ellipse">
@@ -10524,7 +10353,7 @@
       </p:sp>
       <p:pic>
         <p:nvPicPr>
-          <p:cNvPr id="5" name="Avtale med Norsk helsenett ikon" descr="Avtale med Norsk helsenett">    </p:cNvPr>
+          <p:cNvPr id="5" name="Brannmur ikon" descr="Brannmur">    </p:cNvPr>
           <p:cNvPicPr>
             <a:picLocks noChangeAspect="1"/>
           </p:cNvPicPr>
@@ -10538,7 +10367,7 @@
         </p:blipFill>
         <p:spPr>
           <a:xfrm>
-            <a:off x="960120" y="1874520"/>
+            <a:off x="960120" y="1645920"/>
             <a:ext cx="365760" cy="365760"/>
           </a:xfrm>
           <a:prstGeom prst="rect">
@@ -10554,7 +10383,7 @@
         </p:nvSpPr>
         <p:spPr>
           <a:xfrm>
-            <a:off x="822960" y="2514600"/>
+            <a:off x="822960" y="2286000"/>
             <a:ext cx="2018538" cy="594360"/>
           </a:xfrm>
           <a:prstGeom prst="rect">
@@ -10576,7 +10405,7 @@
                   <a:schemeClr val="tx2"/>
                 </a:solidFill>
               </a:rPr>
-              <a:t>Avtale med Norsk helsenett</a:t>
+              <a:t>Brannmur</a:t>
             </a:r>
             <a:endParaRPr lang="en-US" sz="1700" dirty="0"/>
           </a:p>
@@ -10590,8 +10419,8 @@
         </p:nvSpPr>
         <p:spPr>
           <a:xfrm>
-            <a:off x="822960" y="3154680"/>
-            <a:ext cx="2018538" cy="1097280"/>
+            <a:off x="822960" y="2926080"/>
+            <a:ext cx="2018538" cy="548640"/>
           </a:xfrm>
           <a:prstGeom prst="rect">
             <a:avLst/>
@@ -10612,7 +10441,7 @@
                   <a:schemeClr val="tx1"/>
                 </a:solidFill>
               </a:rPr>
-              <a:t>Medlemskap, HelseID og godkjenning – grensesnittet er klart.</a:t>
+              <a:t>Ingen kan koble seg til utenfra. Apper når bare helsenettet.</a:t>
             </a:r>
             <a:endParaRPr lang="en-US" sz="1400" dirty="0"/>
           </a:p>
@@ -10620,18 +10449,18 @@
       </p:sp>
       <p:sp>
         <p:nvSpPr>
-          <p:cNvPr id="8" name="Ekte helsepersonellkort kort"/>
+          <p:cNvPr id="8" name="USB-lås kort"/>
           <p:cNvSpPr/>
           <p:nvPr/>
         </p:nvSpPr>
         <p:spPr>
           <a:xfrm>
-            <a:off x="3390138" y="1463040"/>
-            <a:ext cx="2567178" cy="2926080"/>
+            <a:off x="3390138" y="1234440"/>
+            <a:ext cx="2567178" cy="2377440"/>
           </a:xfrm>
           <a:prstGeom prst="roundRect">
             <a:avLst>
-              <a:gd name="adj" fmla="val 4274"/>
+              <a:gd name="adj" fmla="val 4615"/>
             </a:avLst>
           </a:prstGeom>
           <a:solidFill>
@@ -10647,13 +10476,13 @@
       </p:sp>
       <p:sp>
         <p:nvSpPr>
-          <p:cNvPr id="9" name="Ekte helsepersonellkort ikonring"/>
+          <p:cNvPr id="9" name="USB-lås ikonring"/>
           <p:cNvSpPr/>
           <p:nvPr/>
         </p:nvSpPr>
         <p:spPr>
           <a:xfrm>
-            <a:off x="3664458" y="1737360"/>
+            <a:off x="3664458" y="1508760"/>
             <a:ext cx="640080" cy="640080"/>
           </a:xfrm>
           <a:prstGeom prst="ellipse">
@@ -10667,7 +10496,7 @@
       </p:sp>
       <p:pic>
         <p:nvPicPr>
-          <p:cNvPr id="10" name="Ekte helsepersonellkort ikon" descr="Ekte helsepersonellkort">    </p:cNvPr>
+          <p:cNvPr id="10" name="USB-lås ikon" descr="USB-lås">    </p:cNvPr>
           <p:cNvPicPr>
             <a:picLocks noChangeAspect="1"/>
           </p:cNvPicPr>
@@ -10681,7 +10510,7 @@
         </p:blipFill>
         <p:spPr>
           <a:xfrm>
-            <a:off x="3801618" y="1874520"/>
+            <a:off x="3801618" y="1645920"/>
             <a:ext cx="365760" cy="365760"/>
           </a:xfrm>
           <a:prstGeom prst="rect">
@@ -10697,7 +10526,7 @@
         </p:nvSpPr>
         <p:spPr>
           <a:xfrm>
-            <a:off x="3664458" y="2514600"/>
+            <a:off x="3664458" y="2286000"/>
             <a:ext cx="2018538" cy="594360"/>
           </a:xfrm>
           <a:prstGeom prst="rect">
@@ -10719,7 +10548,7 @@
                   <a:schemeClr val="tx2"/>
                 </a:solidFill>
               </a:rPr>
-              <a:t>Ekte helsepersonellkort</a:t>
+              <a:t>USB-lås</a:t>
             </a:r>
             <a:endParaRPr lang="en-US" sz="1700" dirty="0"/>
           </a:p>
@@ -10733,8 +10562,8 @@
         </p:nvSpPr>
         <p:spPr>
           <a:xfrm>
-            <a:off x="3664458" y="3154680"/>
-            <a:ext cx="2018538" cy="1097280"/>
+            <a:off x="3664458" y="2926080"/>
+            <a:ext cx="2018538" cy="548640"/>
           </a:xfrm>
           <a:prstGeom prst="rect">
             <a:avLst/>
@@ -10755,7 +10584,7 @@
                   <a:schemeClr val="tx1"/>
                 </a:solidFill>
               </a:rPr>
-              <a:t>Bytt simulert kortleser mot ekte (PKCS#11).</a:t>
+              <a:t>Minnepinner blokkert. Bare tastatur, mus, hodesett og kortleser.</a:t>
             </a:r>
             <a:endParaRPr lang="en-US" sz="1400" dirty="0"/>
           </a:p>
@@ -10763,18 +10592,18 @@
       </p:sp>
       <p:sp>
         <p:nvSpPr>
-          <p:cNvPr id="13" name="Installasjon på disk kort"/>
+          <p:cNvPr id="13" name="Virusskanning kort"/>
           <p:cNvSpPr/>
           <p:nvPr/>
         </p:nvSpPr>
         <p:spPr>
           <a:xfrm>
-            <a:off x="6231636" y="1463040"/>
-            <a:ext cx="2567178" cy="2926080"/>
+            <a:off x="6231636" y="1234440"/>
+            <a:ext cx="2567178" cy="2377440"/>
           </a:xfrm>
           <a:prstGeom prst="roundRect">
             <a:avLst>
-              <a:gd name="adj" fmla="val 4274"/>
+              <a:gd name="adj" fmla="val 4615"/>
             </a:avLst>
           </a:prstGeom>
           <a:solidFill>
@@ -10790,13 +10619,13 @@
       </p:sp>
       <p:sp>
         <p:nvSpPr>
-          <p:cNvPr id="14" name="Installasjon på disk ikonring"/>
+          <p:cNvPr id="14" name="Virusskanning ikonring"/>
           <p:cNvSpPr/>
           <p:nvPr/>
         </p:nvSpPr>
         <p:spPr>
           <a:xfrm>
-            <a:off x="6505956" y="1737360"/>
+            <a:off x="6505956" y="1508760"/>
             <a:ext cx="640080" cy="640080"/>
           </a:xfrm>
           <a:prstGeom prst="ellipse">
@@ -10810,7 +10639,7 @@
       </p:sp>
       <p:pic>
         <p:nvPicPr>
-          <p:cNvPr id="15" name="Installasjon på disk ikon" descr="Installasjon på disk">    </p:cNvPr>
+          <p:cNvPr id="15" name="Virusskanning ikon" descr="Virusskanning">    </p:cNvPr>
           <p:cNvPicPr>
             <a:picLocks noChangeAspect="1"/>
           </p:cNvPicPr>
@@ -10824,7 +10653,7 @@
         </p:blipFill>
         <p:spPr>
           <a:xfrm>
-            <a:off x="6643116" y="1874520"/>
+            <a:off x="6643116" y="1645920"/>
             <a:ext cx="365760" cy="365760"/>
           </a:xfrm>
           <a:prstGeom prst="rect">
@@ -10840,7 +10669,7 @@
         </p:nvSpPr>
         <p:spPr>
           <a:xfrm>
-            <a:off x="6505956" y="2514600"/>
+            <a:off x="6505956" y="2286000"/>
             <a:ext cx="2018538" cy="594360"/>
           </a:xfrm>
           <a:prstGeom prst="rect">
@@ -10862,7 +10691,7 @@
                   <a:schemeClr val="tx2"/>
                 </a:solidFill>
               </a:rPr>
-              <a:t>Installasjon på disk</a:t>
+              <a:t>Virusskanning</a:t>
             </a:r>
             <a:endParaRPr lang="en-US" sz="1700" dirty="0"/>
           </a:p>
@@ -10876,8 +10705,8 @@
         </p:nvSpPr>
         <p:spPr>
           <a:xfrm>
-            <a:off x="6505956" y="3154680"/>
-            <a:ext cx="2018538" cy="1097280"/>
+            <a:off x="6505956" y="2926080"/>
+            <a:ext cx="2018538" cy="548640"/>
           </a:xfrm>
           <a:prstGeom prst="rect">
             <a:avLst/>
@@ -10898,7 +10727,7 @@
                   <a:schemeClr val="tx1"/>
                 </a:solidFill>
               </a:rPr>
-              <a:t>Egen installasjonsmodus for IT, med full diskkryptering.</a:t>
+              <a:t>Alle vedlegg skannes før de slippes inn.</a:t>
             </a:r>
             <a:endParaRPr lang="en-US" sz="1400" dirty="0"/>
           </a:p>
@@ -10906,18 +10735,18 @@
       </p:sp>
       <p:sp>
         <p:nvSpPr>
-          <p:cNvPr id="18" name="Sikkerhetsrevisjon kort"/>
+          <p:cNvPr id="18" name="VPN med kill switch kort"/>
           <p:cNvSpPr/>
           <p:nvPr/>
         </p:nvSpPr>
         <p:spPr>
           <a:xfrm>
-            <a:off x="9073134" y="1463040"/>
-            <a:ext cx="2567178" cy="2926080"/>
+            <a:off x="9073134" y="1234440"/>
+            <a:ext cx="2567178" cy="2377440"/>
           </a:xfrm>
           <a:prstGeom prst="roundRect">
             <a:avLst>
-              <a:gd name="adj" fmla="val 4274"/>
+              <a:gd name="adj" fmla="val 4615"/>
             </a:avLst>
           </a:prstGeom>
           <a:solidFill>
@@ -10933,13 +10762,13 @@
       </p:sp>
       <p:sp>
         <p:nvSpPr>
-          <p:cNvPr id="19" name="Sikkerhetsrevisjon ikonring"/>
+          <p:cNvPr id="19" name="VPN med kill switch ikonring"/>
           <p:cNvSpPr/>
           <p:nvPr/>
         </p:nvSpPr>
         <p:spPr>
           <a:xfrm>
-            <a:off x="9347454" y="1737360"/>
+            <a:off x="9347454" y="1508760"/>
             <a:ext cx="640080" cy="640080"/>
           </a:xfrm>
           <a:prstGeom prst="ellipse">
@@ -10953,7 +10782,7 @@
       </p:sp>
       <p:pic>
         <p:nvPicPr>
-          <p:cNvPr id="20" name="Sikkerhetsrevisjon ikon" descr="Sikkerhetsrevisjon">    </p:cNvPr>
+          <p:cNvPr id="20" name="VPN med kill switch ikon" descr="VPN med kill switch">    </p:cNvPr>
           <p:cNvPicPr>
             <a:picLocks noChangeAspect="1"/>
           </p:cNvPicPr>
@@ -10967,7 +10796,7 @@
         </p:blipFill>
         <p:spPr>
           <a:xfrm>
-            <a:off x="9484614" y="1874520"/>
+            <a:off x="9484614" y="1645920"/>
             <a:ext cx="365760" cy="365760"/>
           </a:xfrm>
           <a:prstGeom prst="rect">
@@ -10983,7 +10812,7 @@
         </p:nvSpPr>
         <p:spPr>
           <a:xfrm>
-            <a:off x="9347454" y="2514600"/>
+            <a:off x="9347454" y="2286000"/>
             <a:ext cx="2018538" cy="594360"/>
           </a:xfrm>
           <a:prstGeom prst="rect">
@@ -11005,7 +10834,7 @@
                   <a:schemeClr val="tx2"/>
                 </a:solidFill>
               </a:rPr>
-              <a:t>Sikkerhetsrevisjon</a:t>
+              <a:t>VPN med kill switch</a:t>
             </a:r>
             <a:endParaRPr lang="en-US" sz="1700" dirty="0"/>
           </a:p>
@@ -11019,8 +10848,8 @@
         </p:nvSpPr>
         <p:spPr>
           <a:xfrm>
-            <a:off x="9347454" y="3154680"/>
-            <a:ext cx="2018538" cy="1097280"/>
+            <a:off x="9347454" y="2926080"/>
+            <a:ext cx="2018538" cy="548640"/>
           </a:xfrm>
           <a:prstGeom prst="rect">
             <a:avLst/>
@@ -11041,7 +10870,579 @@
                   <a:schemeClr val="tx1"/>
                 </a:solidFill>
               </a:rPr>
-              <a:t>Ekstern penetrasjonstest, Normen, GDPR og MDR-vurdering.</a:t>
+              <a:t>All trafikk kryptert til helsenettet, ingen annen vei ut.</a:t>
+            </a:r>
+            <a:endParaRPr lang="en-US" sz="1400" dirty="0"/>
+          </a:p>
+        </p:txBody>
+      </p:sp>
+      <p:sp>
+        <p:nvSpPr>
+          <p:cNvPr id="23" name="Ingen programkjøring kort"/>
+          <p:cNvSpPr/>
+          <p:nvPr/>
+        </p:nvSpPr>
+        <p:spPr>
+          <a:xfrm>
+            <a:off x="548640" y="3886200"/>
+            <a:ext cx="2567178" cy="2377440"/>
+          </a:xfrm>
+          <a:prstGeom prst="roundRect">
+            <a:avLst>
+              <a:gd name="adj" fmla="val 4615"/>
+            </a:avLst>
+          </a:prstGeom>
+          <a:solidFill>
+            <a:schemeClr val="bg1"/>
+          </a:solidFill>
+          <a:ln w="9525">
+            <a:solidFill>
+              <a:srgbClr val="D2DDD5"/>
+            </a:solidFill>
+            <a:prstDash val="solid"/>
+          </a:ln>
+        </p:spPr>
+      </p:sp>
+      <p:sp>
+        <p:nvSpPr>
+          <p:cNvPr id="24" name="Ingen programkjøring ikonring"/>
+          <p:cNvSpPr/>
+          <p:nvPr/>
+        </p:nvSpPr>
+        <p:spPr>
+          <a:xfrm>
+            <a:off x="822960" y="4160520"/>
+            <a:ext cx="640080" cy="640080"/>
+          </a:xfrm>
+          <a:prstGeom prst="ellipse">
+            <a:avLst/>
+          </a:prstGeom>
+          <a:solidFill>
+            <a:schemeClr val="accent1"/>
+          </a:solidFill>
+          <a:ln/>
+        </p:spPr>
+      </p:sp>
+      <p:pic>
+        <p:nvPicPr>
+          <p:cNvPr id="25" name="Ingen programkjøring ikon" descr="Ingen programkjøring">    </p:cNvPr>
+          <p:cNvPicPr>
+            <a:picLocks noChangeAspect="1"/>
+          </p:cNvPicPr>
+          <p:nvPr/>
+        </p:nvPicPr>
+        <p:blipFill>
+          <a:blip r:embed="rId5"/>
+          <a:stretch>
+            <a:fillRect/>
+          </a:stretch>
+        </p:blipFill>
+        <p:spPr>
+          <a:xfrm>
+            <a:off x="960120" y="4297680"/>
+            <a:ext cx="365760" cy="365760"/>
+          </a:xfrm>
+          <a:prstGeom prst="rect">
+            <a:avLst/>
+          </a:prstGeom>
+        </p:spPr>
+      </p:pic>
+      <p:sp>
+        <p:nvSpPr>
+          <p:cNvPr id="26" name="Text 19"/>
+          <p:cNvSpPr txBox="1"/>
+          <p:nvPr/>
+        </p:nvSpPr>
+        <p:spPr>
+          <a:xfrm>
+            <a:off x="822960" y="4937760"/>
+            <a:ext cx="2018538" cy="594360"/>
+          </a:xfrm>
+          <a:prstGeom prst="rect">
+            <a:avLst/>
+          </a:prstGeom>
+          <a:noFill/>
+          <a:ln/>
+        </p:spPr>
+        <p:txBody>
+          <a:bodyPr wrap="square" lIns="0" tIns="0" rIns="0" bIns="0" rtlCol="0" anchor="t"/>
+          <a:lstStyle/>
+          <a:p>
+            <a:pPr indent="0" marL="0">
+              <a:buNone/>
+            </a:pPr>
+            <a:r>
+              <a:rPr lang="en-US" sz="1700" b="1" dirty="0">
+                <a:solidFill>
+                  <a:schemeClr val="tx2"/>
+                </a:solidFill>
+              </a:rPr>
+              <a:t>Ingen programkjøring</a:t>
+            </a:r>
+            <a:endParaRPr lang="en-US" sz="1700" dirty="0"/>
+          </a:p>
+        </p:txBody>
+      </p:sp>
+      <p:sp>
+        <p:nvSpPr>
+          <p:cNvPr id="27" name="Text 20"/>
+          <p:cNvSpPr txBox="1"/>
+          <p:nvPr/>
+        </p:nvSpPr>
+        <p:spPr>
+          <a:xfrm>
+            <a:off x="822960" y="5577840"/>
+            <a:ext cx="2018538" cy="548640"/>
+          </a:xfrm>
+          <a:prstGeom prst="rect">
+            <a:avLst/>
+          </a:prstGeom>
+          <a:noFill/>
+          <a:ln/>
+        </p:spPr>
+        <p:txBody>
+          <a:bodyPr wrap="square" lIns="0" tIns="0" rIns="0" bIns="0" rtlCol="0" anchor="t"/>
+          <a:lstStyle/>
+          <a:p>
+            <a:pPr indent="0" marL="0">
+              <a:buNone/>
+            </a:pPr>
+            <a:r>
+              <a:rPr lang="en-US" sz="1400" dirty="0">
+                <a:solidFill>
+                  <a:schemeClr val="tx1"/>
+                </a:solidFill>
+              </a:rPr>
+              <a:t>Ikke fra hjemmemappe, nedlastinger eller temp-mapper.</a:t>
+            </a:r>
+            <a:endParaRPr lang="en-US" sz="1400" dirty="0"/>
+          </a:p>
+        </p:txBody>
+      </p:sp>
+      <p:sp>
+        <p:nvSpPr>
+          <p:cNvPr id="28" name="Øktvakt kort"/>
+          <p:cNvSpPr/>
+          <p:nvPr/>
+        </p:nvSpPr>
+        <p:spPr>
+          <a:xfrm>
+            <a:off x="3390138" y="3886200"/>
+            <a:ext cx="2567178" cy="2377440"/>
+          </a:xfrm>
+          <a:prstGeom prst="roundRect">
+            <a:avLst>
+              <a:gd name="adj" fmla="val 4615"/>
+            </a:avLst>
+          </a:prstGeom>
+          <a:solidFill>
+            <a:schemeClr val="bg1"/>
+          </a:solidFill>
+          <a:ln w="9525">
+            <a:solidFill>
+              <a:srgbClr val="D2DDD5"/>
+            </a:solidFill>
+            <a:prstDash val="solid"/>
+          </a:ln>
+        </p:spPr>
+      </p:sp>
+      <p:sp>
+        <p:nvSpPr>
+          <p:cNvPr id="29" name="Øktvakt ikonring"/>
+          <p:cNvSpPr/>
+          <p:nvPr/>
+        </p:nvSpPr>
+        <p:spPr>
+          <a:xfrm>
+            <a:off x="3664458" y="4160520"/>
+            <a:ext cx="640080" cy="640080"/>
+          </a:xfrm>
+          <a:prstGeom prst="ellipse">
+            <a:avLst/>
+          </a:prstGeom>
+          <a:solidFill>
+            <a:schemeClr val="accent1"/>
+          </a:solidFill>
+          <a:ln/>
+        </p:spPr>
+      </p:sp>
+      <p:pic>
+        <p:nvPicPr>
+          <p:cNvPr id="30" name="Øktvakt ikon" descr="Øktvakt">    </p:cNvPr>
+          <p:cNvPicPr>
+            <a:picLocks noChangeAspect="1"/>
+          </p:cNvPicPr>
+          <p:nvPr/>
+        </p:nvPicPr>
+        <p:blipFill>
+          <a:blip r:embed="rId6"/>
+          <a:stretch>
+            <a:fillRect/>
+          </a:stretch>
+        </p:blipFill>
+        <p:spPr>
+          <a:xfrm>
+            <a:off x="3801618" y="4297680"/>
+            <a:ext cx="365760" cy="365760"/>
+          </a:xfrm>
+          <a:prstGeom prst="rect">
+            <a:avLst/>
+          </a:prstGeom>
+        </p:spPr>
+      </p:pic>
+      <p:sp>
+        <p:nvSpPr>
+          <p:cNvPr id="31" name="Text 23"/>
+          <p:cNvSpPr txBox="1"/>
+          <p:nvPr/>
+        </p:nvSpPr>
+        <p:spPr>
+          <a:xfrm>
+            <a:off x="3664458" y="4937760"/>
+            <a:ext cx="2018538" cy="594360"/>
+          </a:xfrm>
+          <a:prstGeom prst="rect">
+            <a:avLst/>
+          </a:prstGeom>
+          <a:noFill/>
+          <a:ln/>
+        </p:spPr>
+        <p:txBody>
+          <a:bodyPr wrap="square" lIns="0" tIns="0" rIns="0" bIns="0" rtlCol="0" anchor="t"/>
+          <a:lstStyle/>
+          <a:p>
+            <a:pPr indent="0" marL="0">
+              <a:buNone/>
+            </a:pPr>
+            <a:r>
+              <a:rPr lang="en-US" sz="1700" b="1" dirty="0">
+                <a:solidFill>
+                  <a:schemeClr val="tx2"/>
+                </a:solidFill>
+              </a:rPr>
+              <a:t>Øktvakt</a:t>
+            </a:r>
+            <a:endParaRPr lang="en-US" sz="1700" dirty="0"/>
+          </a:p>
+        </p:txBody>
+      </p:sp>
+      <p:sp>
+        <p:nvSpPr>
+          <p:cNvPr id="32" name="Text 24"/>
+          <p:cNvSpPr txBox="1"/>
+          <p:nvPr/>
+        </p:nvSpPr>
+        <p:spPr>
+          <a:xfrm>
+            <a:off x="3664458" y="5577840"/>
+            <a:ext cx="2018538" cy="548640"/>
+          </a:xfrm>
+          <a:prstGeom prst="rect">
+            <a:avLst/>
+          </a:prstGeom>
+          <a:noFill/>
+          <a:ln/>
+        </p:spPr>
+        <p:txBody>
+          <a:bodyPr wrap="square" lIns="0" tIns="0" rIns="0" bIns="0" rtlCol="0" anchor="t"/>
+          <a:lstStyle/>
+          <a:p>
+            <a:pPr indent="0" marL="0">
+              <a:buNone/>
+            </a:pPr>
+            <a:r>
+              <a:rPr lang="en-US" sz="1400" dirty="0">
+                <a:solidFill>
+                  <a:schemeClr val="tx1"/>
+                </a:solidFill>
+              </a:rPr>
+              <a:t>Kortet ut – skjermen låses med en gang. Holdes 15 min for samme kort, så avsluttes og tømmes økten.</a:t>
+            </a:r>
+            <a:endParaRPr lang="en-US" sz="1400" dirty="0"/>
+          </a:p>
+        </p:txBody>
+      </p:sp>
+      <p:sp>
+        <p:nvSpPr>
+          <p:cNvPr id="33" name="Sikkerhetslogg kort"/>
+          <p:cNvSpPr/>
+          <p:nvPr/>
+        </p:nvSpPr>
+        <p:spPr>
+          <a:xfrm>
+            <a:off x="6231636" y="3886200"/>
+            <a:ext cx="2567178" cy="2377440"/>
+          </a:xfrm>
+          <a:prstGeom prst="roundRect">
+            <a:avLst>
+              <a:gd name="adj" fmla="val 4615"/>
+            </a:avLst>
+          </a:prstGeom>
+          <a:solidFill>
+            <a:schemeClr val="bg1"/>
+          </a:solidFill>
+          <a:ln w="9525">
+            <a:solidFill>
+              <a:srgbClr val="D2DDD5"/>
+            </a:solidFill>
+            <a:prstDash val="solid"/>
+          </a:ln>
+        </p:spPr>
+      </p:sp>
+      <p:sp>
+        <p:nvSpPr>
+          <p:cNvPr id="34" name="Sikkerhetslogg ikonring"/>
+          <p:cNvSpPr/>
+          <p:nvPr/>
+        </p:nvSpPr>
+        <p:spPr>
+          <a:xfrm>
+            <a:off x="6505956" y="4160520"/>
+            <a:ext cx="640080" cy="640080"/>
+          </a:xfrm>
+          <a:prstGeom prst="ellipse">
+            <a:avLst/>
+          </a:prstGeom>
+          <a:solidFill>
+            <a:schemeClr val="accent1"/>
+          </a:solidFill>
+          <a:ln/>
+        </p:spPr>
+      </p:sp>
+      <p:pic>
+        <p:nvPicPr>
+          <p:cNvPr id="35" name="Sikkerhetslogg ikon" descr="Sikkerhetslogg">    </p:cNvPr>
+          <p:cNvPicPr>
+            <a:picLocks noChangeAspect="1"/>
+          </p:cNvPicPr>
+          <p:nvPr/>
+        </p:nvPicPr>
+        <p:blipFill>
+          <a:blip r:embed="rId7"/>
+          <a:stretch>
+            <a:fillRect/>
+          </a:stretch>
+        </p:blipFill>
+        <p:spPr>
+          <a:xfrm>
+            <a:off x="6643116" y="4297680"/>
+            <a:ext cx="365760" cy="365760"/>
+          </a:xfrm>
+          <a:prstGeom prst="rect">
+            <a:avLst/>
+          </a:prstGeom>
+        </p:spPr>
+      </p:pic>
+      <p:sp>
+        <p:nvSpPr>
+          <p:cNvPr id="36" name="Text 27"/>
+          <p:cNvSpPr txBox="1"/>
+          <p:nvPr/>
+        </p:nvSpPr>
+        <p:spPr>
+          <a:xfrm>
+            <a:off x="6505956" y="4937760"/>
+            <a:ext cx="2018538" cy="594360"/>
+          </a:xfrm>
+          <a:prstGeom prst="rect">
+            <a:avLst/>
+          </a:prstGeom>
+          <a:noFill/>
+          <a:ln/>
+        </p:spPr>
+        <p:txBody>
+          <a:bodyPr wrap="square" lIns="0" tIns="0" rIns="0" bIns="0" rtlCol="0" anchor="t"/>
+          <a:lstStyle/>
+          <a:p>
+            <a:pPr indent="0" marL="0">
+              <a:buNone/>
+            </a:pPr>
+            <a:r>
+              <a:rPr lang="en-US" sz="1700" b="1" dirty="0">
+                <a:solidFill>
+                  <a:schemeClr val="tx2"/>
+                </a:solidFill>
+              </a:rPr>
+              <a:t>Sikkerhetslogg</a:t>
+            </a:r>
+            <a:endParaRPr lang="en-US" sz="1700" dirty="0"/>
+          </a:p>
+        </p:txBody>
+      </p:sp>
+      <p:sp>
+        <p:nvSpPr>
+          <p:cNvPr id="37" name="Text 28"/>
+          <p:cNvSpPr txBox="1"/>
+          <p:nvPr/>
+        </p:nvSpPr>
+        <p:spPr>
+          <a:xfrm>
+            <a:off x="6505956" y="5577840"/>
+            <a:ext cx="2018538" cy="548640"/>
+          </a:xfrm>
+          <a:prstGeom prst="rect">
+            <a:avLst/>
+          </a:prstGeom>
+          <a:noFill/>
+          <a:ln/>
+        </p:spPr>
+        <p:txBody>
+          <a:bodyPr wrap="square" lIns="0" tIns="0" rIns="0" bIns="0" rtlCol="0" anchor="t"/>
+          <a:lstStyle/>
+          <a:p>
+            <a:pPr indent="0" marL="0">
+              <a:buNone/>
+            </a:pPr>
+            <a:r>
+              <a:rPr lang="en-US" sz="1400" dirty="0">
+                <a:solidFill>
+                  <a:schemeClr val="tx1"/>
+                </a:solidFill>
+              </a:rPr>
+              <a:t>Endringer i innlogging, brannmur og oppsett logges.</a:t>
+            </a:r>
+            <a:endParaRPr lang="en-US" sz="1400" dirty="0"/>
+          </a:p>
+        </p:txBody>
+      </p:sp>
+      <p:sp>
+        <p:nvSpPr>
+          <p:cNvPr id="38" name="Oppdateringer kort"/>
+          <p:cNvSpPr/>
+          <p:nvPr/>
+        </p:nvSpPr>
+        <p:spPr>
+          <a:xfrm>
+            <a:off x="9073134" y="3886200"/>
+            <a:ext cx="2567178" cy="2377440"/>
+          </a:xfrm>
+          <a:prstGeom prst="roundRect">
+            <a:avLst>
+              <a:gd name="adj" fmla="val 4615"/>
+            </a:avLst>
+          </a:prstGeom>
+          <a:solidFill>
+            <a:schemeClr val="bg1"/>
+          </a:solidFill>
+          <a:ln w="9525">
+            <a:solidFill>
+              <a:srgbClr val="D2DDD5"/>
+            </a:solidFill>
+            <a:prstDash val="solid"/>
+          </a:ln>
+        </p:spPr>
+      </p:sp>
+      <p:sp>
+        <p:nvSpPr>
+          <p:cNvPr id="39" name="Oppdateringer ikonring"/>
+          <p:cNvSpPr/>
+          <p:nvPr/>
+        </p:nvSpPr>
+        <p:spPr>
+          <a:xfrm>
+            <a:off x="9347454" y="4160520"/>
+            <a:ext cx="640080" cy="640080"/>
+          </a:xfrm>
+          <a:prstGeom prst="ellipse">
+            <a:avLst/>
+          </a:prstGeom>
+          <a:solidFill>
+            <a:schemeClr val="accent1"/>
+          </a:solidFill>
+          <a:ln/>
+        </p:spPr>
+      </p:sp>
+      <p:pic>
+        <p:nvPicPr>
+          <p:cNvPr id="40" name="Oppdateringer ikon" descr="Oppdateringer">    </p:cNvPr>
+          <p:cNvPicPr>
+            <a:picLocks noChangeAspect="1"/>
+          </p:cNvPicPr>
+          <p:nvPr/>
+        </p:nvPicPr>
+        <p:blipFill>
+          <a:blip r:embed="rId8"/>
+          <a:stretch>
+            <a:fillRect/>
+          </a:stretch>
+        </p:blipFill>
+        <p:spPr>
+          <a:xfrm>
+            <a:off x="9484614" y="4297680"/>
+            <a:ext cx="365760" cy="365760"/>
+          </a:xfrm>
+          <a:prstGeom prst="rect">
+            <a:avLst/>
+          </a:prstGeom>
+        </p:spPr>
+      </p:pic>
+      <p:sp>
+        <p:nvSpPr>
+          <p:cNvPr id="41" name="Text 31"/>
+          <p:cNvSpPr txBox="1"/>
+          <p:nvPr/>
+        </p:nvSpPr>
+        <p:spPr>
+          <a:xfrm>
+            <a:off x="9347454" y="4937760"/>
+            <a:ext cx="2018538" cy="594360"/>
+          </a:xfrm>
+          <a:prstGeom prst="rect">
+            <a:avLst/>
+          </a:prstGeom>
+          <a:noFill/>
+          <a:ln/>
+        </p:spPr>
+        <p:txBody>
+          <a:bodyPr wrap="square" lIns="0" tIns="0" rIns="0" bIns="0" rtlCol="0" anchor="t"/>
+          <a:lstStyle/>
+          <a:p>
+            <a:pPr indent="0" marL="0">
+              <a:buNone/>
+            </a:pPr>
+            <a:r>
+              <a:rPr lang="en-US" sz="1700" b="1" dirty="0">
+                <a:solidFill>
+                  <a:schemeClr val="tx2"/>
+                </a:solidFill>
+              </a:rPr>
+              <a:t>Oppdateringer</a:t>
+            </a:r>
+            <a:endParaRPr lang="en-US" sz="1700" dirty="0"/>
+          </a:p>
+        </p:txBody>
+      </p:sp>
+      <p:sp>
+        <p:nvSpPr>
+          <p:cNvPr id="42" name="Text 32"/>
+          <p:cNvSpPr txBox="1"/>
+          <p:nvPr/>
+        </p:nvSpPr>
+        <p:spPr>
+          <a:xfrm>
+            <a:off x="9347454" y="5577840"/>
+            <a:ext cx="2018538" cy="548640"/>
+          </a:xfrm>
+          <a:prstGeom prst="rect">
+            <a:avLst/>
+          </a:prstGeom>
+          <a:noFill/>
+          <a:ln/>
+        </p:spPr>
+        <p:txBody>
+          <a:bodyPr wrap="square" lIns="0" tIns="0" rIns="0" bIns="0" rtlCol="0" anchor="t"/>
+          <a:lstStyle/>
+          <a:p>
+            <a:pPr indent="0" marL="0">
+              <a:buNone/>
+            </a:pPr>
+            <a:r>
+              <a:rPr lang="en-US" sz="1400" dirty="0">
+                <a:solidFill>
+                  <a:schemeClr val="tx1"/>
+                </a:solidFill>
+              </a:rPr>
+              <a:t>Sikkerhetsoppdateringer installeres automatisk.</a:t>
             </a:r>
             <a:endParaRPr lang="en-US" sz="1400" dirty="0"/>
           </a:p>
@@ -11089,6 +11490,145 @@
               <a:t>28</a:t>
             </a:fld>
             <a:endParaRPr lang="en-US"/>
+          </a:p>
+        </p:txBody>
+      </p:sp>
+    </p:spTree>
+  </p:cSld>
+  <p:clrMapOvr>
+    <a:masterClrMapping/>
+  </p:clrMapOvr>
+</p:sld>
+</file>
+
+<file path=ppt/slides/slide29.xml><?xml version="1.0" encoding="utf-8"?>
+<p:sld xmlns:a="http://schemas.openxmlformats.org/drawingml/2006/main" xmlns:r="http://schemas.openxmlformats.org/officeDocument/2006/relationships" xmlns:p="http://schemas.openxmlformats.org/presentationml/2006/main">
+  <p:cSld name="Slide 29">
+    <p:spTree>
+      <p:nvGrpSpPr>
+        <p:cNvPr id="1" name=""/>
+        <p:cNvGrpSpPr/>
+        <p:nvPr/>
+      </p:nvGrpSpPr>
+      <p:grpSpPr>
+        <a:xfrm>
+          <a:off x="0" y="0"/>
+          <a:ext cx="0" cy="0"/>
+          <a:chOff x="0" y="0"/>
+          <a:chExt cx="0" cy="0"/>
+        </a:xfrm>
+      </p:grpSpPr>
+      <p:sp>
+        <p:nvSpPr>
+          <p:cNvPr id="2" name="Text 0"/>
+          <p:cNvSpPr/>
+          <p:nvPr>
+            <p:ph idx="100" type="body" hasCustomPrompt="1"/>
+          </p:nvPr>
+        </p:nvSpPr>
+        <p:spPr>
+          <a:xfrm>
+            <a:off x="731520" y="2103120"/>
+            <a:ext cx="2743200" cy="1097280"/>
+          </a:xfrm>
+          <a:prstGeom prst="rect">
+            <a:avLst/>
+          </a:prstGeom>
+          <a:noFill/>
+          <a:ln/>
+        </p:spPr>
+        <p:txBody>
+          <a:bodyPr wrap="square" rtlCol="0"/>
+          <a:lstStyle/>
+          <a:p>
+            <a:pPr indent="0" marL="0">
+              <a:buNone/>
+            </a:pPr>
+            <a:r>
+              <a:rPr lang="en-US" sz="6000" b="1" dirty="0">
+                <a:solidFill>
+                  <a:schemeClr val="accent2"/>
+                </a:solidFill>
+              </a:rPr>
+              <a:t>06</a:t>
+            </a:r>
+            <a:endParaRPr lang="en-US" sz="6000" dirty="0"/>
+          </a:p>
+        </p:txBody>
+      </p:sp>
+      <p:sp>
+        <p:nvSpPr>
+          <p:cNvPr id="3" name="Text 0"/>
+          <p:cNvSpPr/>
+          <p:nvPr>
+            <p:ph idx="101" type="title" hasCustomPrompt="1"/>
+          </p:nvPr>
+        </p:nvSpPr>
+        <p:spPr>
+          <a:xfrm>
+            <a:off x="731520" y="3108960"/>
+            <a:ext cx="10698480" cy="914400"/>
+          </a:xfrm>
+          <a:prstGeom prst="rect">
+            <a:avLst/>
+          </a:prstGeom>
+          <a:noFill/>
+          <a:ln/>
+        </p:spPr>
+        <p:txBody>
+          <a:bodyPr wrap="square" rtlCol="0"/>
+          <a:lstStyle/>
+          <a:p>
+            <a:pPr algn="l" indent="0" marL="0">
+              <a:buNone/>
+            </a:pPr>
+            <a:r>
+              <a:rPr lang="en-US" sz="4000" b="1" dirty="0">
+                <a:solidFill>
+                  <a:schemeClr val="bg1"/>
+                </a:solidFill>
+              </a:rPr>
+              <a:t>Avslutning</a:t>
+            </a:r>
+            <a:endParaRPr lang="en-US" sz="4000" dirty="0"/>
+          </a:p>
+        </p:txBody>
+      </p:sp>
+      <p:sp>
+        <p:nvSpPr>
+          <p:cNvPr id="4" name="Text 0"/>
+          <p:cNvSpPr/>
+          <p:nvPr>
+            <p:ph idx="102" type="body" hasCustomPrompt="1"/>
+          </p:nvPr>
+        </p:nvSpPr>
+        <p:spPr>
+          <a:xfrm>
+            <a:off x="731520" y="4023360"/>
+            <a:ext cx="10698480" cy="822960"/>
+          </a:xfrm>
+          <a:prstGeom prst="rect">
+            <a:avLst/>
+          </a:prstGeom>
+          <a:noFill/>
+          <a:ln/>
+        </p:spPr>
+        <p:txBody>
+          <a:bodyPr wrap="square" rtlCol="0"/>
+          <a:lstStyle/>
+          <a:p>
+            <a:pPr indent="0" marL="0">
+              <a:buNone/>
+            </a:pPr>
+            <a:r>
+              <a:rPr lang="en-US" sz="1800" dirty="0">
+                <a:solidFill>
+                  <a:schemeClr val="accent2"/>
+                </a:solidFill>
+              </a:rPr>
+              <a:t>Logg ut, lås eller slå av</a:t>
+            </a:r>
+            <a:endParaRPr lang="en-US" sz="1800" dirty="0"/>
           </a:p>
         </p:txBody>
       </p:sp>
@@ -11239,6 +11779,2505 @@
 </p:sld>
 </file>
 
+<file path=ppt/slides/slide30.xml><?xml version="1.0" encoding="utf-8"?>
+<p:sld xmlns:a="http://schemas.openxmlformats.org/drawingml/2006/main" xmlns:r="http://schemas.openxmlformats.org/officeDocument/2006/relationships" xmlns:p="http://schemas.openxmlformats.org/presentationml/2006/main">
+  <p:cSld name="Slide 30">
+    <p:spTree>
+      <p:nvGrpSpPr>
+        <p:cNvPr id="1" name=""/>
+        <p:cNvGrpSpPr/>
+        <p:nvPr/>
+      </p:nvGrpSpPr>
+      <p:grpSpPr>
+        <a:xfrm>
+          <a:off x="0" y="0"/>
+          <a:ext cx="0" cy="0"/>
+          <a:chOff x="0" y="0"/>
+          <a:chExt cx="0" cy="0"/>
+        </a:xfrm>
+      </p:grpSpPr>
+      <p:sp>
+        <p:nvSpPr>
+          <p:cNvPr id="2" name="Text 0"/>
+          <p:cNvSpPr/>
+          <p:nvPr>
+            <p:ph idx="100" type="title" hasCustomPrompt="1"/>
+          </p:nvPr>
+        </p:nvSpPr>
+        <p:spPr>
+          <a:xfrm>
+            <a:off x="548640" y="365760"/>
+            <a:ext cx="11064240" cy="731520"/>
+          </a:xfrm>
+          <a:prstGeom prst="rect">
+            <a:avLst/>
+          </a:prstGeom>
+          <a:noFill/>
+          <a:ln/>
+        </p:spPr>
+        <p:txBody>
+          <a:bodyPr wrap="square" rtlCol="0"/>
+          <a:lstStyle/>
+          <a:p>
+            <a:pPr algn="l" indent="0" marL="0">
+              <a:buNone/>
+            </a:pPr>
+            <a:r>
+              <a:rPr lang="en-US" sz="3200" b="1" dirty="0">
+                <a:solidFill>
+                  <a:schemeClr val="tx2"/>
+                </a:solidFill>
+              </a:rPr>
+              <a:t>Av/på-menyen</a:t>
+            </a:r>
+            <a:endParaRPr lang="en-US" sz="3200" dirty="0"/>
+          </a:p>
+        </p:txBody>
+      </p:sp>
+      <p:sp>
+        <p:nvSpPr>
+          <p:cNvPr id="3" name="Text 0"/>
+          <p:cNvSpPr/>
+          <p:nvPr>
+            <p:ph idx="101" type="body" hasCustomPrompt="1"/>
+          </p:nvPr>
+        </p:nvSpPr>
+        <p:spPr>
+          <a:xfrm>
+            <a:off x="548640" y="1371600"/>
+            <a:ext cx="3657600" cy="4754880"/>
+          </a:xfrm>
+          <a:prstGeom prst="rect">
+            <a:avLst/>
+          </a:prstGeom>
+          <a:noFill/>
+          <a:ln/>
+        </p:spPr>
+        <p:txBody>
+          <a:bodyPr wrap="square" rtlCol="0" anchor="t"/>
+          <a:lstStyle/>
+          <a:p>
+            <a:pPr marL="342900" indent="-342900">
+              <a:spcAft>
+                <a:spcPts val="800"/>
+              </a:spcAft>
+              <a:buSzPct val="100000"/>
+              <a:buChar char="•"/>
+            </a:pPr>
+            <a:r>
+              <a:rPr lang="en-US" sz="1500" b="1" dirty="0">
+                <a:solidFill>
+                  <a:schemeClr val="tx1"/>
+                </a:solidFill>
+              </a:rPr>
+              <a:t>Lås skjerm,</a:t>
+            </a:r>
+            <a:pPr indent="0" marL="0">
+              <a:spcAft>
+                <a:spcPts val="800"/>
+              </a:spcAft>
+              <a:buNone/>
+            </a:pPr>
+            <a:r>
+              <a:rPr lang="en-US" sz="1500" dirty="0">
+                <a:solidFill>
+                  <a:schemeClr val="tx1"/>
+                </a:solidFill>
+              </a:rPr>
+              <a:t> hvilemodus, start på nytt, slå av, logg ut.</a:t>
+            </a:r>
+            <a:endParaRPr lang="en-US" sz="1500" dirty="0"/>
+          </a:p>
+          <a:p>
+            <a:pPr marL="342900" indent="-342900">
+              <a:spcAft>
+                <a:spcPts val="800"/>
+              </a:spcAft>
+              <a:buSzPct val="100000"/>
+              <a:buChar char="•"/>
+            </a:pPr>
+            <a:r>
+              <a:rPr lang="en-US" sz="1500" b="1" dirty="0">
+                <a:solidFill>
+                  <a:schemeClr val="tx1"/>
+                </a:solidFill>
+              </a:rPr>
+              <a:t>Ingen dvale:</a:t>
+            </a:r>
+            <a:pPr indent="0" marL="0">
+              <a:spcAft>
+                <a:spcPts val="800"/>
+              </a:spcAft>
+              <a:buNone/>
+            </a:pPr>
+            <a:r>
+              <a:rPr lang="en-US" sz="1500" dirty="0">
+                <a:solidFill>
+                  <a:schemeClr val="tx1"/>
+                </a:solidFill>
+              </a:rPr>
+              <a:t> den ville skrevet pasientdata til disk.</a:t>
+            </a:r>
+            <a:endParaRPr lang="en-US" sz="1500" dirty="0"/>
+          </a:p>
+          <a:p>
+            <a:pPr marL="342900" indent="-342900">
+              <a:spcAft>
+                <a:spcPts val="800"/>
+              </a:spcAft>
+              <a:buSzPct val="100000"/>
+              <a:buChar char="•"/>
+            </a:pPr>
+            <a:r>
+              <a:rPr lang="en-US" sz="1500" b="1" dirty="0">
+                <a:solidFill>
+                  <a:schemeClr val="tx1"/>
+                </a:solidFill>
+              </a:rPr>
+              <a:t>Ingen «bytt bruker»:</a:t>
+            </a:r>
+            <a:pPr indent="0" marL="0">
+              <a:spcAft>
+                <a:spcPts val="800"/>
+              </a:spcAft>
+              <a:buNone/>
+            </a:pPr>
+            <a:r>
+              <a:rPr lang="en-US" sz="1500" dirty="0">
+                <a:solidFill>
+                  <a:schemeClr val="tx1"/>
+                </a:solidFill>
+              </a:rPr>
+              <a:t> det er kortet som bestemmer.</a:t>
+            </a:r>
+            <a:endParaRPr lang="en-US" sz="1500" dirty="0"/>
+          </a:p>
+        </p:txBody>
+      </p:sp>
+      <p:sp>
+        <p:nvSpPr>
+          <p:cNvPr id="4" name="Av/på-menyen ramme"/>
+          <p:cNvSpPr/>
+          <p:nvPr/>
+        </p:nvSpPr>
+        <p:spPr>
+          <a:xfrm>
+            <a:off x="4526280" y="1371600"/>
+            <a:ext cx="7132320" cy="4457700"/>
+          </a:xfrm>
+          <a:prstGeom prst="rect">
+            <a:avLst/>
+          </a:prstGeom>
+          <a:solidFill>
+            <a:schemeClr val="bg1"/>
+          </a:solidFill>
+          <a:ln w="9525">
+            <a:solidFill>
+              <a:srgbClr val="D2DDD5"/>
+            </a:solidFill>
+            <a:prstDash val="solid"/>
+          </a:ln>
+          <a:effectLst>
+            <a:outerShdw sx="100000" sy="100000" kx="0" ky="0" algn="bl" rotWithShape="0" blurRad="101600" dist="38100" dir="5400000">
+              <a:srgbClr val="000000">
+                <a:alpha val="25000"/>
+              </a:srgbClr>
+            </a:outerShdw>
+          </a:effectLst>
+        </p:spPr>
+      </p:sp>
+      <p:pic>
+        <p:nvPicPr>
+          <p:cNvPr id="5" name="Av/på-menyen" descr="Av/på-menyen">    </p:cNvPr>
+          <p:cNvPicPr>
+            <a:picLocks noChangeAspect="1"/>
+          </p:cNvPicPr>
+          <p:nvPr/>
+        </p:nvPicPr>
+        <p:blipFill>
+          <a:blip r:embed="rId1"/>
+          <a:stretch>
+            <a:fillRect/>
+          </a:stretch>
+        </p:blipFill>
+        <p:spPr>
+          <a:xfrm>
+            <a:off x="4526280" y="1371600"/>
+            <a:ext cx="7132320" cy="4457700"/>
+          </a:xfrm>
+          <a:prstGeom prst="rect">
+            <a:avLst/>
+          </a:prstGeom>
+        </p:spPr>
+      </p:pic>
+      <p:sp>
+        <p:nvSpPr>
+          <p:cNvPr id="25" name="Slide Number Placeholder 0"/>
+          <p:cNvSpPr>
+            <a:spLocks noGrp="1"/>
+          </p:cNvSpPr>
+          <p:nvPr>
+            <p:ph type="sldNum" sz="quarter" idx="4294967295"/>
+          </p:nvPr>
+        </p:nvSpPr>
+        <p:spPr>
+          <a:xfrm>
+            <a:off x="11247120" y="6400800"/>
+            <a:ext cx="457200" cy="274320"/>
+          </a:xfrm>
+          <a:prstGeom prst="rect">
+            <a:avLst/>
+          </a:prstGeom>
+          <a:extLst>
+            <a:ext uri="{C572A759-6A51-4108-AA02-DFA0A04FC94B}">
+              <ma14:wrappingTextBoxFlag xmlns:ma14="http://schemas.microsoft.com/office/mac/drawingml/2011/main" val="0"/>
+            </a:ext>
+          </a:extLst>
+        </p:spPr>
+        <p:txBody>
+          <a:bodyPr/>
+          <a:lstStyle>
+            <a:lvl1pPr>
+              <a:defRPr sz="1000">
+                <a:solidFill>
+                  <a:schemeClr val="accent6"/>
+                </a:solidFill>
+              </a:defRPr>
+            </a:lvl1pPr>
+          </a:lstStyle>
+          <a:p>
+            <a:pPr algn="r"/>
+            <a:fld id="{F7021451-1387-4CA6-816F-3879F97B5CBC}" type="slidenum">
+              <a:rPr b="0" lang="en-US"/>
+              <a:t>30</a:t>
+            </a:fld>
+            <a:endParaRPr lang="en-US"/>
+          </a:p>
+        </p:txBody>
+      </p:sp>
+    </p:spTree>
+  </p:cSld>
+  <p:clrMapOvr>
+    <a:masterClrMapping/>
+  </p:clrMapOvr>
+</p:sld>
+</file>
+
+<file path=ppt/slides/slide31.xml><?xml version="1.0" encoding="utf-8"?>
+<p:sld xmlns:a="http://schemas.openxmlformats.org/drawingml/2006/main" xmlns:r="http://schemas.openxmlformats.org/officeDocument/2006/relationships" xmlns:p="http://schemas.openxmlformats.org/presentationml/2006/main">
+  <p:cSld name="Slide 31">
+    <p:spTree>
+      <p:nvGrpSpPr>
+        <p:cNvPr id="1" name=""/>
+        <p:cNvGrpSpPr/>
+        <p:nvPr/>
+      </p:nvGrpSpPr>
+      <p:grpSpPr>
+        <a:xfrm>
+          <a:off x="0" y="0"/>
+          <a:ext cx="0" cy="0"/>
+          <a:chOff x="0" y="0"/>
+          <a:chExt cx="0" cy="0"/>
+        </a:xfrm>
+      </p:grpSpPr>
+      <p:sp>
+        <p:nvSpPr>
+          <p:cNvPr id="2" name="Text 0"/>
+          <p:cNvSpPr/>
+          <p:nvPr>
+            <p:ph idx="100" type="body" hasCustomPrompt="1"/>
+          </p:nvPr>
+        </p:nvSpPr>
+        <p:spPr>
+          <a:xfrm>
+            <a:off x="731520" y="2103120"/>
+            <a:ext cx="2743200" cy="1097280"/>
+          </a:xfrm>
+          <a:prstGeom prst="rect">
+            <a:avLst/>
+          </a:prstGeom>
+          <a:noFill/>
+          <a:ln/>
+        </p:spPr>
+        <p:txBody>
+          <a:bodyPr wrap="square" rtlCol="0"/>
+          <a:lstStyle/>
+          <a:p>
+            <a:pPr indent="0" marL="0">
+              <a:buNone/>
+            </a:pPr>
+            <a:r>
+              <a:rPr lang="en-US" sz="6000" b="1" dirty="0">
+                <a:solidFill>
+                  <a:schemeClr val="accent2"/>
+                </a:solidFill>
+              </a:rPr>
+              <a:t>07</a:t>
+            </a:r>
+            <a:endParaRPr lang="en-US" sz="6000" dirty="0"/>
+          </a:p>
+        </p:txBody>
+      </p:sp>
+      <p:sp>
+        <p:nvSpPr>
+          <p:cNvPr id="3" name="Text 0"/>
+          <p:cNvSpPr/>
+          <p:nvPr>
+            <p:ph idx="101" type="title" hasCustomPrompt="1"/>
+          </p:nvPr>
+        </p:nvSpPr>
+        <p:spPr>
+          <a:xfrm>
+            <a:off x="731520" y="3108960"/>
+            <a:ext cx="10698480" cy="914400"/>
+          </a:xfrm>
+          <a:prstGeom prst="rect">
+            <a:avLst/>
+          </a:prstGeom>
+          <a:noFill/>
+          <a:ln/>
+        </p:spPr>
+        <p:txBody>
+          <a:bodyPr wrap="square" rtlCol="0"/>
+          <a:lstStyle/>
+          <a:p>
+            <a:pPr algn="l" indent="0" marL="0">
+              <a:buNone/>
+            </a:pPr>
+            <a:r>
+              <a:rPr lang="en-US" sz="4000" b="1" dirty="0">
+                <a:solidFill>
+                  <a:schemeClr val="bg1"/>
+                </a:solidFill>
+              </a:rPr>
+              <a:t>Pilot</a:t>
+            </a:r>
+            <a:endParaRPr lang="en-US" sz="4000" dirty="0"/>
+          </a:p>
+        </p:txBody>
+      </p:sp>
+      <p:sp>
+        <p:nvSpPr>
+          <p:cNvPr id="4" name="Text 0"/>
+          <p:cNvSpPr/>
+          <p:nvPr>
+            <p:ph idx="102" type="body" hasCustomPrompt="1"/>
+          </p:nvPr>
+        </p:nvSpPr>
+        <p:spPr>
+          <a:xfrm>
+            <a:off x="731520" y="4023360"/>
+            <a:ext cx="10698480" cy="822960"/>
+          </a:xfrm>
+          <a:prstGeom prst="rect">
+            <a:avLst/>
+          </a:prstGeom>
+          <a:noFill/>
+          <a:ln/>
+        </p:spPr>
+        <p:txBody>
+          <a:bodyPr wrap="square" rtlCol="0"/>
+          <a:lstStyle/>
+          <a:p>
+            <a:pPr indent="0" marL="0">
+              <a:buNone/>
+            </a:pPr>
+            <a:r>
+              <a:rPr lang="en-US" sz="1800" dirty="0">
+                <a:solidFill>
+                  <a:schemeClr val="accent2"/>
+                </a:solidFill>
+              </a:rPr>
+              <a:t>Prøv selv, og slik kan en første pilot gå</a:t>
+            </a:r>
+            <a:endParaRPr lang="en-US" sz="1800" dirty="0"/>
+          </a:p>
+        </p:txBody>
+      </p:sp>
+    </p:spTree>
+  </p:cSld>
+  <p:clrMapOvr>
+    <a:masterClrMapping/>
+  </p:clrMapOvr>
+</p:sld>
+</file>
+
+<file path=ppt/slides/slide32.xml><?xml version="1.0" encoding="utf-8"?>
+<p:sld xmlns:a="http://schemas.openxmlformats.org/drawingml/2006/main" xmlns:r="http://schemas.openxmlformats.org/officeDocument/2006/relationships" xmlns:p="http://schemas.openxmlformats.org/presentationml/2006/main">
+  <p:cSld name="Slide 32">
+    <p:spTree>
+      <p:nvGrpSpPr>
+        <p:cNvPr id="1" name=""/>
+        <p:cNvGrpSpPr/>
+        <p:nvPr/>
+      </p:nvGrpSpPr>
+      <p:grpSpPr>
+        <a:xfrm>
+          <a:off x="0" y="0"/>
+          <a:ext cx="0" cy="0"/>
+          <a:chOff x="0" y="0"/>
+          <a:chExt cx="0" cy="0"/>
+        </a:xfrm>
+      </p:grpSpPr>
+      <p:sp>
+        <p:nvSpPr>
+          <p:cNvPr id="2" name="Text 0"/>
+          <p:cNvSpPr/>
+          <p:nvPr>
+            <p:ph idx="100" type="title" hasCustomPrompt="1"/>
+          </p:nvPr>
+        </p:nvSpPr>
+        <p:spPr>
+          <a:xfrm>
+            <a:off x="548640" y="365760"/>
+            <a:ext cx="11064240" cy="731520"/>
+          </a:xfrm>
+          <a:prstGeom prst="rect">
+            <a:avLst/>
+          </a:prstGeom>
+          <a:noFill/>
+          <a:ln/>
+        </p:spPr>
+        <p:txBody>
+          <a:bodyPr wrap="square" rtlCol="0"/>
+          <a:lstStyle/>
+          <a:p>
+            <a:pPr algn="l" indent="0" marL="0">
+              <a:buNone/>
+            </a:pPr>
+            <a:r>
+              <a:rPr lang="en-US" sz="3200" b="1" dirty="0">
+                <a:solidFill>
+                  <a:schemeClr val="tx2"/>
+                </a:solidFill>
+              </a:rPr>
+              <a:t>Prøv selv</a:t>
+            </a:r>
+            <a:endParaRPr lang="en-US" sz="3200" dirty="0"/>
+          </a:p>
+        </p:txBody>
+      </p:sp>
+      <p:sp>
+        <p:nvSpPr>
+          <p:cNvPr id="3" name="Åpne nettdemoen kort"/>
+          <p:cNvSpPr/>
+          <p:nvPr/>
+        </p:nvSpPr>
+        <p:spPr>
+          <a:xfrm>
+            <a:off x="548640" y="1463040"/>
+            <a:ext cx="2567178" cy="2926080"/>
+          </a:xfrm>
+          <a:prstGeom prst="roundRect">
+            <a:avLst>
+              <a:gd name="adj" fmla="val 4274"/>
+            </a:avLst>
+          </a:prstGeom>
+          <a:solidFill>
+            <a:schemeClr val="bg1"/>
+          </a:solidFill>
+          <a:ln w="9525">
+            <a:solidFill>
+              <a:srgbClr val="D2DDD5"/>
+            </a:solidFill>
+            <a:prstDash val="solid"/>
+          </a:ln>
+        </p:spPr>
+      </p:sp>
+      <p:sp>
+        <p:nvSpPr>
+          <p:cNvPr id="4" name="Åpne nettdemoen ikonring"/>
+          <p:cNvSpPr/>
+          <p:nvPr/>
+        </p:nvSpPr>
+        <p:spPr>
+          <a:xfrm>
+            <a:off x="822960" y="1737360"/>
+            <a:ext cx="640080" cy="640080"/>
+          </a:xfrm>
+          <a:prstGeom prst="ellipse">
+            <a:avLst/>
+          </a:prstGeom>
+          <a:solidFill>
+            <a:schemeClr val="accent1"/>
+          </a:solidFill>
+          <a:ln/>
+        </p:spPr>
+      </p:sp>
+      <p:pic>
+        <p:nvPicPr>
+          <p:cNvPr id="5" name="Åpne nettdemoen ikon" descr="Åpne nettdemoen">    </p:cNvPr>
+          <p:cNvPicPr>
+            <a:picLocks noChangeAspect="1"/>
+          </p:cNvPicPr>
+          <p:nvPr/>
+        </p:nvPicPr>
+        <p:blipFill>
+          <a:blip r:embed="rId1"/>
+          <a:stretch>
+            <a:fillRect/>
+          </a:stretch>
+        </p:blipFill>
+        <p:spPr>
+          <a:xfrm>
+            <a:off x="960120" y="1874520"/>
+            <a:ext cx="365760" cy="365760"/>
+          </a:xfrm>
+          <a:prstGeom prst="rect">
+            <a:avLst/>
+          </a:prstGeom>
+        </p:spPr>
+      </p:pic>
+      <p:sp>
+        <p:nvSpPr>
+          <p:cNvPr id="6" name="Text 3"/>
+          <p:cNvSpPr txBox="1"/>
+          <p:nvPr/>
+        </p:nvSpPr>
+        <p:spPr>
+          <a:xfrm>
+            <a:off x="822960" y="2514600"/>
+            <a:ext cx="2018538" cy="594360"/>
+          </a:xfrm>
+          <a:prstGeom prst="rect">
+            <a:avLst/>
+          </a:prstGeom>
+          <a:noFill/>
+          <a:ln/>
+        </p:spPr>
+        <p:txBody>
+          <a:bodyPr wrap="square" lIns="0" tIns="0" rIns="0" bIns="0" rtlCol="0" anchor="t"/>
+          <a:lstStyle/>
+          <a:p>
+            <a:pPr indent="0" marL="0">
+              <a:buNone/>
+            </a:pPr>
+            <a:r>
+              <a:rPr lang="en-US" sz="1700" b="1" dirty="0">
+                <a:solidFill>
+                  <a:schemeClr val="tx2"/>
+                </a:solidFill>
+              </a:rPr>
+              <a:t>Åpne nettdemoen</a:t>
+            </a:r>
+            <a:endParaRPr lang="en-US" sz="1700" dirty="0"/>
+          </a:p>
+        </p:txBody>
+      </p:sp>
+      <p:sp>
+        <p:nvSpPr>
+          <p:cNvPr id="7" name="Text 4"/>
+          <p:cNvSpPr txBox="1"/>
+          <p:nvPr/>
+        </p:nvSpPr>
+        <p:spPr>
+          <a:xfrm>
+            <a:off x="822960" y="3154680"/>
+            <a:ext cx="2018538" cy="1097280"/>
+          </a:xfrm>
+          <a:prstGeom prst="rect">
+            <a:avLst/>
+          </a:prstGeom>
+          <a:noFill/>
+          <a:ln/>
+        </p:spPr>
+        <p:txBody>
+          <a:bodyPr wrap="square" lIns="0" tIns="0" rIns="0" bIns="0" rtlCol="0" anchor="t"/>
+          <a:lstStyle/>
+          <a:p>
+            <a:pPr indent="0" marL="0">
+              <a:buNone/>
+            </a:pPr>
+            <a:r>
+              <a:rPr lang="en-US" sz="1400" dirty="0">
+                <a:solidFill>
+                  <a:schemeClr val="tx1"/>
+                </a:solidFill>
+              </a:rPr>
+              <a:t>https://federation-only-emerald-planets.trycloudflare.com/demo</a:t>
+            </a:r>
+            <a:endParaRPr lang="en-US" sz="1400" dirty="0"/>
+          </a:p>
+        </p:txBody>
+      </p:sp>
+      <p:sp>
+        <p:nvSpPr>
+          <p:cNvPr id="8" name="Velg et demokort kort"/>
+          <p:cNvSpPr/>
+          <p:nvPr/>
+        </p:nvSpPr>
+        <p:spPr>
+          <a:xfrm>
+            <a:off x="3390138" y="1463040"/>
+            <a:ext cx="2567178" cy="2926080"/>
+          </a:xfrm>
+          <a:prstGeom prst="roundRect">
+            <a:avLst>
+              <a:gd name="adj" fmla="val 4274"/>
+            </a:avLst>
+          </a:prstGeom>
+          <a:solidFill>
+            <a:schemeClr val="bg1"/>
+          </a:solidFill>
+          <a:ln w="9525">
+            <a:solidFill>
+              <a:srgbClr val="D2DDD5"/>
+            </a:solidFill>
+            <a:prstDash val="solid"/>
+          </a:ln>
+        </p:spPr>
+      </p:sp>
+      <p:sp>
+        <p:nvSpPr>
+          <p:cNvPr id="9" name="Velg et demokort ikonring"/>
+          <p:cNvSpPr/>
+          <p:nvPr/>
+        </p:nvSpPr>
+        <p:spPr>
+          <a:xfrm>
+            <a:off x="3664458" y="1737360"/>
+            <a:ext cx="640080" cy="640080"/>
+          </a:xfrm>
+          <a:prstGeom prst="ellipse">
+            <a:avLst/>
+          </a:prstGeom>
+          <a:solidFill>
+            <a:schemeClr val="accent1"/>
+          </a:solidFill>
+          <a:ln/>
+        </p:spPr>
+      </p:sp>
+      <p:pic>
+        <p:nvPicPr>
+          <p:cNvPr id="10" name="Velg et demokort ikon" descr="Velg et demokort">    </p:cNvPr>
+          <p:cNvPicPr>
+            <a:picLocks noChangeAspect="1"/>
+          </p:cNvPicPr>
+          <p:nvPr/>
+        </p:nvPicPr>
+        <p:blipFill>
+          <a:blip r:embed="rId2"/>
+          <a:stretch>
+            <a:fillRect/>
+          </a:stretch>
+        </p:blipFill>
+        <p:spPr>
+          <a:xfrm>
+            <a:off x="3801618" y="1874520"/>
+            <a:ext cx="365760" cy="365760"/>
+          </a:xfrm>
+          <a:prstGeom prst="rect">
+            <a:avLst/>
+          </a:prstGeom>
+        </p:spPr>
+      </p:pic>
+      <p:sp>
+        <p:nvSpPr>
+          <p:cNvPr id="11" name="Text 7"/>
+          <p:cNvSpPr txBox="1"/>
+          <p:nvPr/>
+        </p:nvSpPr>
+        <p:spPr>
+          <a:xfrm>
+            <a:off x="3664458" y="2514600"/>
+            <a:ext cx="2018538" cy="594360"/>
+          </a:xfrm>
+          <a:prstGeom prst="rect">
+            <a:avLst/>
+          </a:prstGeom>
+          <a:noFill/>
+          <a:ln/>
+        </p:spPr>
+        <p:txBody>
+          <a:bodyPr wrap="square" lIns="0" tIns="0" rIns="0" bIns="0" rtlCol="0" anchor="t"/>
+          <a:lstStyle/>
+          <a:p>
+            <a:pPr indent="0" marL="0">
+              <a:buNone/>
+            </a:pPr>
+            <a:r>
+              <a:rPr lang="en-US" sz="1700" b="1" dirty="0">
+                <a:solidFill>
+                  <a:schemeClr val="tx2"/>
+                </a:solidFill>
+              </a:rPr>
+              <a:t>Velg et demokort</a:t>
+            </a:r>
+            <a:endParaRPr lang="en-US" sz="1700" dirty="0"/>
+          </a:p>
+        </p:txBody>
+      </p:sp>
+      <p:sp>
+        <p:nvSpPr>
+          <p:cNvPr id="12" name="Text 8"/>
+          <p:cNvSpPr txBox="1"/>
+          <p:nvPr/>
+        </p:nvSpPr>
+        <p:spPr>
+          <a:xfrm>
+            <a:off x="3664458" y="3154680"/>
+            <a:ext cx="2018538" cy="1097280"/>
+          </a:xfrm>
+          <a:prstGeom prst="rect">
+            <a:avLst/>
+          </a:prstGeom>
+          <a:noFill/>
+          <a:ln/>
+        </p:spPr>
+        <p:txBody>
+          <a:bodyPr wrap="square" lIns="0" tIns="0" rIns="0" bIns="0" rtlCol="0" anchor="t"/>
+          <a:lstStyle/>
+          <a:p>
+            <a:pPr indent="0" marL="0">
+              <a:buNone/>
+            </a:pPr>
+            <a:r>
+              <a:rPr lang="en-US" sz="1400" dirty="0">
+                <a:solidFill>
+                  <a:schemeClr val="tx1"/>
+                </a:solidFill>
+              </a:rPr>
+              <a:t>Lege, sykepleier, ambulansearbeider eller IT. Alle kort har PIN 1234. Tre feil PIN sperrer kortet.</a:t>
+            </a:r>
+            <a:endParaRPr lang="en-US" sz="1400" dirty="0"/>
+          </a:p>
+        </p:txBody>
+      </p:sp>
+      <p:sp>
+        <p:nvSpPr>
+          <p:cNvPr id="13" name="Prøv journalassistenten kort"/>
+          <p:cNvSpPr/>
+          <p:nvPr/>
+        </p:nvSpPr>
+        <p:spPr>
+          <a:xfrm>
+            <a:off x="6231636" y="1463040"/>
+            <a:ext cx="2567178" cy="2926080"/>
+          </a:xfrm>
+          <a:prstGeom prst="roundRect">
+            <a:avLst>
+              <a:gd name="adj" fmla="val 4274"/>
+            </a:avLst>
+          </a:prstGeom>
+          <a:solidFill>
+            <a:schemeClr val="bg1"/>
+          </a:solidFill>
+          <a:ln w="9525">
+            <a:solidFill>
+              <a:srgbClr val="D2DDD5"/>
+            </a:solidFill>
+            <a:prstDash val="solid"/>
+          </a:ln>
+        </p:spPr>
+      </p:sp>
+      <p:sp>
+        <p:nvSpPr>
+          <p:cNvPr id="14" name="Prøv journalassistenten ikonring"/>
+          <p:cNvSpPr/>
+          <p:nvPr/>
+        </p:nvSpPr>
+        <p:spPr>
+          <a:xfrm>
+            <a:off x="6505956" y="1737360"/>
+            <a:ext cx="640080" cy="640080"/>
+          </a:xfrm>
+          <a:prstGeom prst="ellipse">
+            <a:avLst/>
+          </a:prstGeom>
+          <a:solidFill>
+            <a:schemeClr val="accent1"/>
+          </a:solidFill>
+          <a:ln/>
+        </p:spPr>
+      </p:sp>
+      <p:pic>
+        <p:nvPicPr>
+          <p:cNvPr id="15" name="Prøv journalassistenten ikon" descr="Prøv journalassistenten">    </p:cNvPr>
+          <p:cNvPicPr>
+            <a:picLocks noChangeAspect="1"/>
+          </p:cNvPicPr>
+          <p:nvPr/>
+        </p:nvPicPr>
+        <p:blipFill>
+          <a:blip r:embed="rId3"/>
+          <a:stretch>
+            <a:fillRect/>
+          </a:stretch>
+        </p:blipFill>
+        <p:spPr>
+          <a:xfrm>
+            <a:off x="6643116" y="1874520"/>
+            <a:ext cx="365760" cy="365760"/>
+          </a:xfrm>
+          <a:prstGeom prst="rect">
+            <a:avLst/>
+          </a:prstGeom>
+        </p:spPr>
+      </p:pic>
+      <p:sp>
+        <p:nvSpPr>
+          <p:cNvPr id="16" name="Text 11"/>
+          <p:cNvSpPr txBox="1"/>
+          <p:nvPr/>
+        </p:nvSpPr>
+        <p:spPr>
+          <a:xfrm>
+            <a:off x="6505956" y="2514600"/>
+            <a:ext cx="2018538" cy="594360"/>
+          </a:xfrm>
+          <a:prstGeom prst="rect">
+            <a:avLst/>
+          </a:prstGeom>
+          <a:noFill/>
+          <a:ln/>
+        </p:spPr>
+        <p:txBody>
+          <a:bodyPr wrap="square" lIns="0" tIns="0" rIns="0" bIns="0" rtlCol="0" anchor="t"/>
+          <a:lstStyle/>
+          <a:p>
+            <a:pPr indent="0" marL="0">
+              <a:buNone/>
+            </a:pPr>
+            <a:r>
+              <a:rPr lang="en-US" sz="1700" b="1" dirty="0">
+                <a:solidFill>
+                  <a:schemeClr val="tx2"/>
+                </a:solidFill>
+              </a:rPr>
+              <a:t>Prøv journalassistenten</a:t>
+            </a:r>
+            <a:endParaRPr lang="en-US" sz="1700" dirty="0"/>
+          </a:p>
+        </p:txBody>
+      </p:sp>
+      <p:sp>
+        <p:nvSpPr>
+          <p:cNvPr id="17" name="Text 12"/>
+          <p:cNvSpPr txBox="1"/>
+          <p:nvPr/>
+        </p:nvSpPr>
+        <p:spPr>
+          <a:xfrm>
+            <a:off x="6505956" y="3154680"/>
+            <a:ext cx="2018538" cy="1097280"/>
+          </a:xfrm>
+          <a:prstGeom prst="rect">
+            <a:avLst/>
+          </a:prstGeom>
+          <a:noFill/>
+          <a:ln/>
+        </p:spPr>
+        <p:txBody>
+          <a:bodyPr wrap="square" lIns="0" tIns="0" rIns="0" bIns="0" rtlCol="0" anchor="t"/>
+          <a:lstStyle/>
+          <a:p>
+            <a:pPr indent="0" marL="0">
+              <a:buNone/>
+            </a:pPr>
+            <a:r>
+              <a:rPr lang="en-US" sz="1400" dirty="0">
+                <a:solidFill>
+                  <a:schemeClr val="tx1"/>
+                </a:solidFill>
+              </a:rPr>
+              <a:t>«Bruk eksempelsamtale», så «Lag journalnotat», og se kildesjekken.</a:t>
+            </a:r>
+            <a:endParaRPr lang="en-US" sz="1400" dirty="0"/>
+          </a:p>
+        </p:txBody>
+      </p:sp>
+      <p:sp>
+        <p:nvSpPr>
+          <p:cNvPr id="18" name="Norsk eller English kort"/>
+          <p:cNvSpPr/>
+          <p:nvPr/>
+        </p:nvSpPr>
+        <p:spPr>
+          <a:xfrm>
+            <a:off x="9073134" y="1463040"/>
+            <a:ext cx="2567178" cy="2926080"/>
+          </a:xfrm>
+          <a:prstGeom prst="roundRect">
+            <a:avLst>
+              <a:gd name="adj" fmla="val 4274"/>
+            </a:avLst>
+          </a:prstGeom>
+          <a:solidFill>
+            <a:schemeClr val="bg1"/>
+          </a:solidFill>
+          <a:ln w="9525">
+            <a:solidFill>
+              <a:srgbClr val="D2DDD5"/>
+            </a:solidFill>
+            <a:prstDash val="solid"/>
+          </a:ln>
+        </p:spPr>
+      </p:sp>
+      <p:sp>
+        <p:nvSpPr>
+          <p:cNvPr id="19" name="Norsk eller English ikonring"/>
+          <p:cNvSpPr/>
+          <p:nvPr/>
+        </p:nvSpPr>
+        <p:spPr>
+          <a:xfrm>
+            <a:off x="9347454" y="1737360"/>
+            <a:ext cx="640080" cy="640080"/>
+          </a:xfrm>
+          <a:prstGeom prst="ellipse">
+            <a:avLst/>
+          </a:prstGeom>
+          <a:solidFill>
+            <a:schemeClr val="accent1"/>
+          </a:solidFill>
+          <a:ln/>
+        </p:spPr>
+      </p:sp>
+      <p:pic>
+        <p:nvPicPr>
+          <p:cNvPr id="20" name="Norsk eller English ikon" descr="Norsk eller English">    </p:cNvPr>
+          <p:cNvPicPr>
+            <a:picLocks noChangeAspect="1"/>
+          </p:cNvPicPr>
+          <p:nvPr/>
+        </p:nvPicPr>
+        <p:blipFill>
+          <a:blip r:embed="rId4"/>
+          <a:stretch>
+            <a:fillRect/>
+          </a:stretch>
+        </p:blipFill>
+        <p:spPr>
+          <a:xfrm>
+            <a:off x="9484614" y="1874520"/>
+            <a:ext cx="365760" cy="365760"/>
+          </a:xfrm>
+          <a:prstGeom prst="rect">
+            <a:avLst/>
+          </a:prstGeom>
+        </p:spPr>
+      </p:pic>
+      <p:sp>
+        <p:nvSpPr>
+          <p:cNvPr id="21" name="Text 15"/>
+          <p:cNvSpPr txBox="1"/>
+          <p:nvPr/>
+        </p:nvSpPr>
+        <p:spPr>
+          <a:xfrm>
+            <a:off x="9347454" y="2514600"/>
+            <a:ext cx="2018538" cy="594360"/>
+          </a:xfrm>
+          <a:prstGeom prst="rect">
+            <a:avLst/>
+          </a:prstGeom>
+          <a:noFill/>
+          <a:ln/>
+        </p:spPr>
+        <p:txBody>
+          <a:bodyPr wrap="square" lIns="0" tIns="0" rIns="0" bIns="0" rtlCol="0" anchor="t"/>
+          <a:lstStyle/>
+          <a:p>
+            <a:pPr indent="0" marL="0">
+              <a:buNone/>
+            </a:pPr>
+            <a:r>
+              <a:rPr lang="en-US" sz="1700" b="1" dirty="0">
+                <a:solidFill>
+                  <a:schemeClr val="tx2"/>
+                </a:solidFill>
+              </a:rPr>
+              <a:t>Norsk eller English</a:t>
+            </a:r>
+            <a:endParaRPr lang="en-US" sz="1700" dirty="0"/>
+          </a:p>
+        </p:txBody>
+      </p:sp>
+      <p:sp>
+        <p:nvSpPr>
+          <p:cNvPr id="22" name="Text 16"/>
+          <p:cNvSpPr txBox="1"/>
+          <p:nvPr/>
+        </p:nvSpPr>
+        <p:spPr>
+          <a:xfrm>
+            <a:off x="9347454" y="3154680"/>
+            <a:ext cx="2018538" cy="1097280"/>
+          </a:xfrm>
+          <a:prstGeom prst="rect">
+            <a:avLst/>
+          </a:prstGeom>
+          <a:noFill/>
+          <a:ln/>
+        </p:spPr>
+        <p:txBody>
+          <a:bodyPr wrap="square" lIns="0" tIns="0" rIns="0" bIns="0" rtlCol="0" anchor="t"/>
+          <a:lstStyle/>
+          <a:p>
+            <a:pPr indent="0" marL="0">
+              <a:buNone/>
+            </a:pPr>
+            <a:r>
+              <a:rPr lang="en-US" sz="1400" dirty="0">
+                <a:solidFill>
+                  <a:schemeClr val="tx1"/>
+                </a:solidFill>
+              </a:rPr>
+              <a:t>Knappen øverst til høyre bytter språk på alle sider.</a:t>
+            </a:r>
+            <a:endParaRPr lang="en-US" sz="1400" dirty="0"/>
+          </a:p>
+        </p:txBody>
+      </p:sp>
+      <p:sp>
+        <p:nvSpPr>
+          <p:cNvPr id="23" name="Text 17"/>
+          <p:cNvSpPr txBox="1"/>
+          <p:nvPr/>
+        </p:nvSpPr>
+        <p:spPr>
+          <a:xfrm>
+            <a:off x="548640" y="5120640"/>
+            <a:ext cx="11064240" cy="548640"/>
+          </a:xfrm>
+          <a:prstGeom prst="rect">
+            <a:avLst/>
+          </a:prstGeom>
+          <a:noFill/>
+          <a:ln/>
+        </p:spPr>
+        <p:txBody>
+          <a:bodyPr wrap="square" rtlCol="0" anchor="ctr"/>
+          <a:lstStyle/>
+          <a:p>
+            <a:pPr indent="0" marL="0">
+              <a:buNone/>
+            </a:pPr>
+            <a:r>
+              <a:rPr lang="en-US" sz="1500" i="1" dirty="0">
+                <a:solidFill>
+                  <a:schemeClr val="accent6"/>
+                </a:solidFill>
+              </a:rPr>
+              <a:t>Bare syntetiske data. Nettdemoen viser Medicus-appene; innloggingsskjermen, skjermlåsen og tømming av hjemmemappen finnes i selve Medicus OS. Lenken er midlertidig.</a:t>
+            </a:r>
+            <a:endParaRPr lang="en-US" sz="1500" dirty="0"/>
+          </a:p>
+        </p:txBody>
+      </p:sp>
+      <p:sp>
+        <p:nvSpPr>
+          <p:cNvPr id="25" name="Slide Number Placeholder 0"/>
+          <p:cNvSpPr>
+            <a:spLocks noGrp="1"/>
+          </p:cNvSpPr>
+          <p:nvPr>
+            <p:ph type="sldNum" sz="quarter" idx="4294967295"/>
+          </p:nvPr>
+        </p:nvSpPr>
+        <p:spPr>
+          <a:xfrm>
+            <a:off x="11247120" y="6400800"/>
+            <a:ext cx="457200" cy="274320"/>
+          </a:xfrm>
+          <a:prstGeom prst="rect">
+            <a:avLst/>
+          </a:prstGeom>
+          <a:extLst>
+            <a:ext uri="{C572A759-6A51-4108-AA02-DFA0A04FC94B}">
+              <ma14:wrappingTextBoxFlag xmlns:ma14="http://schemas.microsoft.com/office/mac/drawingml/2011/main" val="0"/>
+            </a:ext>
+          </a:extLst>
+        </p:spPr>
+        <p:txBody>
+          <a:bodyPr/>
+          <a:lstStyle>
+            <a:lvl1pPr>
+              <a:defRPr sz="1000">
+                <a:solidFill>
+                  <a:schemeClr val="accent6"/>
+                </a:solidFill>
+              </a:defRPr>
+            </a:lvl1pPr>
+          </a:lstStyle>
+          <a:p>
+            <a:pPr algn="r"/>
+            <a:fld id="{F7021451-1387-4CA6-816F-3879F97B5CBC}" type="slidenum">
+              <a:rPr b="0" lang="en-US"/>
+              <a:t>32</a:t>
+            </a:fld>
+            <a:endParaRPr lang="en-US"/>
+          </a:p>
+        </p:txBody>
+      </p:sp>
+    </p:spTree>
+  </p:cSld>
+  <p:clrMapOvr>
+    <a:masterClrMapping/>
+  </p:clrMapOvr>
+</p:sld>
+</file>
+
+<file path=ppt/slides/slide33.xml><?xml version="1.0" encoding="utf-8"?>
+<p:sld xmlns:a="http://schemas.openxmlformats.org/drawingml/2006/main" xmlns:r="http://schemas.openxmlformats.org/officeDocument/2006/relationships" xmlns:p="http://schemas.openxmlformats.org/presentationml/2006/main">
+  <p:cSld name="Slide 33">
+    <p:spTree>
+      <p:nvGrpSpPr>
+        <p:cNvPr id="1" name=""/>
+        <p:cNvGrpSpPr/>
+        <p:nvPr/>
+      </p:nvGrpSpPr>
+      <p:grpSpPr>
+        <a:xfrm>
+          <a:off x="0" y="0"/>
+          <a:ext cx="0" cy="0"/>
+          <a:chOff x="0" y="0"/>
+          <a:chExt cx="0" cy="0"/>
+        </a:xfrm>
+      </p:grpSpPr>
+      <p:sp>
+        <p:nvSpPr>
+          <p:cNvPr id="2" name="Text 0"/>
+          <p:cNvSpPr/>
+          <p:nvPr>
+            <p:ph idx="100" type="title" hasCustomPrompt="1"/>
+          </p:nvPr>
+        </p:nvSpPr>
+        <p:spPr>
+          <a:xfrm>
+            <a:off x="548640" y="365760"/>
+            <a:ext cx="11064240" cy="731520"/>
+          </a:xfrm>
+          <a:prstGeom prst="rect">
+            <a:avLst/>
+          </a:prstGeom>
+          <a:noFill/>
+          <a:ln/>
+        </p:spPr>
+        <p:txBody>
+          <a:bodyPr wrap="square" rtlCol="0"/>
+          <a:lstStyle/>
+          <a:p>
+            <a:pPr algn="l" indent="0" marL="0">
+              <a:buNone/>
+            </a:pPr>
+            <a:r>
+              <a:rPr lang="en-US" sz="3200" b="1" dirty="0">
+                <a:solidFill>
+                  <a:schemeClr val="tx2"/>
+                </a:solidFill>
+              </a:rPr>
+              <a:t>En første pilot, uten risiko</a:t>
+            </a:r>
+            <a:endParaRPr lang="en-US" sz="3200" dirty="0"/>
+          </a:p>
+        </p:txBody>
+      </p:sp>
+      <p:sp>
+        <p:nvSpPr>
+          <p:cNvPr id="3" name="Avtaler først kort"/>
+          <p:cNvSpPr/>
+          <p:nvPr/>
+        </p:nvSpPr>
+        <p:spPr>
+          <a:xfrm>
+            <a:off x="548640" y="1463040"/>
+            <a:ext cx="2567178" cy="2926080"/>
+          </a:xfrm>
+          <a:prstGeom prst="roundRect">
+            <a:avLst>
+              <a:gd name="adj" fmla="val 4274"/>
+            </a:avLst>
+          </a:prstGeom>
+          <a:solidFill>
+            <a:schemeClr val="bg1"/>
+          </a:solidFill>
+          <a:ln w="9525">
+            <a:solidFill>
+              <a:srgbClr val="D2DDD5"/>
+            </a:solidFill>
+            <a:prstDash val="solid"/>
+          </a:ln>
+        </p:spPr>
+      </p:sp>
+      <p:sp>
+        <p:nvSpPr>
+          <p:cNvPr id="4" name="Avtaler først ikonring"/>
+          <p:cNvSpPr/>
+          <p:nvPr/>
+        </p:nvSpPr>
+        <p:spPr>
+          <a:xfrm>
+            <a:off x="822960" y="1737360"/>
+            <a:ext cx="640080" cy="640080"/>
+          </a:xfrm>
+          <a:prstGeom prst="ellipse">
+            <a:avLst/>
+          </a:prstGeom>
+          <a:solidFill>
+            <a:schemeClr val="accent1"/>
+          </a:solidFill>
+          <a:ln/>
+        </p:spPr>
+      </p:sp>
+      <p:pic>
+        <p:nvPicPr>
+          <p:cNvPr id="5" name="Avtaler først ikon" descr="Avtaler først">    </p:cNvPr>
+          <p:cNvPicPr>
+            <a:picLocks noChangeAspect="1"/>
+          </p:cNvPicPr>
+          <p:nvPr/>
+        </p:nvPicPr>
+        <p:blipFill>
+          <a:blip r:embed="rId1"/>
+          <a:stretch>
+            <a:fillRect/>
+          </a:stretch>
+        </p:blipFill>
+        <p:spPr>
+          <a:xfrm>
+            <a:off x="960120" y="1874520"/>
+            <a:ext cx="365760" cy="365760"/>
+          </a:xfrm>
+          <a:prstGeom prst="rect">
+            <a:avLst/>
+          </a:prstGeom>
+        </p:spPr>
+      </p:pic>
+      <p:sp>
+        <p:nvSpPr>
+          <p:cNvPr id="6" name="Text 3"/>
+          <p:cNvSpPr txBox="1"/>
+          <p:nvPr/>
+        </p:nvSpPr>
+        <p:spPr>
+          <a:xfrm>
+            <a:off x="822960" y="2514600"/>
+            <a:ext cx="2018538" cy="594360"/>
+          </a:xfrm>
+          <a:prstGeom prst="rect">
+            <a:avLst/>
+          </a:prstGeom>
+          <a:noFill/>
+          <a:ln/>
+        </p:spPr>
+        <p:txBody>
+          <a:bodyPr wrap="square" lIns="0" tIns="0" rIns="0" bIns="0" rtlCol="0" anchor="t"/>
+          <a:lstStyle/>
+          <a:p>
+            <a:pPr indent="0" marL="0">
+              <a:buNone/>
+            </a:pPr>
+            <a:r>
+              <a:rPr lang="en-US" sz="1700" b="1" dirty="0">
+                <a:solidFill>
+                  <a:schemeClr val="tx2"/>
+                </a:solidFill>
+              </a:rPr>
+              <a:t>Avtaler først</a:t>
+            </a:r>
+            <a:endParaRPr lang="en-US" sz="1700" dirty="0"/>
+          </a:p>
+        </p:txBody>
+      </p:sp>
+      <p:sp>
+        <p:nvSpPr>
+          <p:cNvPr id="7" name="Text 4"/>
+          <p:cNvSpPr txBox="1"/>
+          <p:nvPr/>
+        </p:nvSpPr>
+        <p:spPr>
+          <a:xfrm>
+            <a:off x="822960" y="3154680"/>
+            <a:ext cx="2018538" cy="1097280"/>
+          </a:xfrm>
+          <a:prstGeom prst="rect">
+            <a:avLst/>
+          </a:prstGeom>
+          <a:noFill/>
+          <a:ln/>
+        </p:spPr>
+        <p:txBody>
+          <a:bodyPr wrap="square" lIns="0" tIns="0" rIns="0" bIns="0" rtlCol="0" anchor="t"/>
+          <a:lstStyle/>
+          <a:p>
+            <a:pPr indent="0" marL="0">
+              <a:buNone/>
+            </a:pPr>
+            <a:r>
+              <a:rPr lang="en-US" sz="1400" dirty="0">
+                <a:solidFill>
+                  <a:schemeClr val="tx1"/>
+                </a:solidFill>
+              </a:rPr>
+              <a:t>DPIA, risikovurdering etter Normen, MDR-vurdering og samtaler med tillitsvalgte.</a:t>
+            </a:r>
+            <a:endParaRPr lang="en-US" sz="1400" dirty="0"/>
+          </a:p>
+        </p:txBody>
+      </p:sp>
+      <p:sp>
+        <p:nvSpPr>
+          <p:cNvPr id="8" name="Ved siden av dagens PC-er kort"/>
+          <p:cNvSpPr/>
+          <p:nvPr/>
+        </p:nvSpPr>
+        <p:spPr>
+          <a:xfrm>
+            <a:off x="3390138" y="1463040"/>
+            <a:ext cx="2567178" cy="2926080"/>
+          </a:xfrm>
+          <a:prstGeom prst="roundRect">
+            <a:avLst>
+              <a:gd name="adj" fmla="val 4274"/>
+            </a:avLst>
+          </a:prstGeom>
+          <a:solidFill>
+            <a:schemeClr val="bg1"/>
+          </a:solidFill>
+          <a:ln w="9525">
+            <a:solidFill>
+              <a:srgbClr val="D2DDD5"/>
+            </a:solidFill>
+            <a:prstDash val="solid"/>
+          </a:ln>
+        </p:spPr>
+      </p:sp>
+      <p:sp>
+        <p:nvSpPr>
+          <p:cNvPr id="9" name="Ved siden av dagens PC-er ikonring"/>
+          <p:cNvSpPr/>
+          <p:nvPr/>
+        </p:nvSpPr>
+        <p:spPr>
+          <a:xfrm>
+            <a:off x="3664458" y="1737360"/>
+            <a:ext cx="640080" cy="640080"/>
+          </a:xfrm>
+          <a:prstGeom prst="ellipse">
+            <a:avLst/>
+          </a:prstGeom>
+          <a:solidFill>
+            <a:schemeClr val="accent1"/>
+          </a:solidFill>
+          <a:ln/>
+        </p:spPr>
+      </p:sp>
+      <p:pic>
+        <p:nvPicPr>
+          <p:cNvPr id="10" name="Ved siden av dagens PC-er ikon" descr="Ved siden av dagens PC-er">    </p:cNvPr>
+          <p:cNvPicPr>
+            <a:picLocks noChangeAspect="1"/>
+          </p:cNvPicPr>
+          <p:nvPr/>
+        </p:nvPicPr>
+        <p:blipFill>
+          <a:blip r:embed="rId2"/>
+          <a:stretch>
+            <a:fillRect/>
+          </a:stretch>
+        </p:blipFill>
+        <p:spPr>
+          <a:xfrm>
+            <a:off x="3801618" y="1874520"/>
+            <a:ext cx="365760" cy="365760"/>
+          </a:xfrm>
+          <a:prstGeom prst="rect">
+            <a:avLst/>
+          </a:prstGeom>
+        </p:spPr>
+      </p:pic>
+      <p:sp>
+        <p:nvSpPr>
+          <p:cNvPr id="11" name="Text 7"/>
+          <p:cNvSpPr txBox="1"/>
+          <p:nvPr/>
+        </p:nvSpPr>
+        <p:spPr>
+          <a:xfrm>
+            <a:off x="3664458" y="2514600"/>
+            <a:ext cx="2018538" cy="594360"/>
+          </a:xfrm>
+          <a:prstGeom prst="rect">
+            <a:avLst/>
+          </a:prstGeom>
+          <a:noFill/>
+          <a:ln/>
+        </p:spPr>
+        <p:txBody>
+          <a:bodyPr wrap="square" lIns="0" tIns="0" rIns="0" bIns="0" rtlCol="0" anchor="t"/>
+          <a:lstStyle/>
+          <a:p>
+            <a:pPr indent="0" marL="0">
+              <a:buNone/>
+            </a:pPr>
+            <a:r>
+              <a:rPr lang="en-US" sz="1700" b="1" dirty="0">
+                <a:solidFill>
+                  <a:schemeClr val="tx2"/>
+                </a:solidFill>
+              </a:rPr>
+              <a:t>Ved siden av dagens PC-er</a:t>
+            </a:r>
+            <a:endParaRPr lang="en-US" sz="1700" dirty="0"/>
+          </a:p>
+        </p:txBody>
+      </p:sp>
+      <p:sp>
+        <p:nvSpPr>
+          <p:cNvPr id="12" name="Text 8"/>
+          <p:cNvSpPr txBox="1"/>
+          <p:nvPr/>
+        </p:nvSpPr>
+        <p:spPr>
+          <a:xfrm>
+            <a:off x="3664458" y="3154680"/>
+            <a:ext cx="2018538" cy="1097280"/>
+          </a:xfrm>
+          <a:prstGeom prst="rect">
+            <a:avLst/>
+          </a:prstGeom>
+          <a:noFill/>
+          <a:ln/>
+        </p:spPr>
+        <p:txBody>
+          <a:bodyPr wrap="square" lIns="0" tIns="0" rIns="0" bIns="0" rtlCol="0" anchor="t"/>
+          <a:lstStyle/>
+          <a:p>
+            <a:pPr indent="0" marL="0">
+              <a:buNone/>
+            </a:pPr>
+            <a:r>
+              <a:rPr lang="en-US" sz="1400" dirty="0">
+                <a:solidFill>
+                  <a:schemeClr val="tx1"/>
+                </a:solidFill>
+              </a:rPr>
+              <a:t>2–3 Medicus-PC-er på én enhet. De gamle PC-ene står, og enheten kan stoppe samme dag.</a:t>
+            </a:r>
+            <a:endParaRPr lang="en-US" sz="1400" dirty="0"/>
+          </a:p>
+        </p:txBody>
+      </p:sp>
+      <p:sp>
+        <p:nvSpPr>
+          <p:cNvPr id="13" name="Sjekk etter uke 4 kort"/>
+          <p:cNvSpPr/>
+          <p:nvPr/>
+        </p:nvSpPr>
+        <p:spPr>
+          <a:xfrm>
+            <a:off x="6231636" y="1463040"/>
+            <a:ext cx="2567178" cy="2926080"/>
+          </a:xfrm>
+          <a:prstGeom prst="roundRect">
+            <a:avLst>
+              <a:gd name="adj" fmla="val 4274"/>
+            </a:avLst>
+          </a:prstGeom>
+          <a:solidFill>
+            <a:schemeClr val="bg1"/>
+          </a:solidFill>
+          <a:ln w="9525">
+            <a:solidFill>
+              <a:srgbClr val="D2DDD5"/>
+            </a:solidFill>
+            <a:prstDash val="solid"/>
+          </a:ln>
+        </p:spPr>
+      </p:sp>
+      <p:sp>
+        <p:nvSpPr>
+          <p:cNvPr id="14" name="Sjekk etter uke 4 ikonring"/>
+          <p:cNvSpPr/>
+          <p:nvPr/>
+        </p:nvSpPr>
+        <p:spPr>
+          <a:xfrm>
+            <a:off x="6505956" y="1737360"/>
+            <a:ext cx="640080" cy="640080"/>
+          </a:xfrm>
+          <a:prstGeom prst="ellipse">
+            <a:avLst/>
+          </a:prstGeom>
+          <a:solidFill>
+            <a:schemeClr val="accent1"/>
+          </a:solidFill>
+          <a:ln/>
+        </p:spPr>
+      </p:sp>
+      <p:pic>
+        <p:nvPicPr>
+          <p:cNvPr id="15" name="Sjekk etter uke 4 ikon" descr="Sjekk etter uke 4">    </p:cNvPr>
+          <p:cNvPicPr>
+            <a:picLocks noChangeAspect="1"/>
+          </p:cNvPicPr>
+          <p:nvPr/>
+        </p:nvPicPr>
+        <p:blipFill>
+          <a:blip r:embed="rId3"/>
+          <a:stretch>
+            <a:fillRect/>
+          </a:stretch>
+        </p:blipFill>
+        <p:spPr>
+          <a:xfrm>
+            <a:off x="6643116" y="1874520"/>
+            <a:ext cx="365760" cy="365760"/>
+          </a:xfrm>
+          <a:prstGeom prst="rect">
+            <a:avLst/>
+          </a:prstGeom>
+        </p:spPr>
+      </p:pic>
+      <p:sp>
+        <p:nvSpPr>
+          <p:cNvPr id="16" name="Text 11"/>
+          <p:cNvSpPr txBox="1"/>
+          <p:nvPr/>
+        </p:nvSpPr>
+        <p:spPr>
+          <a:xfrm>
+            <a:off x="6505956" y="2514600"/>
+            <a:ext cx="2018538" cy="594360"/>
+          </a:xfrm>
+          <a:prstGeom prst="rect">
+            <a:avLst/>
+          </a:prstGeom>
+          <a:noFill/>
+          <a:ln/>
+        </p:spPr>
+        <p:txBody>
+          <a:bodyPr wrap="square" lIns="0" tIns="0" rIns="0" bIns="0" rtlCol="0" anchor="t"/>
+          <a:lstStyle/>
+          <a:p>
+            <a:pPr indent="0" marL="0">
+              <a:buNone/>
+            </a:pPr>
+            <a:r>
+              <a:rPr lang="en-US" sz="1700" b="1" dirty="0">
+                <a:solidFill>
+                  <a:schemeClr val="tx2"/>
+                </a:solidFill>
+              </a:rPr>
+              <a:t>Sjekk etter uke 4</a:t>
+            </a:r>
+            <a:endParaRPr lang="en-US" sz="1700" dirty="0"/>
+          </a:p>
+        </p:txBody>
+      </p:sp>
+      <p:sp>
+        <p:nvSpPr>
+          <p:cNvPr id="17" name="Text 12"/>
+          <p:cNvSpPr txBox="1"/>
+          <p:nvPr/>
+        </p:nvSpPr>
+        <p:spPr>
+          <a:xfrm>
+            <a:off x="6505956" y="3154680"/>
+            <a:ext cx="2018538" cy="1097280"/>
+          </a:xfrm>
+          <a:prstGeom prst="rect">
+            <a:avLst/>
+          </a:prstGeom>
+          <a:noFill/>
+          <a:ln/>
+        </p:spPr>
+        <p:txBody>
+          <a:bodyPr wrap="square" lIns="0" tIns="0" rIns="0" bIns="0" rtlCol="0" anchor="t"/>
+          <a:lstStyle/>
+          <a:p>
+            <a:pPr indent="0" marL="0">
+              <a:buNone/>
+            </a:pPr>
+            <a:r>
+              <a:rPr lang="en-US" sz="1400" dirty="0">
+                <a:solidFill>
+                  <a:schemeClr val="tx1"/>
+                </a:solidFill>
+              </a:rPr>
+              <a:t>Enheten, IT og tillitsvalgte bestemmer: fortsett, endre eller stopp.</a:t>
+            </a:r>
+            <a:endParaRPr lang="en-US" sz="1400" dirty="0"/>
+          </a:p>
+        </p:txBody>
+      </p:sp>
+      <p:sp>
+        <p:nvSpPr>
+          <p:cNvPr id="18" name="Mål, så bestem kort"/>
+          <p:cNvSpPr/>
+          <p:nvPr/>
+        </p:nvSpPr>
+        <p:spPr>
+          <a:xfrm>
+            <a:off x="9073134" y="1463040"/>
+            <a:ext cx="2567178" cy="2926080"/>
+          </a:xfrm>
+          <a:prstGeom prst="roundRect">
+            <a:avLst>
+              <a:gd name="adj" fmla="val 4274"/>
+            </a:avLst>
+          </a:prstGeom>
+          <a:solidFill>
+            <a:schemeClr val="bg1"/>
+          </a:solidFill>
+          <a:ln w="9525">
+            <a:solidFill>
+              <a:srgbClr val="D2DDD5"/>
+            </a:solidFill>
+            <a:prstDash val="solid"/>
+          </a:ln>
+        </p:spPr>
+      </p:sp>
+      <p:sp>
+        <p:nvSpPr>
+          <p:cNvPr id="19" name="Mål, så bestem ikonring"/>
+          <p:cNvSpPr/>
+          <p:nvPr/>
+        </p:nvSpPr>
+        <p:spPr>
+          <a:xfrm>
+            <a:off x="9347454" y="1737360"/>
+            <a:ext cx="640080" cy="640080"/>
+          </a:xfrm>
+          <a:prstGeom prst="ellipse">
+            <a:avLst/>
+          </a:prstGeom>
+          <a:solidFill>
+            <a:schemeClr val="accent1"/>
+          </a:solidFill>
+          <a:ln/>
+        </p:spPr>
+      </p:sp>
+      <p:pic>
+        <p:nvPicPr>
+          <p:cNvPr id="20" name="Mål, så bestem ikon" descr="Mål, så bestem">    </p:cNvPr>
+          <p:cNvPicPr>
+            <a:picLocks noChangeAspect="1"/>
+          </p:cNvPicPr>
+          <p:nvPr/>
+        </p:nvPicPr>
+        <p:blipFill>
+          <a:blip r:embed="rId4"/>
+          <a:stretch>
+            <a:fillRect/>
+          </a:stretch>
+        </p:blipFill>
+        <p:spPr>
+          <a:xfrm>
+            <a:off x="9484614" y="1874520"/>
+            <a:ext cx="365760" cy="365760"/>
+          </a:xfrm>
+          <a:prstGeom prst="rect">
+            <a:avLst/>
+          </a:prstGeom>
+        </p:spPr>
+      </p:pic>
+      <p:sp>
+        <p:nvSpPr>
+          <p:cNvPr id="21" name="Text 15"/>
+          <p:cNvSpPr txBox="1"/>
+          <p:nvPr/>
+        </p:nvSpPr>
+        <p:spPr>
+          <a:xfrm>
+            <a:off x="9347454" y="2514600"/>
+            <a:ext cx="2018538" cy="594360"/>
+          </a:xfrm>
+          <a:prstGeom prst="rect">
+            <a:avLst/>
+          </a:prstGeom>
+          <a:noFill/>
+          <a:ln/>
+        </p:spPr>
+        <p:txBody>
+          <a:bodyPr wrap="square" lIns="0" tIns="0" rIns="0" bIns="0" rtlCol="0" anchor="t"/>
+          <a:lstStyle/>
+          <a:p>
+            <a:pPr indent="0" marL="0">
+              <a:buNone/>
+            </a:pPr>
+            <a:r>
+              <a:rPr lang="en-US" sz="1700" b="1" dirty="0">
+                <a:solidFill>
+                  <a:schemeClr val="tx2"/>
+                </a:solidFill>
+              </a:rPr>
+              <a:t>Mål, så bestem</a:t>
+            </a:r>
+            <a:endParaRPr lang="en-US" sz="1700" dirty="0"/>
+          </a:p>
+        </p:txBody>
+      </p:sp>
+      <p:sp>
+        <p:nvSpPr>
+          <p:cNvPr id="22" name="Text 16"/>
+          <p:cNvSpPr txBox="1"/>
+          <p:nvPr/>
+        </p:nvSpPr>
+        <p:spPr>
+          <a:xfrm>
+            <a:off x="9347454" y="3154680"/>
+            <a:ext cx="2018538" cy="1097280"/>
+          </a:xfrm>
+          <a:prstGeom prst="rect">
+            <a:avLst/>
+          </a:prstGeom>
+          <a:noFill/>
+          <a:ln/>
+        </p:spPr>
+        <p:txBody>
+          <a:bodyPr wrap="square" lIns="0" tIns="0" rIns="0" bIns="0" rtlCol="0" anchor="t"/>
+          <a:lstStyle/>
+          <a:p>
+            <a:pPr indent="0" marL="0">
+              <a:buNone/>
+            </a:pPr>
+            <a:r>
+              <a:rPr lang="en-US" sz="1400" dirty="0">
+                <a:solidFill>
+                  <a:schemeClr val="tx1"/>
+                </a:solidFill>
+              </a:rPr>
+              <a:t>Spart tid, feil, supportsaker og hva de ansatte sier. Så bredere – eller stopp.</a:t>
+            </a:r>
+            <a:endParaRPr lang="en-US" sz="1400" dirty="0"/>
+          </a:p>
+        </p:txBody>
+      </p:sp>
+      <p:sp>
+        <p:nvSpPr>
+          <p:cNvPr id="25" name="Slide Number Placeholder 0"/>
+          <p:cNvSpPr>
+            <a:spLocks noGrp="1"/>
+          </p:cNvSpPr>
+          <p:nvPr>
+            <p:ph type="sldNum" sz="quarter" idx="4294967295"/>
+          </p:nvPr>
+        </p:nvSpPr>
+        <p:spPr>
+          <a:xfrm>
+            <a:off x="11247120" y="6400800"/>
+            <a:ext cx="457200" cy="274320"/>
+          </a:xfrm>
+          <a:prstGeom prst="rect">
+            <a:avLst/>
+          </a:prstGeom>
+          <a:extLst>
+            <a:ext uri="{C572A759-6A51-4108-AA02-DFA0A04FC94B}">
+              <ma14:wrappingTextBoxFlag xmlns:ma14="http://schemas.microsoft.com/office/mac/drawingml/2011/main" val="0"/>
+            </a:ext>
+          </a:extLst>
+        </p:spPr>
+        <p:txBody>
+          <a:bodyPr/>
+          <a:lstStyle>
+            <a:lvl1pPr>
+              <a:defRPr sz="1000">
+                <a:solidFill>
+                  <a:schemeClr val="accent6"/>
+                </a:solidFill>
+              </a:defRPr>
+            </a:lvl1pPr>
+          </a:lstStyle>
+          <a:p>
+            <a:pPr algn="r"/>
+            <a:fld id="{F7021451-1387-4CA6-816F-3879F97B5CBC}" type="slidenum">
+              <a:rPr b="0" lang="en-US"/>
+              <a:t>33</a:t>
+            </a:fld>
+            <a:endParaRPr lang="en-US"/>
+          </a:p>
+        </p:txBody>
+      </p:sp>
+    </p:spTree>
+  </p:cSld>
+  <p:clrMapOvr>
+    <a:masterClrMapping/>
+  </p:clrMapOvr>
+</p:sld>
+</file>
+
+<file path=ppt/slides/slide34.xml><?xml version="1.0" encoding="utf-8"?>
+<p:sld xmlns:a="http://schemas.openxmlformats.org/drawingml/2006/main" xmlns:r="http://schemas.openxmlformats.org/officeDocument/2006/relationships" xmlns:p="http://schemas.openxmlformats.org/presentationml/2006/main">
+  <p:cSld name="Slide 34">
+    <p:spTree>
+      <p:nvGrpSpPr>
+        <p:cNvPr id="1" name=""/>
+        <p:cNvGrpSpPr/>
+        <p:nvPr/>
+      </p:nvGrpSpPr>
+      <p:grpSpPr>
+        <a:xfrm>
+          <a:off x="0" y="0"/>
+          <a:ext cx="0" cy="0"/>
+          <a:chOff x="0" y="0"/>
+          <a:chExt cx="0" cy="0"/>
+        </a:xfrm>
+      </p:grpSpPr>
+      <p:sp>
+        <p:nvSpPr>
+          <p:cNvPr id="2" name="Text 0"/>
+          <p:cNvSpPr/>
+          <p:nvPr>
+            <p:ph idx="100" type="title" hasCustomPrompt="1"/>
+          </p:nvPr>
+        </p:nvSpPr>
+        <p:spPr>
+          <a:xfrm>
+            <a:off x="548640" y="365760"/>
+            <a:ext cx="11064240" cy="731520"/>
+          </a:xfrm>
+          <a:prstGeom prst="rect">
+            <a:avLst/>
+          </a:prstGeom>
+          <a:noFill/>
+          <a:ln/>
+        </p:spPr>
+        <p:txBody>
+          <a:bodyPr wrap="square" rtlCol="0"/>
+          <a:lstStyle/>
+          <a:p>
+            <a:pPr algn="l" indent="0" marL="0">
+              <a:buNone/>
+            </a:pPr>
+            <a:r>
+              <a:rPr lang="en-US" sz="3200" b="1" dirty="0">
+                <a:solidFill>
+                  <a:schemeClr val="tx2"/>
+                </a:solidFill>
+              </a:rPr>
+              <a:t>Veien videre</a:t>
+            </a:r>
+            <a:endParaRPr lang="en-US" sz="3200" dirty="0"/>
+          </a:p>
+        </p:txBody>
+      </p:sp>
+      <p:sp>
+        <p:nvSpPr>
+          <p:cNvPr id="3" name="Avtale med Norsk helsenett kort"/>
+          <p:cNvSpPr/>
+          <p:nvPr/>
+        </p:nvSpPr>
+        <p:spPr>
+          <a:xfrm>
+            <a:off x="548640" y="1463040"/>
+            <a:ext cx="2567178" cy="2926080"/>
+          </a:xfrm>
+          <a:prstGeom prst="roundRect">
+            <a:avLst>
+              <a:gd name="adj" fmla="val 4274"/>
+            </a:avLst>
+          </a:prstGeom>
+          <a:solidFill>
+            <a:schemeClr val="bg1"/>
+          </a:solidFill>
+          <a:ln w="9525">
+            <a:solidFill>
+              <a:srgbClr val="D2DDD5"/>
+            </a:solidFill>
+            <a:prstDash val="solid"/>
+          </a:ln>
+        </p:spPr>
+      </p:sp>
+      <p:sp>
+        <p:nvSpPr>
+          <p:cNvPr id="4" name="Avtale med Norsk helsenett ikonring"/>
+          <p:cNvSpPr/>
+          <p:nvPr/>
+        </p:nvSpPr>
+        <p:spPr>
+          <a:xfrm>
+            <a:off x="822960" y="1737360"/>
+            <a:ext cx="640080" cy="640080"/>
+          </a:xfrm>
+          <a:prstGeom prst="ellipse">
+            <a:avLst/>
+          </a:prstGeom>
+          <a:solidFill>
+            <a:schemeClr val="accent1"/>
+          </a:solidFill>
+          <a:ln/>
+        </p:spPr>
+      </p:sp>
+      <p:pic>
+        <p:nvPicPr>
+          <p:cNvPr id="5" name="Avtale med Norsk helsenett ikon" descr="Avtale med Norsk helsenett">    </p:cNvPr>
+          <p:cNvPicPr>
+            <a:picLocks noChangeAspect="1"/>
+          </p:cNvPicPr>
+          <p:nvPr/>
+        </p:nvPicPr>
+        <p:blipFill>
+          <a:blip r:embed="rId1"/>
+          <a:stretch>
+            <a:fillRect/>
+          </a:stretch>
+        </p:blipFill>
+        <p:spPr>
+          <a:xfrm>
+            <a:off x="960120" y="1874520"/>
+            <a:ext cx="365760" cy="365760"/>
+          </a:xfrm>
+          <a:prstGeom prst="rect">
+            <a:avLst/>
+          </a:prstGeom>
+        </p:spPr>
+      </p:pic>
+      <p:sp>
+        <p:nvSpPr>
+          <p:cNvPr id="6" name="Text 3"/>
+          <p:cNvSpPr txBox="1"/>
+          <p:nvPr/>
+        </p:nvSpPr>
+        <p:spPr>
+          <a:xfrm>
+            <a:off x="822960" y="2514600"/>
+            <a:ext cx="2018538" cy="594360"/>
+          </a:xfrm>
+          <a:prstGeom prst="rect">
+            <a:avLst/>
+          </a:prstGeom>
+          <a:noFill/>
+          <a:ln/>
+        </p:spPr>
+        <p:txBody>
+          <a:bodyPr wrap="square" lIns="0" tIns="0" rIns="0" bIns="0" rtlCol="0" anchor="t"/>
+          <a:lstStyle/>
+          <a:p>
+            <a:pPr indent="0" marL="0">
+              <a:buNone/>
+            </a:pPr>
+            <a:r>
+              <a:rPr lang="en-US" sz="1700" b="1" dirty="0">
+                <a:solidFill>
+                  <a:schemeClr val="tx2"/>
+                </a:solidFill>
+              </a:rPr>
+              <a:t>Avtale med Norsk helsenett</a:t>
+            </a:r>
+            <a:endParaRPr lang="en-US" sz="1700" dirty="0"/>
+          </a:p>
+        </p:txBody>
+      </p:sp>
+      <p:sp>
+        <p:nvSpPr>
+          <p:cNvPr id="7" name="Text 4"/>
+          <p:cNvSpPr txBox="1"/>
+          <p:nvPr/>
+        </p:nvSpPr>
+        <p:spPr>
+          <a:xfrm>
+            <a:off x="822960" y="3154680"/>
+            <a:ext cx="2018538" cy="1097280"/>
+          </a:xfrm>
+          <a:prstGeom prst="rect">
+            <a:avLst/>
+          </a:prstGeom>
+          <a:noFill/>
+          <a:ln/>
+        </p:spPr>
+        <p:txBody>
+          <a:bodyPr wrap="square" lIns="0" tIns="0" rIns="0" bIns="0" rtlCol="0" anchor="t"/>
+          <a:lstStyle/>
+          <a:p>
+            <a:pPr indent="0" marL="0">
+              <a:buNone/>
+            </a:pPr>
+            <a:r>
+              <a:rPr lang="en-US" sz="1400" dirty="0">
+                <a:solidFill>
+                  <a:schemeClr val="tx1"/>
+                </a:solidFill>
+              </a:rPr>
+              <a:t>Medlemskap, HelseID og godkjenning – grensesnittet er klart.</a:t>
+            </a:r>
+            <a:endParaRPr lang="en-US" sz="1400" dirty="0"/>
+          </a:p>
+        </p:txBody>
+      </p:sp>
+      <p:sp>
+        <p:nvSpPr>
+          <p:cNvPr id="8" name="Ekte helsepersonellkort kort"/>
+          <p:cNvSpPr/>
+          <p:nvPr/>
+        </p:nvSpPr>
+        <p:spPr>
+          <a:xfrm>
+            <a:off x="3390138" y="1463040"/>
+            <a:ext cx="2567178" cy="2926080"/>
+          </a:xfrm>
+          <a:prstGeom prst="roundRect">
+            <a:avLst>
+              <a:gd name="adj" fmla="val 4274"/>
+            </a:avLst>
+          </a:prstGeom>
+          <a:solidFill>
+            <a:schemeClr val="bg1"/>
+          </a:solidFill>
+          <a:ln w="9525">
+            <a:solidFill>
+              <a:srgbClr val="D2DDD5"/>
+            </a:solidFill>
+            <a:prstDash val="solid"/>
+          </a:ln>
+        </p:spPr>
+      </p:sp>
+      <p:sp>
+        <p:nvSpPr>
+          <p:cNvPr id="9" name="Ekte helsepersonellkort ikonring"/>
+          <p:cNvSpPr/>
+          <p:nvPr/>
+        </p:nvSpPr>
+        <p:spPr>
+          <a:xfrm>
+            <a:off x="3664458" y="1737360"/>
+            <a:ext cx="640080" cy="640080"/>
+          </a:xfrm>
+          <a:prstGeom prst="ellipse">
+            <a:avLst/>
+          </a:prstGeom>
+          <a:solidFill>
+            <a:schemeClr val="accent1"/>
+          </a:solidFill>
+          <a:ln/>
+        </p:spPr>
+      </p:sp>
+      <p:pic>
+        <p:nvPicPr>
+          <p:cNvPr id="10" name="Ekte helsepersonellkort ikon" descr="Ekte helsepersonellkort">    </p:cNvPr>
+          <p:cNvPicPr>
+            <a:picLocks noChangeAspect="1"/>
+          </p:cNvPicPr>
+          <p:nvPr/>
+        </p:nvPicPr>
+        <p:blipFill>
+          <a:blip r:embed="rId2"/>
+          <a:stretch>
+            <a:fillRect/>
+          </a:stretch>
+        </p:blipFill>
+        <p:spPr>
+          <a:xfrm>
+            <a:off x="3801618" y="1874520"/>
+            <a:ext cx="365760" cy="365760"/>
+          </a:xfrm>
+          <a:prstGeom prst="rect">
+            <a:avLst/>
+          </a:prstGeom>
+        </p:spPr>
+      </p:pic>
+      <p:sp>
+        <p:nvSpPr>
+          <p:cNvPr id="11" name="Text 7"/>
+          <p:cNvSpPr txBox="1"/>
+          <p:nvPr/>
+        </p:nvSpPr>
+        <p:spPr>
+          <a:xfrm>
+            <a:off x="3664458" y="2514600"/>
+            <a:ext cx="2018538" cy="594360"/>
+          </a:xfrm>
+          <a:prstGeom prst="rect">
+            <a:avLst/>
+          </a:prstGeom>
+          <a:noFill/>
+          <a:ln/>
+        </p:spPr>
+        <p:txBody>
+          <a:bodyPr wrap="square" lIns="0" tIns="0" rIns="0" bIns="0" rtlCol="0" anchor="t"/>
+          <a:lstStyle/>
+          <a:p>
+            <a:pPr indent="0" marL="0">
+              <a:buNone/>
+            </a:pPr>
+            <a:r>
+              <a:rPr lang="en-US" sz="1700" b="1" dirty="0">
+                <a:solidFill>
+                  <a:schemeClr val="tx2"/>
+                </a:solidFill>
+              </a:rPr>
+              <a:t>Ekte helsepersonellkort</a:t>
+            </a:r>
+            <a:endParaRPr lang="en-US" sz="1700" dirty="0"/>
+          </a:p>
+        </p:txBody>
+      </p:sp>
+      <p:sp>
+        <p:nvSpPr>
+          <p:cNvPr id="12" name="Text 8"/>
+          <p:cNvSpPr txBox="1"/>
+          <p:nvPr/>
+        </p:nvSpPr>
+        <p:spPr>
+          <a:xfrm>
+            <a:off x="3664458" y="3154680"/>
+            <a:ext cx="2018538" cy="1097280"/>
+          </a:xfrm>
+          <a:prstGeom prst="rect">
+            <a:avLst/>
+          </a:prstGeom>
+          <a:noFill/>
+          <a:ln/>
+        </p:spPr>
+        <p:txBody>
+          <a:bodyPr wrap="square" lIns="0" tIns="0" rIns="0" bIns="0" rtlCol="0" anchor="t"/>
+          <a:lstStyle/>
+          <a:p>
+            <a:pPr indent="0" marL="0">
+              <a:buNone/>
+            </a:pPr>
+            <a:r>
+              <a:rPr lang="en-US" sz="1400" dirty="0">
+                <a:solidFill>
+                  <a:schemeClr val="tx1"/>
+                </a:solidFill>
+              </a:rPr>
+              <a:t>Bytt simulert kortleser mot ekte (PKCS#11).</a:t>
+            </a:r>
+            <a:endParaRPr lang="en-US" sz="1400" dirty="0"/>
+          </a:p>
+        </p:txBody>
+      </p:sp>
+      <p:sp>
+        <p:nvSpPr>
+          <p:cNvPr id="13" name="Installasjon på disk kort"/>
+          <p:cNvSpPr/>
+          <p:nvPr/>
+        </p:nvSpPr>
+        <p:spPr>
+          <a:xfrm>
+            <a:off x="6231636" y="1463040"/>
+            <a:ext cx="2567178" cy="2926080"/>
+          </a:xfrm>
+          <a:prstGeom prst="roundRect">
+            <a:avLst>
+              <a:gd name="adj" fmla="val 4274"/>
+            </a:avLst>
+          </a:prstGeom>
+          <a:solidFill>
+            <a:schemeClr val="bg1"/>
+          </a:solidFill>
+          <a:ln w="9525">
+            <a:solidFill>
+              <a:srgbClr val="D2DDD5"/>
+            </a:solidFill>
+            <a:prstDash val="solid"/>
+          </a:ln>
+        </p:spPr>
+      </p:sp>
+      <p:sp>
+        <p:nvSpPr>
+          <p:cNvPr id="14" name="Installasjon på disk ikonring"/>
+          <p:cNvSpPr/>
+          <p:nvPr/>
+        </p:nvSpPr>
+        <p:spPr>
+          <a:xfrm>
+            <a:off x="6505956" y="1737360"/>
+            <a:ext cx="640080" cy="640080"/>
+          </a:xfrm>
+          <a:prstGeom prst="ellipse">
+            <a:avLst/>
+          </a:prstGeom>
+          <a:solidFill>
+            <a:schemeClr val="accent1"/>
+          </a:solidFill>
+          <a:ln/>
+        </p:spPr>
+      </p:sp>
+      <p:pic>
+        <p:nvPicPr>
+          <p:cNvPr id="15" name="Installasjon på disk ikon" descr="Installasjon på disk">    </p:cNvPr>
+          <p:cNvPicPr>
+            <a:picLocks noChangeAspect="1"/>
+          </p:cNvPicPr>
+          <p:nvPr/>
+        </p:nvPicPr>
+        <p:blipFill>
+          <a:blip r:embed="rId3"/>
+          <a:stretch>
+            <a:fillRect/>
+          </a:stretch>
+        </p:blipFill>
+        <p:spPr>
+          <a:xfrm>
+            <a:off x="6643116" y="1874520"/>
+            <a:ext cx="365760" cy="365760"/>
+          </a:xfrm>
+          <a:prstGeom prst="rect">
+            <a:avLst/>
+          </a:prstGeom>
+        </p:spPr>
+      </p:pic>
+      <p:sp>
+        <p:nvSpPr>
+          <p:cNvPr id="16" name="Text 11"/>
+          <p:cNvSpPr txBox="1"/>
+          <p:nvPr/>
+        </p:nvSpPr>
+        <p:spPr>
+          <a:xfrm>
+            <a:off x="6505956" y="2514600"/>
+            <a:ext cx="2018538" cy="594360"/>
+          </a:xfrm>
+          <a:prstGeom prst="rect">
+            <a:avLst/>
+          </a:prstGeom>
+          <a:noFill/>
+          <a:ln/>
+        </p:spPr>
+        <p:txBody>
+          <a:bodyPr wrap="square" lIns="0" tIns="0" rIns="0" bIns="0" rtlCol="0" anchor="t"/>
+          <a:lstStyle/>
+          <a:p>
+            <a:pPr indent="0" marL="0">
+              <a:buNone/>
+            </a:pPr>
+            <a:r>
+              <a:rPr lang="en-US" sz="1700" b="1" dirty="0">
+                <a:solidFill>
+                  <a:schemeClr val="tx2"/>
+                </a:solidFill>
+              </a:rPr>
+              <a:t>Installasjon på disk</a:t>
+            </a:r>
+            <a:endParaRPr lang="en-US" sz="1700" dirty="0"/>
+          </a:p>
+        </p:txBody>
+      </p:sp>
+      <p:sp>
+        <p:nvSpPr>
+          <p:cNvPr id="17" name="Text 12"/>
+          <p:cNvSpPr txBox="1"/>
+          <p:nvPr/>
+        </p:nvSpPr>
+        <p:spPr>
+          <a:xfrm>
+            <a:off x="6505956" y="3154680"/>
+            <a:ext cx="2018538" cy="1097280"/>
+          </a:xfrm>
+          <a:prstGeom prst="rect">
+            <a:avLst/>
+          </a:prstGeom>
+          <a:noFill/>
+          <a:ln/>
+        </p:spPr>
+        <p:txBody>
+          <a:bodyPr wrap="square" lIns="0" tIns="0" rIns="0" bIns="0" rtlCol="0" anchor="t"/>
+          <a:lstStyle/>
+          <a:p>
+            <a:pPr indent="0" marL="0">
+              <a:buNone/>
+            </a:pPr>
+            <a:r>
+              <a:rPr lang="en-US" sz="1400" dirty="0">
+                <a:solidFill>
+                  <a:schemeClr val="tx1"/>
+                </a:solidFill>
+              </a:rPr>
+              <a:t>Egen installasjonsmodus for IT, med full diskkryptering.</a:t>
+            </a:r>
+            <a:endParaRPr lang="en-US" sz="1400" dirty="0"/>
+          </a:p>
+        </p:txBody>
+      </p:sp>
+      <p:sp>
+        <p:nvSpPr>
+          <p:cNvPr id="18" name="Sikkerhetsrevisjon kort"/>
+          <p:cNvSpPr/>
+          <p:nvPr/>
+        </p:nvSpPr>
+        <p:spPr>
+          <a:xfrm>
+            <a:off x="9073134" y="1463040"/>
+            <a:ext cx="2567178" cy="2926080"/>
+          </a:xfrm>
+          <a:prstGeom prst="roundRect">
+            <a:avLst>
+              <a:gd name="adj" fmla="val 4274"/>
+            </a:avLst>
+          </a:prstGeom>
+          <a:solidFill>
+            <a:schemeClr val="bg1"/>
+          </a:solidFill>
+          <a:ln w="9525">
+            <a:solidFill>
+              <a:srgbClr val="D2DDD5"/>
+            </a:solidFill>
+            <a:prstDash val="solid"/>
+          </a:ln>
+        </p:spPr>
+      </p:sp>
+      <p:sp>
+        <p:nvSpPr>
+          <p:cNvPr id="19" name="Sikkerhetsrevisjon ikonring"/>
+          <p:cNvSpPr/>
+          <p:nvPr/>
+        </p:nvSpPr>
+        <p:spPr>
+          <a:xfrm>
+            <a:off x="9347454" y="1737360"/>
+            <a:ext cx="640080" cy="640080"/>
+          </a:xfrm>
+          <a:prstGeom prst="ellipse">
+            <a:avLst/>
+          </a:prstGeom>
+          <a:solidFill>
+            <a:schemeClr val="accent1"/>
+          </a:solidFill>
+          <a:ln/>
+        </p:spPr>
+      </p:sp>
+      <p:pic>
+        <p:nvPicPr>
+          <p:cNvPr id="20" name="Sikkerhetsrevisjon ikon" descr="Sikkerhetsrevisjon">    </p:cNvPr>
+          <p:cNvPicPr>
+            <a:picLocks noChangeAspect="1"/>
+          </p:cNvPicPr>
+          <p:nvPr/>
+        </p:nvPicPr>
+        <p:blipFill>
+          <a:blip r:embed="rId4"/>
+          <a:stretch>
+            <a:fillRect/>
+          </a:stretch>
+        </p:blipFill>
+        <p:spPr>
+          <a:xfrm>
+            <a:off x="9484614" y="1874520"/>
+            <a:ext cx="365760" cy="365760"/>
+          </a:xfrm>
+          <a:prstGeom prst="rect">
+            <a:avLst/>
+          </a:prstGeom>
+        </p:spPr>
+      </p:pic>
+      <p:sp>
+        <p:nvSpPr>
+          <p:cNvPr id="21" name="Text 15"/>
+          <p:cNvSpPr txBox="1"/>
+          <p:nvPr/>
+        </p:nvSpPr>
+        <p:spPr>
+          <a:xfrm>
+            <a:off x="9347454" y="2514600"/>
+            <a:ext cx="2018538" cy="594360"/>
+          </a:xfrm>
+          <a:prstGeom prst="rect">
+            <a:avLst/>
+          </a:prstGeom>
+          <a:noFill/>
+          <a:ln/>
+        </p:spPr>
+        <p:txBody>
+          <a:bodyPr wrap="square" lIns="0" tIns="0" rIns="0" bIns="0" rtlCol="0" anchor="t"/>
+          <a:lstStyle/>
+          <a:p>
+            <a:pPr indent="0" marL="0">
+              <a:buNone/>
+            </a:pPr>
+            <a:r>
+              <a:rPr lang="en-US" sz="1700" b="1" dirty="0">
+                <a:solidFill>
+                  <a:schemeClr val="tx2"/>
+                </a:solidFill>
+              </a:rPr>
+              <a:t>Sikkerhetsrevisjon</a:t>
+            </a:r>
+            <a:endParaRPr lang="en-US" sz="1700" dirty="0"/>
+          </a:p>
+        </p:txBody>
+      </p:sp>
+      <p:sp>
+        <p:nvSpPr>
+          <p:cNvPr id="22" name="Text 16"/>
+          <p:cNvSpPr txBox="1"/>
+          <p:nvPr/>
+        </p:nvSpPr>
+        <p:spPr>
+          <a:xfrm>
+            <a:off x="9347454" y="3154680"/>
+            <a:ext cx="2018538" cy="1097280"/>
+          </a:xfrm>
+          <a:prstGeom prst="rect">
+            <a:avLst/>
+          </a:prstGeom>
+          <a:noFill/>
+          <a:ln/>
+        </p:spPr>
+        <p:txBody>
+          <a:bodyPr wrap="square" lIns="0" tIns="0" rIns="0" bIns="0" rtlCol="0" anchor="t"/>
+          <a:lstStyle/>
+          <a:p>
+            <a:pPr indent="0" marL="0">
+              <a:buNone/>
+            </a:pPr>
+            <a:r>
+              <a:rPr lang="en-US" sz="1400" dirty="0">
+                <a:solidFill>
+                  <a:schemeClr val="tx1"/>
+                </a:solidFill>
+              </a:rPr>
+              <a:t>Ekstern penetrasjonstest, Normen, GDPR og MDR-vurdering.</a:t>
+            </a:r>
+            <a:endParaRPr lang="en-US" sz="1400" dirty="0"/>
+          </a:p>
+        </p:txBody>
+      </p:sp>
+      <p:sp>
+        <p:nvSpPr>
+          <p:cNvPr id="25" name="Slide Number Placeholder 0"/>
+          <p:cNvSpPr>
+            <a:spLocks noGrp="1"/>
+          </p:cNvSpPr>
+          <p:nvPr>
+            <p:ph type="sldNum" sz="quarter" idx="4294967295"/>
+          </p:nvPr>
+        </p:nvSpPr>
+        <p:spPr>
+          <a:xfrm>
+            <a:off x="11247120" y="6400800"/>
+            <a:ext cx="457200" cy="274320"/>
+          </a:xfrm>
+          <a:prstGeom prst="rect">
+            <a:avLst/>
+          </a:prstGeom>
+          <a:extLst>
+            <a:ext uri="{C572A759-6A51-4108-AA02-DFA0A04FC94B}">
+              <ma14:wrappingTextBoxFlag xmlns:ma14="http://schemas.microsoft.com/office/mac/drawingml/2011/main" val="0"/>
+            </a:ext>
+          </a:extLst>
+        </p:spPr>
+        <p:txBody>
+          <a:bodyPr/>
+          <a:lstStyle>
+            <a:lvl1pPr>
+              <a:defRPr sz="1000">
+                <a:solidFill>
+                  <a:schemeClr val="accent6"/>
+                </a:solidFill>
+              </a:defRPr>
+            </a:lvl1pPr>
+          </a:lstStyle>
+          <a:p>
+            <a:pPr algn="r"/>
+            <a:fld id="{F7021451-1387-4CA6-816F-3879F97B5CBC}" type="slidenum">
+              <a:rPr b="0" lang="en-US"/>
+              <a:t>34</a:t>
+            </a:fld>
+            <a:endParaRPr lang="en-US"/>
+          </a:p>
+        </p:txBody>
+      </p:sp>
+    </p:spTree>
+  </p:cSld>
+  <p:clrMapOvr>
+    <a:masterClrMapping/>
+  </p:clrMapOvr>
+</p:sld>
+</file>
+
 <file path=ppt/slides/slide4.xml><?xml version="1.0" encoding="utf-8"?>
 <p:sld xmlns:a="http://schemas.openxmlformats.org/drawingml/2006/main" xmlns:r="http://schemas.openxmlformats.org/officeDocument/2006/relationships" xmlns:p="http://schemas.openxmlformats.org/presentationml/2006/main">
   <p:cSld name="Slide 4">
@@ -12431,7 +15470,39 @@
                   <a:schemeClr val="tx1"/>
                 </a:solidFill>
               </a:rPr>
-              <a:t> du logges ut med en gang.</a:t>
+              <a:t> skjermen låses med en gang. Tilbake innen 15 minutter med samme kort og PIN, og ingenting er tapt.</a:t>
+            </a:r>
+            <a:endParaRPr lang="en-US" sz="1500" dirty="0"/>
+          </a:p>
+          <a:p>
+            <a:pPr marL="342900" indent="-342900">
+              <a:spcAft>
+                <a:spcPts val="800"/>
+              </a:spcAft>
+              <a:buSzPct val="100000"/>
+              <a:buChar char="•"/>
+            </a:pPr>
+            <a:r>
+              <a:rPr lang="en-US" sz="1500" b="1" dirty="0">
+                <a:solidFill>
+                  <a:schemeClr val="tx1"/>
+                </a:solidFill>
+              </a:rPr>
+              <a:t>Logger noen andre inn,</a:t>
+            </a:r>
+            <a:pPr indent="0" marL="0">
+              <a:spcAft>
+                <a:spcPts val="800"/>
+              </a:spcAft>
+              <a:buNone/>
+            </a:pPr>
+            <a:r>
+              <a:rPr lang="en-US" sz="1500" dirty="0">
+                <a:solidFill>
+                  <a:schemeClr val="tx1"/>
+                </a:solidFill>
+              </a:rPr>
+              <a:t> eller det går 15 minutter: økten avsluttes og hjemmemappen tømmes.</a:t>
             </a:r>
             <a:endParaRPr lang="en-US" sz="1500" dirty="0"/>
           </a:p>
@@ -12595,7 +15666,7 @@
                   <a:schemeClr val="tx2"/>
                 </a:solidFill>
               </a:rPr>
-              <a:t>Arbeidsstedet følger PC-en</a:t>
+              <a:t>Norsk eller engelsk</a:t>
             </a:r>
             <a:endParaRPr lang="en-US" sz="3200" dirty="0"/>
           </a:p>
@@ -12603,14 +15674,134 @@
       </p:sp>
       <p:sp>
         <p:nvSpPr>
-          <p:cNvPr id="3" name="Samme lege på Ullevål ramme"/>
+          <p:cNvPr id="3" name="Text 0"/>
           <p:cNvSpPr/>
-          <p:nvPr/>
+          <p:nvPr>
+            <p:ph idx="101" type="body" hasCustomPrompt="1"/>
+          </p:nvPr>
         </p:nvSpPr>
         <p:spPr>
           <a:xfrm>
             <a:off x="548640" y="1371600"/>
-            <a:ext cx="5394960" cy="3203258"/>
+            <a:ext cx="3657600" cy="4754880"/>
+          </a:xfrm>
+          <a:prstGeom prst="rect">
+            <a:avLst/>
+          </a:prstGeom>
+          <a:noFill/>
+          <a:ln/>
+        </p:spPr>
+        <p:txBody>
+          <a:bodyPr wrap="square" rtlCol="0" anchor="t"/>
+          <a:lstStyle/>
+          <a:p>
+            <a:pPr marL="342900" indent="-342900">
+              <a:spcAft>
+                <a:spcPts val="800"/>
+              </a:spcAft>
+              <a:buSzPct val="100000"/>
+              <a:buChar char="•"/>
+            </a:pPr>
+            <a:r>
+              <a:rPr lang="en-US" sz="1500" b="1" dirty="0">
+                <a:solidFill>
+                  <a:schemeClr val="tx1"/>
+                </a:solidFill>
+              </a:rPr>
+              <a:t>Én knapp</a:t>
+            </a:r>
+            <a:pPr indent="0" marL="0">
+              <a:spcAft>
+                <a:spcPts val="800"/>
+              </a:spcAft>
+              <a:buNone/>
+            </a:pPr>
+            <a:r>
+              <a:rPr lang="en-US" sz="1500" dirty="0">
+                <a:solidFill>
+                  <a:schemeClr val="tx1"/>
+                </a:solidFill>
+              </a:rPr>
+              <a:t> på innloggingsskjermen: Norsk eller English.</a:t>
+            </a:r>
+            <a:endParaRPr lang="en-US" sz="1500" dirty="0"/>
+          </a:p>
+          <a:p>
+            <a:pPr marL="342900" indent="-342900">
+              <a:spcAft>
+                <a:spcPts val="800"/>
+              </a:spcAft>
+              <a:buSzPct val="100000"/>
+              <a:buChar char="•"/>
+            </a:pPr>
+            <a:r>
+              <a:rPr lang="en-US" sz="1500" b="1" dirty="0">
+                <a:solidFill>
+                  <a:schemeClr val="tx1"/>
+                </a:solidFill>
+              </a:rPr>
+              <a:t>Hele økten følger med:</a:t>
+            </a:r>
+            <a:pPr indent="0" marL="0">
+              <a:spcAft>
+                <a:spcPts val="800"/>
+              </a:spcAft>
+              <a:buNone/>
+            </a:pPr>
+            <a:r>
+              <a:rPr lang="en-US" sz="1500" dirty="0">
+                <a:solidFill>
+                  <a:schemeClr val="tx1"/>
+                </a:solidFill>
+              </a:rPr>
+              <a:t> menyer, Startmenyen, nettleseren og Medicus-appene.</a:t>
+            </a:r>
+            <a:endParaRPr lang="en-US" sz="1500" dirty="0"/>
+          </a:p>
+          <a:p>
+            <a:pPr marL="342900" indent="-342900">
+              <a:spcAft>
+                <a:spcPts val="800"/>
+              </a:spcAft>
+              <a:buSzPct val="100000"/>
+              <a:buChar char="•"/>
+            </a:pPr>
+            <a:r>
+              <a:rPr lang="en-US" sz="1500" b="1" dirty="0">
+                <a:solidFill>
+                  <a:schemeClr val="tx1"/>
+                </a:solidFill>
+              </a:rPr>
+              <a:t>Nordsamisk tastatur:</a:t>
+            </a:r>
+            <a:pPr indent="0" marL="0">
+              <a:spcAft>
+                <a:spcPts val="800"/>
+              </a:spcAft>
+              <a:buNone/>
+            </a:pPr>
+            <a:r>
+              <a:rPr lang="en-US" sz="1500" dirty="0">
+                <a:solidFill>
+                  <a:schemeClr val="tx1"/>
+                </a:solidFill>
+              </a:rPr>
+              <a:t> Alt+Shift bytter mellom norsk og samisk oppsett.</a:t>
+            </a:r>
+            <a:endParaRPr lang="en-US" sz="1500" dirty="0"/>
+          </a:p>
+        </p:txBody>
+      </p:sp>
+      <p:sp>
+        <p:nvSpPr>
+          <p:cNvPr id="4" name="Norsk eller engelsk ramme"/>
+          <p:cNvSpPr/>
+          <p:nvPr/>
+        </p:nvSpPr>
+        <p:spPr>
+          <a:xfrm>
+            <a:off x="4526280" y="1371600"/>
+            <a:ext cx="7132320" cy="4457700"/>
           </a:xfrm>
           <a:prstGeom prst="rect">
             <a:avLst/>
@@ -12635,7 +15826,7 @@
       </p:sp>
       <p:pic>
         <p:nvPicPr>
-          <p:cNvPr id="4" name="Samme lege på Ullevål" descr="Samme lege på Ullevål">    </p:cNvPr>
+          <p:cNvPr id="5" name="Norsk eller engelsk" descr="Norsk eller engelsk">    </p:cNvPr>
           <p:cNvPicPr>
             <a:picLocks noChangeAspect="1"/>
           </p:cNvPicPr>
@@ -12649,178 +15840,14 @@
         </p:blipFill>
         <p:spPr>
           <a:xfrm>
-            <a:off x="548640" y="1371600"/>
-            <a:ext cx="5394960" cy="3203258"/>
+            <a:off x="4526280" y="1371600"/>
+            <a:ext cx="7132320" cy="4457700"/>
           </a:xfrm>
           <a:prstGeom prst="rect">
             <a:avLst/>
           </a:prstGeom>
         </p:spPr>
       </p:pic>
-      <p:sp>
-        <p:nvSpPr>
-          <p:cNvPr id="5" name="Samme lege på St. Olavs ramme"/>
-          <p:cNvSpPr/>
-          <p:nvPr/>
-        </p:nvSpPr>
-        <p:spPr>
-          <a:xfrm>
-            <a:off x="6245352" y="1371600"/>
-            <a:ext cx="5394960" cy="3203258"/>
-          </a:xfrm>
-          <a:prstGeom prst="rect">
-            <a:avLst/>
-          </a:prstGeom>
-          <a:solidFill>
-            <a:schemeClr val="bg1"/>
-          </a:solidFill>
-          <a:ln w="9525">
-            <a:solidFill>
-              <a:srgbClr val="D2DDD5"/>
-            </a:solidFill>
-            <a:prstDash val="solid"/>
-          </a:ln>
-          <a:effectLst>
-            <a:outerShdw sx="100000" sy="100000" kx="0" ky="0" algn="bl" rotWithShape="0" blurRad="101600" dist="38100" dir="5400000">
-              <a:srgbClr val="000000">
-                <a:alpha val="25000"/>
-              </a:srgbClr>
-            </a:outerShdw>
-          </a:effectLst>
-        </p:spPr>
-      </p:sp>
-      <p:pic>
-        <p:nvPicPr>
-          <p:cNvPr id="6" name="Samme lege på St. Olavs" descr="Samme lege på St. Olavs">    </p:cNvPr>
-          <p:cNvPicPr>
-            <a:picLocks noChangeAspect="1"/>
-          </p:cNvPicPr>
-          <p:nvPr/>
-        </p:nvPicPr>
-        <p:blipFill>
-          <a:blip r:embed="rId2"/>
-          <a:stretch>
-            <a:fillRect/>
-          </a:stretch>
-        </p:blipFill>
-        <p:spPr>
-          <a:xfrm>
-            <a:off x="6245352" y="1371600"/>
-            <a:ext cx="5394960" cy="3203258"/>
-          </a:xfrm>
-          <a:prstGeom prst="rect">
-            <a:avLst/>
-          </a:prstGeom>
-        </p:spPr>
-      </p:pic>
-      <p:sp>
-        <p:nvSpPr>
-          <p:cNvPr id="7" name="Text 3"/>
-          <p:cNvSpPr txBox="1"/>
-          <p:nvPr/>
-        </p:nvSpPr>
-        <p:spPr>
-          <a:xfrm>
-            <a:off x="548640" y="4892040"/>
-            <a:ext cx="5394960" cy="365760"/>
-          </a:xfrm>
-          <a:prstGeom prst="rect">
-            <a:avLst/>
-          </a:prstGeom>
-          <a:noFill/>
-          <a:ln/>
-        </p:spPr>
-        <p:txBody>
-          <a:bodyPr wrap="square" rtlCol="0" anchor="ctr"/>
-          <a:lstStyle/>
-          <a:p>
-            <a:pPr indent="0" marL="0">
-              <a:buNone/>
-            </a:pPr>
-            <a:r>
-              <a:rPr lang="en-US" sz="1500" b="1" dirty="0">
-                <a:solidFill>
-                  <a:schemeClr val="tx2"/>
-                </a:solidFill>
-              </a:rPr>
-              <a:t>Ullevål: Overlege, kardiologi</a:t>
-            </a:r>
-            <a:endParaRPr lang="en-US" sz="1500" dirty="0"/>
-          </a:p>
-        </p:txBody>
-      </p:sp>
-      <p:sp>
-        <p:nvSpPr>
-          <p:cNvPr id="8" name="Text 4"/>
-          <p:cNvSpPr txBox="1"/>
-          <p:nvPr/>
-        </p:nvSpPr>
-        <p:spPr>
-          <a:xfrm>
-            <a:off x="6245352" y="4892040"/>
-            <a:ext cx="5394960" cy="365760"/>
-          </a:xfrm>
-          <a:prstGeom prst="rect">
-            <a:avLst/>
-          </a:prstGeom>
-          <a:noFill/>
-          <a:ln/>
-        </p:spPr>
-        <p:txBody>
-          <a:bodyPr wrap="square" rtlCol="0" anchor="ctr"/>
-          <a:lstStyle/>
-          <a:p>
-            <a:pPr indent="0" marL="0">
-              <a:buNone/>
-            </a:pPr>
-            <a:r>
-              <a:rPr lang="en-US" sz="1500" b="1" dirty="0">
-                <a:solidFill>
-                  <a:schemeClr val="tx2"/>
-                </a:solidFill>
-              </a:rPr>
-              <a:t>St. Olavs: Gjesteoverlege, kardiologi</a:t>
-            </a:r>
-            <a:endParaRPr lang="en-US" sz="1500" dirty="0"/>
-          </a:p>
-        </p:txBody>
-      </p:sp>
-      <p:sp>
-        <p:nvSpPr>
-          <p:cNvPr id="9" name="Text 5"/>
-          <p:cNvSpPr txBox="1"/>
-          <p:nvPr/>
-        </p:nvSpPr>
-        <p:spPr>
-          <a:xfrm>
-            <a:off x="548640" y="5440680"/>
-            <a:ext cx="11064240" cy="457200"/>
-          </a:xfrm>
-          <a:prstGeom prst="rect">
-            <a:avLst/>
-          </a:prstGeom>
-          <a:noFill/>
-          <a:ln/>
-        </p:spPr>
-        <p:txBody>
-          <a:bodyPr wrap="square" rtlCol="0" anchor="ctr"/>
-          <a:lstStyle/>
-          <a:p>
-            <a:pPr indent="0" marL="0">
-              <a:buNone/>
-            </a:pPr>
-            <a:r>
-              <a:rPr lang="en-US" sz="1500" dirty="0">
-                <a:solidFill>
-                  <a:schemeClr val="tx1"/>
-                </a:solidFill>
-              </a:rPr>
-              <a:t>Kortet sier hvem du er. PC-en sier hvor du er. Stillingen hentes fra det arbeidsstedet.</a:t>
-            </a:r>
-            <a:endParaRPr lang="en-US" sz="1500" dirty="0"/>
-          </a:p>
-        </p:txBody>
-      </p:sp>
       <p:sp>
         <p:nvSpPr>
           <p:cNvPr id="25" name="Slide Number Placeholder 0"/>
